--- a/Assignments/Week 8/Presentation.pptx
+++ b/Assignments/Week 8/Presentation.pptx
@@ -1,41 +1,43 @@
 
 <file path=ppt/presentation.xml><?xml version="1.0" encoding="utf-8"?>
-<p:presentation xmlns:a="http://schemas.openxmlformats.org/drawingml/2006/main" xmlns:r="http://schemas.openxmlformats.org/officeDocument/2006/relationships" xmlns:p="http://schemas.openxmlformats.org/presentationml/2006/main">
+<p:presentation xmlns:a="http://schemas.openxmlformats.org/drawingml/2006/main" xmlns:p="http://schemas.openxmlformats.org/presentationml/2006/main" xmlns:r="http://schemas.openxmlformats.org/officeDocument/2006/relationships" xmlns:p14="http://schemas.microsoft.com/office/powerpoint/2010/main" xmlns:p15="http://schemas.microsoft.com/office/powerpoint/2012/main" xmlns:mc="http://schemas.openxmlformats.org/markup-compatibility/2006">
   <p:sldMasterIdLst>
-    <p:sldMasterId id="2147483648" r:id="rId1"/>
+    <p:sldMasterId id="2147483648" r:id="rId2"/>
   </p:sldMasterIdLst>
   <p:sldIdLst>
-    <p:sldId id="256" r:id="rId6"/>
-    <p:sldId id="257" r:id="rId7"/>
-    <p:sldId id="258" r:id="rId8"/>
-    <p:sldId id="259" r:id="rId9"/>
-    <p:sldId id="260" r:id="rId10"/>
-    <p:sldId id="261" r:id="rId11"/>
-    <p:sldId id="262" r:id="rId12"/>
-    <p:sldId id="263" r:id="rId13"/>
-    <p:sldId id="264" r:id="rId14"/>
-    <p:sldId id="265" r:id="rId15"/>
-    <p:sldId id="266" r:id="rId16"/>
-    <p:sldId id="267" r:id="rId17"/>
-    <p:sldId id="268" r:id="rId18"/>
-    <p:sldId id="269" r:id="rId19"/>
-    <p:sldId id="270" r:id="rId20"/>
-    <p:sldId id="271" r:id="rId21"/>
-    <p:sldId id="272" r:id="rId22"/>
+    <p:sldId id="256" r:id="rId3"/>
+    <p:sldId id="257" r:id="rId4"/>
+    <p:sldId id="258" r:id="rId5"/>
+    <p:sldId id="259" r:id="rId6"/>
+    <p:sldId id="260" r:id="rId7"/>
+    <p:sldId id="261" r:id="rId8"/>
+    <p:sldId id="262" r:id="rId9"/>
+    <p:sldId id="263" r:id="rId10"/>
+    <p:sldId id="264" r:id="rId11"/>
+    <p:sldId id="265" r:id="rId12"/>
+    <p:sldId id="266" r:id="rId13"/>
+    <p:sldId id="267" r:id="rId14"/>
+    <p:sldId id="268" r:id="rId15"/>
+    <p:sldId id="269" r:id="rId16"/>
+    <p:sldId id="270" r:id="rId17"/>
+    <p:sldId id="271" r:id="rId18"/>
+    <p:sldId id="272" r:id="rId19"/>
   </p:sldIdLst>
   <p:sldSz cx="13411200" cy="10363200"/>
-  <p:notesSz cx="13411200" cy="10363200"/>
-  <p:defaultTextStyle>
-    <a:defPPr>
-      <a:defRPr kern="0"/>
-    </a:defPPr>
-  </p:defaultTextStyle>
+  <p:notesSz cx="7772400" cy="10058400"/>
 </p:presentation>
 </file>
 
 <file path=ppt/slideLayouts/slideLayout1.xml><?xml version="1.0" encoding="utf-8"?>
-<p:sldLayout xmlns:a="http://schemas.openxmlformats.org/drawingml/2006/main" xmlns:r="http://schemas.openxmlformats.org/officeDocument/2006/relationships" xmlns:p="http://schemas.openxmlformats.org/presentationml/2006/main" preserve="1" type="obj">
+<p:sldLayout xmlns:a="http://schemas.openxmlformats.org/drawingml/2006/main" xmlns:p="http://schemas.openxmlformats.org/presentationml/2006/main" xmlns:r="http://schemas.openxmlformats.org/officeDocument/2006/relationships" xmlns:p14="http://schemas.microsoft.com/office/powerpoint/2010/main" xmlns:p15="http://schemas.microsoft.com/office/powerpoint/2012/main" xmlns:mc="http://schemas.openxmlformats.org/markup-compatibility/2006" type="obj" preserve="1">
   <p:cSld name="Title Slide">
+    <p:bg>
+      <p:bgPr>
+        <a:solidFill>
+          <a:schemeClr val="lt1"/>
+        </a:solidFill>
+      </p:bgPr>
+    </p:bg>
     <p:spTree>
       <p:nvGrpSpPr>
         <p:cNvPr id="1" name=""/>
@@ -52,172 +54,280 @@
       </p:grpSpPr>
       <p:sp>
         <p:nvSpPr>
-          <p:cNvPr id="2" name="Holder 2"/>
+          <p:cNvPr id="2" name="PlaceHolder 1"/>
           <p:cNvSpPr>
             <a:spLocks noGrp="1"/>
           </p:cNvSpPr>
           <p:nvPr>
-            <p:ph type="ctrTitle"/>
+            <p:ph type="title"/>
           </p:nvPr>
         </p:nvSpPr>
         <p:spPr>
           <a:xfrm>
-            <a:off x="1005840" y="3212592"/>
-            <a:ext cx="11399520" cy="2176272"/>
-          </a:xfrm>
-          <a:prstGeom prst="rect">
-            <a:avLst/>
-          </a:prstGeom>
+            <a:off x="1005840" y="3212640"/>
+            <a:ext cx="11399040" cy="754560"/>
+          </a:xfrm>
+          <a:prstGeom prst="rect">
+            <a:avLst/>
+          </a:prstGeom>
+          <a:noFill/>
+          <a:ln w="0">
+            <a:noFill/>
+          </a:ln>
         </p:spPr>
         <p:txBody>
-          <a:bodyPr wrap="square" lIns="0" tIns="0" rIns="0" bIns="0">
+          <a:bodyPr lIns="0" rIns="0" tIns="0" bIns="0" anchor="t">
             <a:spAutoFit/>
           </a:bodyPr>
-          <a:lstStyle>
-            <a:lvl1pPr>
-              <a:defRPr sz="4950" b="0" i="0">
-                <a:solidFill>
-                  <a:schemeClr val="tx1"/>
-                </a:solidFill>
-                <a:latin typeface="Cambria"/>
-                <a:cs typeface="Cambria"/>
-              </a:defRPr>
-            </a:lvl1pPr>
-          </a:lstStyle>
-          <a:p/>
-        </p:txBody>
-      </p:sp>
-      <p:sp>
-        <p:nvSpPr>
-          <p:cNvPr id="3" name="Holder 3"/>
-          <p:cNvSpPr>
-            <a:spLocks noGrp="1"/>
-          </p:cNvSpPr>
-          <p:nvPr>
-            <p:ph type="subTitle" idx="4"/>
-          </p:nvPr>
-        </p:nvSpPr>
-        <p:spPr>
-          <a:xfrm>
-            <a:off x="2011680" y="5803392"/>
-            <a:ext cx="9387840" cy="2590800"/>
-          </a:xfrm>
-          <a:prstGeom prst="rect">
-            <a:avLst/>
-          </a:prstGeom>
-        </p:spPr>
-        <p:txBody>
-          <a:bodyPr wrap="square" lIns="0" tIns="0" rIns="0" bIns="0">
-            <a:spAutoFit/>
-          </a:bodyPr>
-          <a:lstStyle>
-            <a:lvl1pPr>
-              <a:defRPr/>
-            </a:lvl1pPr>
-          </a:lstStyle>
-          <a:p/>
-        </p:txBody>
-      </p:sp>
-      <p:sp>
-        <p:nvSpPr>
-          <p:cNvPr id="4" name="Holder 4"/>
-          <p:cNvSpPr>
-            <a:spLocks noGrp="1"/>
-          </p:cNvSpPr>
-          <p:nvPr>
-            <p:ph type="ftr" idx="5" sz="quarter"/>
-          </p:nvPr>
-        </p:nvSpPr>
-        <p:spPr/>
-        <p:txBody>
-          <a:bodyPr lIns="0" tIns="0" rIns="0" bIns="0"/>
-          <a:lstStyle>
-            <a:lvl1pPr algn="ctr">
-              <a:defRPr>
-                <a:solidFill>
-                  <a:schemeClr val="tx1">
-                    <a:tint val="75000"/>
-                  </a:schemeClr>
-                </a:solidFill>
-              </a:defRPr>
-            </a:lvl1pPr>
-          </a:lstStyle>
-          <a:p/>
-        </p:txBody>
-      </p:sp>
-      <p:sp>
-        <p:nvSpPr>
-          <p:cNvPr id="5" name="Holder 5"/>
-          <p:cNvSpPr>
-            <a:spLocks noGrp="1"/>
-          </p:cNvSpPr>
-          <p:nvPr>
-            <p:ph type="dt" idx="6" sz="half"/>
-          </p:nvPr>
-        </p:nvSpPr>
-        <p:spPr/>
-        <p:txBody>
-          <a:bodyPr lIns="0" tIns="0" rIns="0" bIns="0"/>
-          <a:lstStyle>
-            <a:lvl1pPr algn="l">
-              <a:defRPr>
-                <a:solidFill>
-                  <a:schemeClr val="tx1">
-                    <a:tint val="75000"/>
-                  </a:schemeClr>
-                </a:solidFill>
-              </a:defRPr>
-            </a:lvl1pPr>
-          </a:lstStyle>
           <a:p>
-            <a:fld id="{1D8BD707-D9CF-40AE-B4C6-C98DA3205C09}" type="datetimeFigureOut">
-              <a:rPr lang="en-US"/>
-            </a:fld>
+            <a:pPr indent="0">
+              <a:buNone/>
+            </a:pPr>
+            <a:r>
+              <a:rPr b="0" lang="en-US" sz="4950" strike="noStrike" u="none">
+                <a:solidFill>
+                  <a:srgbClr val="000000"/>
+                </a:solidFill>
+                <a:effectLst/>
+                <a:uFillTx/>
+                <a:latin typeface="Calibri"/>
+              </a:rPr>
+              <a:t>Click to edit the title text format</a:t>
+            </a:r>
+            <a:endParaRPr b="0" lang="en-US" sz="4950" strike="noStrike" u="none">
+              <a:solidFill>
+                <a:srgbClr val="000000"/>
+              </a:solidFill>
+              <a:effectLst/>
+              <a:uFillTx/>
+              <a:latin typeface="Calibri"/>
+            </a:endParaRPr>
           </a:p>
         </p:txBody>
       </p:sp>
       <p:sp>
         <p:nvSpPr>
-          <p:cNvPr id="6" name="Holder 6"/>
+          <p:cNvPr id="3" name="PlaceHolder 2"/>
           <p:cNvSpPr>
             <a:spLocks noGrp="1"/>
           </p:cNvSpPr>
           <p:nvPr>
-            <p:ph type="sldNum" idx="7" sz="quarter"/>
+            <p:ph type="ftr" idx="1"/>
           </p:nvPr>
         </p:nvSpPr>
-        <p:spPr/>
+        <p:spPr>
+          <a:xfrm>
+            <a:off x="4559760" y="9637920"/>
+            <a:ext cx="4291200" cy="517680"/>
+          </a:xfrm>
+          <a:prstGeom prst="rect">
+            <a:avLst/>
+          </a:prstGeom>
+          <a:noFill/>
+          <a:ln w="0">
+            <a:noFill/>
+          </a:ln>
+        </p:spPr>
         <p:txBody>
-          <a:bodyPr lIns="0" tIns="0" rIns="0" bIns="0"/>
+          <a:bodyPr lIns="0" rIns="0" tIns="0" bIns="0" anchor="t">
+            <a:noAutofit/>
+          </a:bodyPr>
           <a:lstStyle>
-            <a:lvl1pPr algn="r">
-              <a:defRPr>
-                <a:solidFill>
-                  <a:schemeClr val="tx1">
-                    <a:tint val="75000"/>
-                  </a:schemeClr>
-                </a:solidFill>
+            <a:lvl1pPr indent="0" algn="ctr">
+              <a:buNone/>
+              <a:defRPr b="0" lang="en-US" sz="1400" strike="noStrike" u="none">
+                <a:solidFill>
+                  <a:srgbClr val="000000"/>
+                </a:solidFill>
+                <a:effectLst/>
+                <a:uFillTx/>
+                <a:latin typeface="Times New Roman"/>
               </a:defRPr>
             </a:lvl1pPr>
           </a:lstStyle>
           <a:p>
-            <a:fld id="{B6F15528-21DE-4FAA-801E-634DDDAF4B2B}" type="slidenum">
-              <a:t>#</a:t>
+            <a:pPr indent="0" algn="ctr">
+              <a:buNone/>
+            </a:pPr>
+            <a:r>
+              <a:rPr b="0" lang="en-US" sz="1400" strike="noStrike" u="none">
+                <a:solidFill>
+                  <a:srgbClr val="000000"/>
+                </a:solidFill>
+                <a:effectLst/>
+                <a:uFillTx/>
+                <a:latin typeface="Times New Roman"/>
+              </a:rPr>
+              <a:t>&lt;footer&gt;</a:t>
+            </a:r>
+            <a:endParaRPr b="0" lang="en-US" sz="1400" strike="noStrike" u="none">
+              <a:solidFill>
+                <a:srgbClr val="000000"/>
+              </a:solidFill>
+              <a:effectLst/>
+              <a:uFillTx/>
+              <a:latin typeface="Times New Roman"/>
+            </a:endParaRPr>
+          </a:p>
+        </p:txBody>
+      </p:sp>
+      <p:sp>
+        <p:nvSpPr>
+          <p:cNvPr id="4" name="PlaceHolder 3"/>
+          <p:cNvSpPr>
+            <a:spLocks noGrp="1"/>
+          </p:cNvSpPr>
+          <p:nvPr>
+            <p:ph type="dt" idx="2"/>
+          </p:nvPr>
+        </p:nvSpPr>
+        <p:spPr>
+          <a:xfrm>
+            <a:off x="670680" y="9637920"/>
+            <a:ext cx="3084120" cy="517680"/>
+          </a:xfrm>
+          <a:prstGeom prst="rect">
+            <a:avLst/>
+          </a:prstGeom>
+          <a:noFill/>
+          <a:ln w="0">
+            <a:noFill/>
+          </a:ln>
+        </p:spPr>
+        <p:txBody>
+          <a:bodyPr lIns="0" rIns="0" tIns="0" bIns="0" anchor="t">
+            <a:noAutofit/>
+          </a:bodyPr>
+          <a:lstStyle>
+            <a:lvl1pPr indent="0">
+              <a:buNone/>
+              <a:defRPr b="0" lang="en-US" sz="1400" strike="noStrike" u="none">
+                <a:solidFill>
+                  <a:srgbClr val="000000"/>
+                </a:solidFill>
+                <a:effectLst/>
+                <a:uFillTx/>
+                <a:latin typeface="Times New Roman"/>
+              </a:defRPr>
+            </a:lvl1pPr>
+          </a:lstStyle>
+          <a:p>
+            <a:pPr indent="0">
+              <a:buNone/>
+            </a:pPr>
+            <a:r>
+              <a:rPr b="0" lang="en-US" sz="1400" strike="noStrike" u="none">
+                <a:solidFill>
+                  <a:srgbClr val="000000"/>
+                </a:solidFill>
+                <a:effectLst/>
+                <a:uFillTx/>
+                <a:latin typeface="Times New Roman"/>
+              </a:rPr>
+              <a:t>&lt;date/time&gt;</a:t>
+            </a:r>
+            <a:endParaRPr b="0" lang="en-US" sz="1400" strike="noStrike" u="none">
+              <a:solidFill>
+                <a:srgbClr val="000000"/>
+              </a:solidFill>
+              <a:effectLst/>
+              <a:uFillTx/>
+              <a:latin typeface="Times New Roman"/>
+            </a:endParaRPr>
+          </a:p>
+        </p:txBody>
+      </p:sp>
+      <p:sp>
+        <p:nvSpPr>
+          <p:cNvPr id="5" name="PlaceHolder 4"/>
+          <p:cNvSpPr>
+            <a:spLocks noGrp="1"/>
+          </p:cNvSpPr>
+          <p:nvPr>
+            <p:ph type="sldNum" idx="3"/>
+          </p:nvPr>
+        </p:nvSpPr>
+        <p:spPr>
+          <a:xfrm>
+            <a:off x="9655920" y="9637920"/>
+            <a:ext cx="3084120" cy="517680"/>
+          </a:xfrm>
+          <a:prstGeom prst="rect">
+            <a:avLst/>
+          </a:prstGeom>
+          <a:noFill/>
+          <a:ln w="0">
+            <a:noFill/>
+          </a:ln>
+        </p:spPr>
+        <p:txBody>
+          <a:bodyPr lIns="0" rIns="0" tIns="0" bIns="0" anchor="t">
+            <a:noAutofit/>
+          </a:bodyPr>
+          <a:lstStyle>
+            <a:lvl1pPr indent="0" algn="r">
+              <a:lnSpc>
+                <a:spcPct val="100000"/>
+              </a:lnSpc>
+              <a:buNone/>
+              <a:defRPr b="0" lang="en-US" sz="1400" strike="noStrike" u="none">
+                <a:solidFill>
+                  <a:schemeClr val="dk1">
+                    <a:tint val="75000"/>
+                  </a:schemeClr>
+                </a:solidFill>
+                <a:effectLst/>
+                <a:uFillTx/>
+                <a:latin typeface="Times New Roman"/>
+              </a:defRPr>
+            </a:lvl1pPr>
+          </a:lstStyle>
+          <a:p>
+            <a:pPr indent="0" algn="r">
+              <a:lnSpc>
+                <a:spcPct val="100000"/>
+              </a:lnSpc>
+              <a:buNone/>
+            </a:pPr>
+            <a:fld id="{87431586-1F27-416D-BC3D-30F7140C6984}" type="slidenum">
+              <a:rPr b="0" lang="en-US" sz="1400" strike="noStrike" u="none">
+                <a:solidFill>
+                  <a:schemeClr val="dk1">
+                    <a:tint val="75000"/>
+                  </a:schemeClr>
+                </a:solidFill>
+                <a:effectLst/>
+                <a:uFillTx/>
+                <a:latin typeface="Times New Roman"/>
+              </a:rPr>
+              <a:t>&lt;number&gt;</a:t>
             </a:fld>
+            <a:endParaRPr b="0" lang="en-US" sz="1400" strike="noStrike" u="none">
+              <a:solidFill>
+                <a:srgbClr val="000000"/>
+              </a:solidFill>
+              <a:effectLst/>
+              <a:uFillTx/>
+              <a:latin typeface="Times New Roman"/>
+            </a:endParaRPr>
           </a:p>
         </p:txBody>
       </p:sp>
     </p:spTree>
   </p:cSld>
-  <p:clrMapOvr>
-    <a:masterClrMapping/>
-  </p:clrMapOvr>
 </p:sldLayout>
 </file>
 
 <file path=ppt/slideLayouts/slideLayout2.xml><?xml version="1.0" encoding="utf-8"?>
-<p:sldLayout xmlns:a="http://schemas.openxmlformats.org/drawingml/2006/main" xmlns:r="http://schemas.openxmlformats.org/officeDocument/2006/relationships" xmlns:p="http://schemas.openxmlformats.org/presentationml/2006/main" preserve="1" type="obj">
+<p:sldLayout xmlns:a="http://schemas.openxmlformats.org/drawingml/2006/main" xmlns:p="http://schemas.openxmlformats.org/presentationml/2006/main" xmlns:r="http://schemas.openxmlformats.org/officeDocument/2006/relationships" xmlns:p14="http://schemas.microsoft.com/office/powerpoint/2010/main" xmlns:p15="http://schemas.microsoft.com/office/powerpoint/2012/main" xmlns:mc="http://schemas.openxmlformats.org/markup-compatibility/2006" type="obj" preserve="1">
   <p:cSld name="Title and Content">
+    <p:bg>
+      <p:bgPr>
+        <a:solidFill>
+          <a:schemeClr val="lt1"/>
+        </a:solidFill>
+      </p:bgPr>
+    </p:bg>
     <p:spTree>
       <p:nvGrpSpPr>
         <p:cNvPr id="1" name=""/>
@@ -234,7 +344,7 @@
       </p:grpSpPr>
       <p:sp>
         <p:nvSpPr>
-          <p:cNvPr id="2" name="Holder 2"/>
+          <p:cNvPr id="6" name="PlaceHolder 1"/>
           <p:cNvSpPr>
             <a:spLocks noGrp="1"/>
           </p:cNvSpPr>
@@ -242,144 +352,525 @@
             <p:ph type="title"/>
           </p:nvPr>
         </p:nvSpPr>
-        <p:spPr/>
+        <p:spPr>
+          <a:xfrm>
+            <a:off x="856800" y="530640"/>
+            <a:ext cx="2056320" cy="781200"/>
+          </a:xfrm>
+          <a:prstGeom prst="rect">
+            <a:avLst/>
+          </a:prstGeom>
+          <a:noFill/>
+          <a:ln w="0">
+            <a:noFill/>
+          </a:ln>
+        </p:spPr>
         <p:txBody>
-          <a:bodyPr lIns="0" tIns="0" rIns="0" bIns="0"/>
-          <a:lstStyle>
-            <a:lvl1pPr>
-              <a:defRPr sz="4950" b="0" i="0">
-                <a:solidFill>
-                  <a:schemeClr val="tx1"/>
-                </a:solidFill>
-                <a:latin typeface="Cambria"/>
-                <a:cs typeface="Cambria"/>
-              </a:defRPr>
-            </a:lvl1pPr>
-          </a:lstStyle>
-          <a:p/>
-        </p:txBody>
-      </p:sp>
-      <p:sp>
-        <p:nvSpPr>
-          <p:cNvPr id="3" name="Holder 3"/>
-          <p:cNvSpPr>
-            <a:spLocks noGrp="1"/>
-          </p:cNvSpPr>
-          <p:nvPr>
-            <p:ph type="body" idx="1"/>
-          </p:nvPr>
-        </p:nvSpPr>
-        <p:spPr/>
-        <p:txBody>
-          <a:bodyPr lIns="0" tIns="0" rIns="0" bIns="0"/>
-          <a:lstStyle>
-            <a:lvl1pPr>
-              <a:defRPr/>
-            </a:lvl1pPr>
-          </a:lstStyle>
-          <a:p/>
-        </p:txBody>
-      </p:sp>
-      <p:sp>
-        <p:nvSpPr>
-          <p:cNvPr id="4" name="Holder 4"/>
-          <p:cNvSpPr>
-            <a:spLocks noGrp="1"/>
-          </p:cNvSpPr>
-          <p:nvPr>
-            <p:ph type="ftr" idx="5" sz="quarter"/>
-          </p:nvPr>
-        </p:nvSpPr>
-        <p:spPr/>
-        <p:txBody>
-          <a:bodyPr lIns="0" tIns="0" rIns="0" bIns="0"/>
-          <a:lstStyle>
-            <a:lvl1pPr algn="ctr">
-              <a:defRPr>
-                <a:solidFill>
-                  <a:schemeClr val="tx1">
-                    <a:tint val="75000"/>
-                  </a:schemeClr>
-                </a:solidFill>
-              </a:defRPr>
-            </a:lvl1pPr>
-          </a:lstStyle>
-          <a:p/>
-        </p:txBody>
-      </p:sp>
-      <p:sp>
-        <p:nvSpPr>
-          <p:cNvPr id="5" name="Holder 5"/>
-          <p:cNvSpPr>
-            <a:spLocks noGrp="1"/>
-          </p:cNvSpPr>
-          <p:nvPr>
-            <p:ph type="dt" idx="6" sz="half"/>
-          </p:nvPr>
-        </p:nvSpPr>
-        <p:spPr/>
-        <p:txBody>
-          <a:bodyPr lIns="0" tIns="0" rIns="0" bIns="0"/>
-          <a:lstStyle>
-            <a:lvl1pPr algn="l">
-              <a:defRPr>
-                <a:solidFill>
-                  <a:schemeClr val="tx1">
-                    <a:tint val="75000"/>
-                  </a:schemeClr>
-                </a:solidFill>
-              </a:defRPr>
-            </a:lvl1pPr>
-          </a:lstStyle>
+          <a:bodyPr lIns="0" rIns="0" tIns="0" bIns="0" anchor="t">
+            <a:noAutofit/>
+          </a:bodyPr>
           <a:p>
-            <a:fld id="{1D8BD707-D9CF-40AE-B4C6-C98DA3205C09}" type="datetimeFigureOut">
-              <a:rPr lang="en-US"/>
-            </a:fld>
+            <a:pPr indent="0">
+              <a:buNone/>
+            </a:pPr>
+            <a:r>
+              <a:rPr b="0" lang="en-US" sz="4950" strike="noStrike" u="none">
+                <a:solidFill>
+                  <a:srgbClr val="000000"/>
+                </a:solidFill>
+                <a:effectLst/>
+                <a:uFillTx/>
+                <a:latin typeface="Calibri"/>
+              </a:rPr>
+              <a:t>Click to edit the title text format</a:t>
+            </a:r>
+            <a:endParaRPr b="0" lang="en-US" sz="4950" strike="noStrike" u="none">
+              <a:solidFill>
+                <a:srgbClr val="000000"/>
+              </a:solidFill>
+              <a:effectLst/>
+              <a:uFillTx/>
+              <a:latin typeface="Calibri"/>
+            </a:endParaRPr>
           </a:p>
         </p:txBody>
       </p:sp>
       <p:sp>
         <p:nvSpPr>
-          <p:cNvPr id="6" name="Holder 6"/>
+          <p:cNvPr id="7" name="PlaceHolder 2"/>
           <p:cNvSpPr>
             <a:spLocks noGrp="1"/>
           </p:cNvSpPr>
           <p:nvPr>
-            <p:ph type="sldNum" idx="7" sz="quarter"/>
+            <p:ph type="body"/>
           </p:nvPr>
         </p:nvSpPr>
-        <p:spPr/>
+        <p:spPr>
+          <a:xfrm>
+            <a:off x="670680" y="2383560"/>
+            <a:ext cx="12069720" cy="6839280"/>
+          </a:xfrm>
+          <a:prstGeom prst="rect">
+            <a:avLst/>
+          </a:prstGeom>
+          <a:noFill/>
+          <a:ln w="0">
+            <a:noFill/>
+          </a:ln>
+        </p:spPr>
         <p:txBody>
-          <a:bodyPr lIns="0" tIns="0" rIns="0" bIns="0"/>
+          <a:bodyPr lIns="0" rIns="0" tIns="0" bIns="0" anchor="t">
+            <a:noAutofit/>
+          </a:bodyPr>
+          <a:p>
+            <a:pPr marL="432000" indent="-324000">
+              <a:spcBef>
+                <a:spcPts val="1417"/>
+              </a:spcBef>
+              <a:buClr>
+                <a:srgbClr val="000000"/>
+              </a:buClr>
+              <a:buSzPct val="45000"/>
+              <a:buFont typeface="Wingdings" charset="2"/>
+              <a:buChar char=""/>
+            </a:pPr>
+            <a:r>
+              <a:rPr b="0" lang="en-US" sz="1800" strike="noStrike" u="none">
+                <a:solidFill>
+                  <a:srgbClr val="000000"/>
+                </a:solidFill>
+                <a:effectLst/>
+                <a:uFillTx/>
+                <a:latin typeface="Calibri"/>
+              </a:rPr>
+              <a:t>Click to edit the outline text format</a:t>
+            </a:r>
+            <a:endParaRPr b="0" lang="en-US" sz="1800" strike="noStrike" u="none">
+              <a:solidFill>
+                <a:srgbClr val="000000"/>
+              </a:solidFill>
+              <a:effectLst/>
+              <a:uFillTx/>
+              <a:latin typeface="Calibri"/>
+            </a:endParaRPr>
+          </a:p>
+          <a:p>
+            <a:pPr lvl="1" marL="864000" indent="-324000">
+              <a:spcBef>
+                <a:spcPts val="1134"/>
+              </a:spcBef>
+              <a:buClr>
+                <a:srgbClr val="000000"/>
+              </a:buClr>
+              <a:buSzPct val="75000"/>
+              <a:buFont typeface="Symbol" charset="2"/>
+              <a:buChar char=""/>
+            </a:pPr>
+            <a:r>
+              <a:rPr b="0" lang="en-US" sz="1800" strike="noStrike" u="none">
+                <a:solidFill>
+                  <a:srgbClr val="000000"/>
+                </a:solidFill>
+                <a:effectLst/>
+                <a:uFillTx/>
+                <a:latin typeface="Calibri"/>
+              </a:rPr>
+              <a:t>Second Outline Level</a:t>
+            </a:r>
+            <a:endParaRPr b="0" lang="en-US" sz="1800" strike="noStrike" u="none">
+              <a:solidFill>
+                <a:srgbClr val="000000"/>
+              </a:solidFill>
+              <a:effectLst/>
+              <a:uFillTx/>
+              <a:latin typeface="Calibri"/>
+            </a:endParaRPr>
+          </a:p>
+          <a:p>
+            <a:pPr lvl="2" marL="1296000" indent="-288000">
+              <a:spcBef>
+                <a:spcPts val="850"/>
+              </a:spcBef>
+              <a:buClr>
+                <a:srgbClr val="000000"/>
+              </a:buClr>
+              <a:buSzPct val="45000"/>
+              <a:buFont typeface="Wingdings" charset="2"/>
+              <a:buChar char=""/>
+            </a:pPr>
+            <a:r>
+              <a:rPr b="0" lang="en-US" sz="1800" strike="noStrike" u="none">
+                <a:solidFill>
+                  <a:srgbClr val="000000"/>
+                </a:solidFill>
+                <a:effectLst/>
+                <a:uFillTx/>
+                <a:latin typeface="Calibri"/>
+              </a:rPr>
+              <a:t>Third Outline Level</a:t>
+            </a:r>
+            <a:endParaRPr b="0" lang="en-US" sz="1800" strike="noStrike" u="none">
+              <a:solidFill>
+                <a:srgbClr val="000000"/>
+              </a:solidFill>
+              <a:effectLst/>
+              <a:uFillTx/>
+              <a:latin typeface="Calibri"/>
+            </a:endParaRPr>
+          </a:p>
+          <a:p>
+            <a:pPr lvl="3" marL="1728000" indent="-216000">
+              <a:spcBef>
+                <a:spcPts val="567"/>
+              </a:spcBef>
+              <a:buClr>
+                <a:srgbClr val="000000"/>
+              </a:buClr>
+              <a:buSzPct val="75000"/>
+              <a:buFont typeface="Symbol" charset="2"/>
+              <a:buChar char=""/>
+            </a:pPr>
+            <a:r>
+              <a:rPr b="0" lang="en-US" sz="1800" strike="noStrike" u="none">
+                <a:solidFill>
+                  <a:srgbClr val="000000"/>
+                </a:solidFill>
+                <a:effectLst/>
+                <a:uFillTx/>
+                <a:latin typeface="Calibri"/>
+              </a:rPr>
+              <a:t>Fourth Outline Level</a:t>
+            </a:r>
+            <a:endParaRPr b="0" lang="en-US" sz="1800" strike="noStrike" u="none">
+              <a:solidFill>
+                <a:srgbClr val="000000"/>
+              </a:solidFill>
+              <a:effectLst/>
+              <a:uFillTx/>
+              <a:latin typeface="Calibri"/>
+            </a:endParaRPr>
+          </a:p>
+          <a:p>
+            <a:pPr lvl="4" marL="2160000" indent="-216000">
+              <a:spcBef>
+                <a:spcPts val="283"/>
+              </a:spcBef>
+              <a:buClr>
+                <a:srgbClr val="000000"/>
+              </a:buClr>
+              <a:buSzPct val="45000"/>
+              <a:buFont typeface="Wingdings" charset="2"/>
+              <a:buChar char=""/>
+            </a:pPr>
+            <a:r>
+              <a:rPr b="0" lang="en-US" sz="1800" strike="noStrike" u="none">
+                <a:solidFill>
+                  <a:srgbClr val="000000"/>
+                </a:solidFill>
+                <a:effectLst/>
+                <a:uFillTx/>
+                <a:latin typeface="Calibri"/>
+              </a:rPr>
+              <a:t>Fifth Outline Level</a:t>
+            </a:r>
+            <a:endParaRPr b="0" lang="en-US" sz="1800" strike="noStrike" u="none">
+              <a:solidFill>
+                <a:srgbClr val="000000"/>
+              </a:solidFill>
+              <a:effectLst/>
+              <a:uFillTx/>
+              <a:latin typeface="Calibri"/>
+            </a:endParaRPr>
+          </a:p>
+          <a:p>
+            <a:pPr lvl="5" marL="2592000" indent="-216000">
+              <a:spcBef>
+                <a:spcPts val="283"/>
+              </a:spcBef>
+              <a:buClr>
+                <a:srgbClr val="000000"/>
+              </a:buClr>
+              <a:buSzPct val="45000"/>
+              <a:buFont typeface="Wingdings" charset="2"/>
+              <a:buChar char=""/>
+            </a:pPr>
+            <a:r>
+              <a:rPr b="0" lang="en-US" sz="1800" strike="noStrike" u="none">
+                <a:solidFill>
+                  <a:srgbClr val="000000"/>
+                </a:solidFill>
+                <a:effectLst/>
+                <a:uFillTx/>
+                <a:latin typeface="Calibri"/>
+              </a:rPr>
+              <a:t>Sixth Outline Level</a:t>
+            </a:r>
+            <a:endParaRPr b="0" lang="en-US" sz="1800" strike="noStrike" u="none">
+              <a:solidFill>
+                <a:srgbClr val="000000"/>
+              </a:solidFill>
+              <a:effectLst/>
+              <a:uFillTx/>
+              <a:latin typeface="Calibri"/>
+            </a:endParaRPr>
+          </a:p>
+          <a:p>
+            <a:pPr lvl="6" marL="3024000" indent="-216000">
+              <a:spcBef>
+                <a:spcPts val="283"/>
+              </a:spcBef>
+              <a:buClr>
+                <a:srgbClr val="000000"/>
+              </a:buClr>
+              <a:buSzPct val="45000"/>
+              <a:buFont typeface="Wingdings" charset="2"/>
+              <a:buChar char=""/>
+            </a:pPr>
+            <a:r>
+              <a:rPr b="0" lang="en-US" sz="1800" strike="noStrike" u="none">
+                <a:solidFill>
+                  <a:srgbClr val="000000"/>
+                </a:solidFill>
+                <a:effectLst/>
+                <a:uFillTx/>
+                <a:latin typeface="Calibri"/>
+              </a:rPr>
+              <a:t>Seventh Outline Level</a:t>
+            </a:r>
+            <a:endParaRPr b="0" lang="en-US" sz="1800" strike="noStrike" u="none">
+              <a:solidFill>
+                <a:srgbClr val="000000"/>
+              </a:solidFill>
+              <a:effectLst/>
+              <a:uFillTx/>
+              <a:latin typeface="Calibri"/>
+            </a:endParaRPr>
+          </a:p>
+        </p:txBody>
+      </p:sp>
+      <p:sp>
+        <p:nvSpPr>
+          <p:cNvPr id="8" name="PlaceHolder 3"/>
+          <p:cNvSpPr>
+            <a:spLocks noGrp="1"/>
+          </p:cNvSpPr>
+          <p:nvPr>
+            <p:ph type="ftr" idx="4"/>
+          </p:nvPr>
+        </p:nvSpPr>
+        <p:spPr>
+          <a:xfrm>
+            <a:off x="4559760" y="9637920"/>
+            <a:ext cx="4291200" cy="517680"/>
+          </a:xfrm>
+          <a:prstGeom prst="rect">
+            <a:avLst/>
+          </a:prstGeom>
+          <a:noFill/>
+          <a:ln w="0">
+            <a:noFill/>
+          </a:ln>
+        </p:spPr>
+        <p:txBody>
+          <a:bodyPr lIns="0" rIns="0" tIns="0" bIns="0" anchor="t">
+            <a:noAutofit/>
+          </a:bodyPr>
           <a:lstStyle>
-            <a:lvl1pPr algn="r">
-              <a:defRPr>
-                <a:solidFill>
-                  <a:schemeClr val="tx1">
-                    <a:tint val="75000"/>
-                  </a:schemeClr>
-                </a:solidFill>
+            <a:lvl1pPr indent="0" algn="ctr">
+              <a:buNone/>
+              <a:defRPr b="0" lang="en-US" sz="1400" strike="noStrike" u="none">
+                <a:solidFill>
+                  <a:srgbClr val="000000"/>
+                </a:solidFill>
+                <a:effectLst/>
+                <a:uFillTx/>
+                <a:latin typeface="Times New Roman"/>
               </a:defRPr>
             </a:lvl1pPr>
           </a:lstStyle>
           <a:p>
-            <a:fld id="{B6F15528-21DE-4FAA-801E-634DDDAF4B2B}" type="slidenum">
-              <a:t>#</a:t>
+            <a:pPr indent="0" algn="ctr">
+              <a:buNone/>
+            </a:pPr>
+            <a:r>
+              <a:rPr b="0" lang="en-US" sz="1400" strike="noStrike" u="none">
+                <a:solidFill>
+                  <a:srgbClr val="000000"/>
+                </a:solidFill>
+                <a:effectLst/>
+                <a:uFillTx/>
+                <a:latin typeface="Times New Roman"/>
+              </a:rPr>
+              <a:t>&lt;footer&gt;</a:t>
+            </a:r>
+            <a:endParaRPr b="0" lang="en-US" sz="1400" strike="noStrike" u="none">
+              <a:solidFill>
+                <a:srgbClr val="000000"/>
+              </a:solidFill>
+              <a:effectLst/>
+              <a:uFillTx/>
+              <a:latin typeface="Times New Roman"/>
+            </a:endParaRPr>
+          </a:p>
+        </p:txBody>
+      </p:sp>
+      <p:sp>
+        <p:nvSpPr>
+          <p:cNvPr id="9" name="PlaceHolder 4"/>
+          <p:cNvSpPr>
+            <a:spLocks noGrp="1"/>
+          </p:cNvSpPr>
+          <p:nvPr>
+            <p:ph type="dt" idx="5"/>
+          </p:nvPr>
+        </p:nvSpPr>
+        <p:spPr>
+          <a:xfrm>
+            <a:off x="670680" y="9637920"/>
+            <a:ext cx="3084120" cy="517680"/>
+          </a:xfrm>
+          <a:prstGeom prst="rect">
+            <a:avLst/>
+          </a:prstGeom>
+          <a:noFill/>
+          <a:ln w="0">
+            <a:noFill/>
+          </a:ln>
+        </p:spPr>
+        <p:txBody>
+          <a:bodyPr lIns="0" rIns="0" tIns="0" bIns="0" anchor="t">
+            <a:noAutofit/>
+          </a:bodyPr>
+          <a:lstStyle>
+            <a:lvl1pPr indent="0">
+              <a:buNone/>
+              <a:defRPr b="0" lang="en-US" sz="1400" strike="noStrike" u="none">
+                <a:solidFill>
+                  <a:srgbClr val="000000"/>
+                </a:solidFill>
+                <a:effectLst/>
+                <a:uFillTx/>
+                <a:latin typeface="Times New Roman"/>
+              </a:defRPr>
+            </a:lvl1pPr>
+          </a:lstStyle>
+          <a:p>
+            <a:pPr indent="0">
+              <a:buNone/>
+            </a:pPr>
+            <a:r>
+              <a:rPr b="0" lang="en-US" sz="1400" strike="noStrike" u="none">
+                <a:solidFill>
+                  <a:srgbClr val="000000"/>
+                </a:solidFill>
+                <a:effectLst/>
+                <a:uFillTx/>
+                <a:latin typeface="Times New Roman"/>
+              </a:rPr>
+              <a:t>&lt;date/time&gt;</a:t>
+            </a:r>
+            <a:endParaRPr b="0" lang="en-US" sz="1400" strike="noStrike" u="none">
+              <a:solidFill>
+                <a:srgbClr val="000000"/>
+              </a:solidFill>
+              <a:effectLst/>
+              <a:uFillTx/>
+              <a:latin typeface="Times New Roman"/>
+            </a:endParaRPr>
+          </a:p>
+        </p:txBody>
+      </p:sp>
+      <p:sp>
+        <p:nvSpPr>
+          <p:cNvPr id="10" name="PlaceHolder 5"/>
+          <p:cNvSpPr>
+            <a:spLocks noGrp="1"/>
+          </p:cNvSpPr>
+          <p:nvPr>
+            <p:ph type="sldNum" idx="6"/>
+          </p:nvPr>
+        </p:nvSpPr>
+        <p:spPr>
+          <a:xfrm>
+            <a:off x="9655920" y="9637920"/>
+            <a:ext cx="3084120" cy="517680"/>
+          </a:xfrm>
+          <a:prstGeom prst="rect">
+            <a:avLst/>
+          </a:prstGeom>
+          <a:noFill/>
+          <a:ln w="0">
+            <a:noFill/>
+          </a:ln>
+        </p:spPr>
+        <p:txBody>
+          <a:bodyPr lIns="0" rIns="0" tIns="0" bIns="0" anchor="t">
+            <a:noAutofit/>
+          </a:bodyPr>
+          <a:lstStyle>
+            <a:lvl1pPr indent="0" algn="r">
+              <a:lnSpc>
+                <a:spcPct val="100000"/>
+              </a:lnSpc>
+              <a:buNone/>
+              <a:defRPr b="0" lang="en-US" sz="1400" strike="noStrike" u="none">
+                <a:solidFill>
+                  <a:schemeClr val="dk1">
+                    <a:tint val="75000"/>
+                  </a:schemeClr>
+                </a:solidFill>
+                <a:effectLst/>
+                <a:uFillTx/>
+                <a:latin typeface="Times New Roman"/>
+              </a:defRPr>
+            </a:lvl1pPr>
+          </a:lstStyle>
+          <a:p>
+            <a:pPr indent="0" algn="r">
+              <a:lnSpc>
+                <a:spcPct val="100000"/>
+              </a:lnSpc>
+              <a:buNone/>
+            </a:pPr>
+            <a:fld id="{1191AE39-D59B-4313-98B4-FDE2AA5BB413}" type="slidenum">
+              <a:rPr b="0" lang="en-US" sz="1400" strike="noStrike" u="none">
+                <a:solidFill>
+                  <a:schemeClr val="dk1">
+                    <a:tint val="75000"/>
+                  </a:schemeClr>
+                </a:solidFill>
+                <a:effectLst/>
+                <a:uFillTx/>
+                <a:latin typeface="Times New Roman"/>
+              </a:rPr>
+              <a:t>&lt;number&gt;</a:t>
             </a:fld>
+            <a:endParaRPr b="0" lang="en-US" sz="1400" strike="noStrike" u="none">
+              <a:solidFill>
+                <a:srgbClr val="000000"/>
+              </a:solidFill>
+              <a:effectLst/>
+              <a:uFillTx/>
+              <a:latin typeface="Times New Roman"/>
+            </a:endParaRPr>
           </a:p>
         </p:txBody>
       </p:sp>
     </p:spTree>
   </p:cSld>
-  <p:clrMapOvr>
-    <a:masterClrMapping/>
-  </p:clrMapOvr>
 </p:sldLayout>
 </file>
 
 <file path=ppt/slideLayouts/slideLayout3.xml><?xml version="1.0" encoding="utf-8"?>
-<p:sldLayout xmlns:a="http://schemas.openxmlformats.org/drawingml/2006/main" xmlns:r="http://schemas.openxmlformats.org/officeDocument/2006/relationships" xmlns:p="http://schemas.openxmlformats.org/presentationml/2006/main" preserve="1" type="obj">
+<p:sldLayout xmlns:a="http://schemas.openxmlformats.org/drawingml/2006/main" xmlns:p="http://schemas.openxmlformats.org/presentationml/2006/main" xmlns:r="http://schemas.openxmlformats.org/officeDocument/2006/relationships" xmlns:p14="http://schemas.microsoft.com/office/powerpoint/2010/main" xmlns:p15="http://schemas.microsoft.com/office/powerpoint/2012/main" xmlns:mc="http://schemas.openxmlformats.org/markup-compatibility/2006" type="obj" preserve="1">
   <p:cSld name="Two Content">
+    <p:bg>
+      <p:bgPr>
+        <a:solidFill>
+          <a:schemeClr val="lt1"/>
+        </a:solidFill>
+      </p:bgPr>
+    </p:bg>
     <p:spTree>
       <p:nvGrpSpPr>
         <p:cNvPr id="1" name=""/>
@@ -396,7 +887,7 @@
       </p:grpSpPr>
       <p:sp>
         <p:nvSpPr>
-          <p:cNvPr id="2" name="Holder 2"/>
+          <p:cNvPr id="11" name="PlaceHolder 1"/>
           <p:cNvSpPr>
             <a:spLocks noGrp="1"/>
           </p:cNvSpPr>
@@ -404,191 +895,776 @@
             <p:ph type="title"/>
           </p:nvPr>
         </p:nvSpPr>
-        <p:spPr/>
+        <p:spPr>
+          <a:xfrm>
+            <a:off x="856800" y="530640"/>
+            <a:ext cx="2056320" cy="781200"/>
+          </a:xfrm>
+          <a:prstGeom prst="rect">
+            <a:avLst/>
+          </a:prstGeom>
+          <a:noFill/>
+          <a:ln w="0">
+            <a:noFill/>
+          </a:ln>
+        </p:spPr>
         <p:txBody>
-          <a:bodyPr lIns="0" tIns="0" rIns="0" bIns="0"/>
-          <a:lstStyle>
-            <a:lvl1pPr>
-              <a:defRPr sz="4950" b="0" i="0">
-                <a:solidFill>
-                  <a:schemeClr val="tx1"/>
-                </a:solidFill>
-                <a:latin typeface="Cambria"/>
-                <a:cs typeface="Cambria"/>
-              </a:defRPr>
-            </a:lvl1pPr>
-          </a:lstStyle>
-          <a:p/>
-        </p:txBody>
-      </p:sp>
-      <p:sp>
-        <p:nvSpPr>
-          <p:cNvPr id="3" name="Holder 3"/>
-          <p:cNvSpPr>
-            <a:spLocks noGrp="1"/>
-          </p:cNvSpPr>
-          <p:nvPr>
-            <p:ph idx="2" sz="half"/>
-          </p:nvPr>
-        </p:nvSpPr>
-        <p:spPr>
-          <a:xfrm>
-            <a:off x="670560" y="2383536"/>
-            <a:ext cx="5833872" cy="6839712"/>
-          </a:xfrm>
-          <a:prstGeom prst="rect">
-            <a:avLst/>
-          </a:prstGeom>
-        </p:spPr>
-        <p:txBody>
-          <a:bodyPr wrap="square" lIns="0" tIns="0" rIns="0" bIns="0">
-            <a:spAutoFit/>
+          <a:bodyPr lIns="0" rIns="0" tIns="0" bIns="0" anchor="t">
+            <a:noAutofit/>
           </a:bodyPr>
-          <a:lstStyle>
-            <a:lvl1pPr>
-              <a:defRPr/>
-            </a:lvl1pPr>
-          </a:lstStyle>
-          <a:p/>
-        </p:txBody>
-      </p:sp>
-      <p:sp>
-        <p:nvSpPr>
-          <p:cNvPr id="4" name="Holder 4"/>
-          <p:cNvSpPr>
-            <a:spLocks noGrp="1"/>
-          </p:cNvSpPr>
-          <p:nvPr>
-            <p:ph idx="3" sz="half"/>
-          </p:nvPr>
-        </p:nvSpPr>
-        <p:spPr>
-          <a:xfrm>
-            <a:off x="6906768" y="2383536"/>
-            <a:ext cx="5833872" cy="6839712"/>
-          </a:xfrm>
-          <a:prstGeom prst="rect">
-            <a:avLst/>
-          </a:prstGeom>
-        </p:spPr>
-        <p:txBody>
-          <a:bodyPr wrap="square" lIns="0" tIns="0" rIns="0" bIns="0">
-            <a:spAutoFit/>
-          </a:bodyPr>
-          <a:lstStyle>
-            <a:lvl1pPr>
-              <a:defRPr/>
-            </a:lvl1pPr>
-          </a:lstStyle>
-          <a:p/>
-        </p:txBody>
-      </p:sp>
-      <p:sp>
-        <p:nvSpPr>
-          <p:cNvPr id="5" name="Holder 5"/>
-          <p:cNvSpPr>
-            <a:spLocks noGrp="1"/>
-          </p:cNvSpPr>
-          <p:nvPr>
-            <p:ph type="ftr" idx="5" sz="quarter"/>
-          </p:nvPr>
-        </p:nvSpPr>
-        <p:spPr/>
-        <p:txBody>
-          <a:bodyPr lIns="0" tIns="0" rIns="0" bIns="0"/>
-          <a:lstStyle>
-            <a:lvl1pPr algn="ctr">
-              <a:defRPr>
-                <a:solidFill>
-                  <a:schemeClr val="tx1">
-                    <a:tint val="75000"/>
-                  </a:schemeClr>
-                </a:solidFill>
-              </a:defRPr>
-            </a:lvl1pPr>
-          </a:lstStyle>
-          <a:p/>
-        </p:txBody>
-      </p:sp>
-      <p:sp>
-        <p:nvSpPr>
-          <p:cNvPr id="6" name="Holder 6"/>
-          <p:cNvSpPr>
-            <a:spLocks noGrp="1"/>
-          </p:cNvSpPr>
-          <p:nvPr>
-            <p:ph type="dt" idx="6" sz="half"/>
-          </p:nvPr>
-        </p:nvSpPr>
-        <p:spPr/>
-        <p:txBody>
-          <a:bodyPr lIns="0" tIns="0" rIns="0" bIns="0"/>
-          <a:lstStyle>
-            <a:lvl1pPr algn="l">
-              <a:defRPr>
-                <a:solidFill>
-                  <a:schemeClr val="tx1">
-                    <a:tint val="75000"/>
-                  </a:schemeClr>
-                </a:solidFill>
-              </a:defRPr>
-            </a:lvl1pPr>
-          </a:lstStyle>
           <a:p>
-            <a:fld id="{1D8BD707-D9CF-40AE-B4C6-C98DA3205C09}" type="datetimeFigureOut">
-              <a:rPr lang="en-US"/>
-            </a:fld>
+            <a:pPr indent="0">
+              <a:buNone/>
+            </a:pPr>
+            <a:r>
+              <a:rPr b="0" lang="en-US" sz="4950" strike="noStrike" u="none">
+                <a:solidFill>
+                  <a:srgbClr val="000000"/>
+                </a:solidFill>
+                <a:effectLst/>
+                <a:uFillTx/>
+                <a:latin typeface="Calibri"/>
+              </a:rPr>
+              <a:t>Click to edit the title text format</a:t>
+            </a:r>
+            <a:endParaRPr b="0" lang="en-US" sz="4950" strike="noStrike" u="none">
+              <a:solidFill>
+                <a:srgbClr val="000000"/>
+              </a:solidFill>
+              <a:effectLst/>
+              <a:uFillTx/>
+              <a:latin typeface="Calibri"/>
+            </a:endParaRPr>
           </a:p>
         </p:txBody>
       </p:sp>
       <p:sp>
         <p:nvSpPr>
-          <p:cNvPr id="7" name="Holder 7"/>
+          <p:cNvPr id="12" name="PlaceHolder 2"/>
           <p:cNvSpPr>
             <a:spLocks noGrp="1"/>
           </p:cNvSpPr>
           <p:nvPr>
-            <p:ph type="sldNum" idx="7" sz="quarter"/>
+            <p:ph type="body"/>
           </p:nvPr>
         </p:nvSpPr>
-        <p:spPr/>
+        <p:spPr>
+          <a:xfrm>
+            <a:off x="670680" y="2383560"/>
+            <a:ext cx="5833440" cy="2352600"/>
+          </a:xfrm>
+          <a:prstGeom prst="rect">
+            <a:avLst/>
+          </a:prstGeom>
+          <a:noFill/>
+          <a:ln w="0">
+            <a:noFill/>
+          </a:ln>
+        </p:spPr>
         <p:txBody>
-          <a:bodyPr lIns="0" tIns="0" rIns="0" bIns="0"/>
+          <a:bodyPr lIns="0" rIns="0" tIns="0" bIns="0" anchor="t">
+            <a:spAutoFit/>
+          </a:bodyPr>
+          <a:p>
+            <a:pPr marL="432000" indent="-324000">
+              <a:spcBef>
+                <a:spcPts val="1417"/>
+              </a:spcBef>
+              <a:buClr>
+                <a:srgbClr val="000000"/>
+              </a:buClr>
+              <a:buSzPct val="45000"/>
+              <a:buFont typeface="Wingdings" charset="2"/>
+              <a:buChar char=""/>
+            </a:pPr>
+            <a:r>
+              <a:rPr b="0" lang="en-US" sz="1800" strike="noStrike" u="none">
+                <a:solidFill>
+                  <a:srgbClr val="000000"/>
+                </a:solidFill>
+                <a:effectLst/>
+                <a:uFillTx/>
+                <a:latin typeface="Calibri"/>
+              </a:rPr>
+              <a:t>Click to edit the outline text format</a:t>
+            </a:r>
+            <a:endParaRPr b="0" lang="en-US" sz="1800" strike="noStrike" u="none">
+              <a:solidFill>
+                <a:srgbClr val="000000"/>
+              </a:solidFill>
+              <a:effectLst/>
+              <a:uFillTx/>
+              <a:latin typeface="Calibri"/>
+            </a:endParaRPr>
+          </a:p>
+          <a:p>
+            <a:pPr lvl="1" marL="864000" indent="-324000">
+              <a:spcBef>
+                <a:spcPts val="1134"/>
+              </a:spcBef>
+              <a:buClr>
+                <a:srgbClr val="000000"/>
+              </a:buClr>
+              <a:buSzPct val="75000"/>
+              <a:buFont typeface="Symbol" charset="2"/>
+              <a:buChar char=""/>
+            </a:pPr>
+            <a:r>
+              <a:rPr b="0" lang="en-US" sz="1800" strike="noStrike" u="none">
+                <a:solidFill>
+                  <a:srgbClr val="000000"/>
+                </a:solidFill>
+                <a:effectLst/>
+                <a:uFillTx/>
+                <a:latin typeface="Calibri"/>
+              </a:rPr>
+              <a:t>Second Outline Level</a:t>
+            </a:r>
+            <a:endParaRPr b="0" lang="en-US" sz="1800" strike="noStrike" u="none">
+              <a:solidFill>
+                <a:srgbClr val="000000"/>
+              </a:solidFill>
+              <a:effectLst/>
+              <a:uFillTx/>
+              <a:latin typeface="Calibri"/>
+            </a:endParaRPr>
+          </a:p>
+          <a:p>
+            <a:pPr lvl="2" marL="1296000" indent="-288000">
+              <a:spcBef>
+                <a:spcPts val="850"/>
+              </a:spcBef>
+              <a:buClr>
+                <a:srgbClr val="000000"/>
+              </a:buClr>
+              <a:buSzPct val="45000"/>
+              <a:buFont typeface="Wingdings" charset="2"/>
+              <a:buChar char=""/>
+            </a:pPr>
+            <a:r>
+              <a:rPr b="0" lang="en-US" sz="1800" strike="noStrike" u="none">
+                <a:solidFill>
+                  <a:srgbClr val="000000"/>
+                </a:solidFill>
+                <a:effectLst/>
+                <a:uFillTx/>
+                <a:latin typeface="Calibri"/>
+              </a:rPr>
+              <a:t>Third Outline Level</a:t>
+            </a:r>
+            <a:endParaRPr b="0" lang="en-US" sz="1800" strike="noStrike" u="none">
+              <a:solidFill>
+                <a:srgbClr val="000000"/>
+              </a:solidFill>
+              <a:effectLst/>
+              <a:uFillTx/>
+              <a:latin typeface="Calibri"/>
+            </a:endParaRPr>
+          </a:p>
+          <a:p>
+            <a:pPr lvl="3" marL="1728000" indent="-216000">
+              <a:spcBef>
+                <a:spcPts val="567"/>
+              </a:spcBef>
+              <a:buClr>
+                <a:srgbClr val="000000"/>
+              </a:buClr>
+              <a:buSzPct val="75000"/>
+              <a:buFont typeface="Symbol" charset="2"/>
+              <a:buChar char=""/>
+            </a:pPr>
+            <a:r>
+              <a:rPr b="0" lang="en-US" sz="1800" strike="noStrike" u="none">
+                <a:solidFill>
+                  <a:srgbClr val="000000"/>
+                </a:solidFill>
+                <a:effectLst/>
+                <a:uFillTx/>
+                <a:latin typeface="Calibri"/>
+              </a:rPr>
+              <a:t>Fourth Outline Level</a:t>
+            </a:r>
+            <a:endParaRPr b="0" lang="en-US" sz="1800" strike="noStrike" u="none">
+              <a:solidFill>
+                <a:srgbClr val="000000"/>
+              </a:solidFill>
+              <a:effectLst/>
+              <a:uFillTx/>
+              <a:latin typeface="Calibri"/>
+            </a:endParaRPr>
+          </a:p>
+          <a:p>
+            <a:pPr lvl="4" marL="2160000" indent="-216000">
+              <a:spcBef>
+                <a:spcPts val="283"/>
+              </a:spcBef>
+              <a:buClr>
+                <a:srgbClr val="000000"/>
+              </a:buClr>
+              <a:buSzPct val="45000"/>
+              <a:buFont typeface="Wingdings" charset="2"/>
+              <a:buChar char=""/>
+            </a:pPr>
+            <a:r>
+              <a:rPr b="0" lang="en-US" sz="1800" strike="noStrike" u="none">
+                <a:solidFill>
+                  <a:srgbClr val="000000"/>
+                </a:solidFill>
+                <a:effectLst/>
+                <a:uFillTx/>
+                <a:latin typeface="Calibri"/>
+              </a:rPr>
+              <a:t>Fifth Outline Level</a:t>
+            </a:r>
+            <a:endParaRPr b="0" lang="en-US" sz="1800" strike="noStrike" u="none">
+              <a:solidFill>
+                <a:srgbClr val="000000"/>
+              </a:solidFill>
+              <a:effectLst/>
+              <a:uFillTx/>
+              <a:latin typeface="Calibri"/>
+            </a:endParaRPr>
+          </a:p>
+          <a:p>
+            <a:pPr lvl="5" marL="2592000" indent="-216000">
+              <a:spcBef>
+                <a:spcPts val="283"/>
+              </a:spcBef>
+              <a:buClr>
+                <a:srgbClr val="000000"/>
+              </a:buClr>
+              <a:buSzPct val="45000"/>
+              <a:buFont typeface="Wingdings" charset="2"/>
+              <a:buChar char=""/>
+            </a:pPr>
+            <a:r>
+              <a:rPr b="0" lang="en-US" sz="1800" strike="noStrike" u="none">
+                <a:solidFill>
+                  <a:srgbClr val="000000"/>
+                </a:solidFill>
+                <a:effectLst/>
+                <a:uFillTx/>
+                <a:latin typeface="Calibri"/>
+              </a:rPr>
+              <a:t>Sixth Outline Level</a:t>
+            </a:r>
+            <a:endParaRPr b="0" lang="en-US" sz="1800" strike="noStrike" u="none">
+              <a:solidFill>
+                <a:srgbClr val="000000"/>
+              </a:solidFill>
+              <a:effectLst/>
+              <a:uFillTx/>
+              <a:latin typeface="Calibri"/>
+            </a:endParaRPr>
+          </a:p>
+          <a:p>
+            <a:pPr lvl="6" marL="3024000" indent="-216000">
+              <a:spcBef>
+                <a:spcPts val="283"/>
+              </a:spcBef>
+              <a:buClr>
+                <a:srgbClr val="000000"/>
+              </a:buClr>
+              <a:buSzPct val="45000"/>
+              <a:buFont typeface="Wingdings" charset="2"/>
+              <a:buChar char=""/>
+            </a:pPr>
+            <a:r>
+              <a:rPr b="0" lang="en-US" sz="1800" strike="noStrike" u="none">
+                <a:solidFill>
+                  <a:srgbClr val="000000"/>
+                </a:solidFill>
+                <a:effectLst/>
+                <a:uFillTx/>
+                <a:latin typeface="Calibri"/>
+              </a:rPr>
+              <a:t>Seventh Outline Level</a:t>
+            </a:r>
+            <a:endParaRPr b="0" lang="en-US" sz="1800" strike="noStrike" u="none">
+              <a:solidFill>
+                <a:srgbClr val="000000"/>
+              </a:solidFill>
+              <a:effectLst/>
+              <a:uFillTx/>
+              <a:latin typeface="Calibri"/>
+            </a:endParaRPr>
+          </a:p>
+        </p:txBody>
+      </p:sp>
+      <p:sp>
+        <p:nvSpPr>
+          <p:cNvPr id="13" name="PlaceHolder 3"/>
+          <p:cNvSpPr>
+            <a:spLocks noGrp="1"/>
+          </p:cNvSpPr>
+          <p:nvPr>
+            <p:ph type="body"/>
+          </p:nvPr>
+        </p:nvSpPr>
+        <p:spPr>
+          <a:xfrm>
+            <a:off x="6906600" y="2383560"/>
+            <a:ext cx="5833440" cy="2352600"/>
+          </a:xfrm>
+          <a:prstGeom prst="rect">
+            <a:avLst/>
+          </a:prstGeom>
+          <a:noFill/>
+          <a:ln w="0">
+            <a:noFill/>
+          </a:ln>
+        </p:spPr>
+        <p:txBody>
+          <a:bodyPr lIns="0" rIns="0" tIns="0" bIns="0" anchor="t">
+            <a:spAutoFit/>
+          </a:bodyPr>
+          <a:p>
+            <a:pPr marL="432000" indent="-324000">
+              <a:spcBef>
+                <a:spcPts val="1417"/>
+              </a:spcBef>
+              <a:buClr>
+                <a:srgbClr val="000000"/>
+              </a:buClr>
+              <a:buSzPct val="45000"/>
+              <a:buFont typeface="Wingdings" charset="2"/>
+              <a:buChar char=""/>
+            </a:pPr>
+            <a:r>
+              <a:rPr b="0" lang="en-US" sz="1800" strike="noStrike" u="none">
+                <a:solidFill>
+                  <a:srgbClr val="000000"/>
+                </a:solidFill>
+                <a:effectLst/>
+                <a:uFillTx/>
+                <a:latin typeface="Calibri"/>
+              </a:rPr>
+              <a:t>Click to edit the outline text format</a:t>
+            </a:r>
+            <a:endParaRPr b="0" lang="en-US" sz="1800" strike="noStrike" u="none">
+              <a:solidFill>
+                <a:srgbClr val="000000"/>
+              </a:solidFill>
+              <a:effectLst/>
+              <a:uFillTx/>
+              <a:latin typeface="Calibri"/>
+            </a:endParaRPr>
+          </a:p>
+          <a:p>
+            <a:pPr lvl="1" marL="864000" indent="-324000">
+              <a:spcBef>
+                <a:spcPts val="1134"/>
+              </a:spcBef>
+              <a:buClr>
+                <a:srgbClr val="000000"/>
+              </a:buClr>
+              <a:buSzPct val="75000"/>
+              <a:buFont typeface="Symbol" charset="2"/>
+              <a:buChar char=""/>
+            </a:pPr>
+            <a:r>
+              <a:rPr b="0" lang="en-US" sz="1800" strike="noStrike" u="none">
+                <a:solidFill>
+                  <a:srgbClr val="000000"/>
+                </a:solidFill>
+                <a:effectLst/>
+                <a:uFillTx/>
+                <a:latin typeface="Calibri"/>
+              </a:rPr>
+              <a:t>Second Outline Level</a:t>
+            </a:r>
+            <a:endParaRPr b="0" lang="en-US" sz="1800" strike="noStrike" u="none">
+              <a:solidFill>
+                <a:srgbClr val="000000"/>
+              </a:solidFill>
+              <a:effectLst/>
+              <a:uFillTx/>
+              <a:latin typeface="Calibri"/>
+            </a:endParaRPr>
+          </a:p>
+          <a:p>
+            <a:pPr lvl="2" marL="1296000" indent="-288000">
+              <a:spcBef>
+                <a:spcPts val="850"/>
+              </a:spcBef>
+              <a:buClr>
+                <a:srgbClr val="000000"/>
+              </a:buClr>
+              <a:buSzPct val="45000"/>
+              <a:buFont typeface="Wingdings" charset="2"/>
+              <a:buChar char=""/>
+            </a:pPr>
+            <a:r>
+              <a:rPr b="0" lang="en-US" sz="1800" strike="noStrike" u="none">
+                <a:solidFill>
+                  <a:srgbClr val="000000"/>
+                </a:solidFill>
+                <a:effectLst/>
+                <a:uFillTx/>
+                <a:latin typeface="Calibri"/>
+              </a:rPr>
+              <a:t>Third Outline Level</a:t>
+            </a:r>
+            <a:endParaRPr b="0" lang="en-US" sz="1800" strike="noStrike" u="none">
+              <a:solidFill>
+                <a:srgbClr val="000000"/>
+              </a:solidFill>
+              <a:effectLst/>
+              <a:uFillTx/>
+              <a:latin typeface="Calibri"/>
+            </a:endParaRPr>
+          </a:p>
+          <a:p>
+            <a:pPr lvl="3" marL="1728000" indent="-216000">
+              <a:spcBef>
+                <a:spcPts val="567"/>
+              </a:spcBef>
+              <a:buClr>
+                <a:srgbClr val="000000"/>
+              </a:buClr>
+              <a:buSzPct val="75000"/>
+              <a:buFont typeface="Symbol" charset="2"/>
+              <a:buChar char=""/>
+            </a:pPr>
+            <a:r>
+              <a:rPr b="0" lang="en-US" sz="1800" strike="noStrike" u="none">
+                <a:solidFill>
+                  <a:srgbClr val="000000"/>
+                </a:solidFill>
+                <a:effectLst/>
+                <a:uFillTx/>
+                <a:latin typeface="Calibri"/>
+              </a:rPr>
+              <a:t>Fourth Outline Level</a:t>
+            </a:r>
+            <a:endParaRPr b="0" lang="en-US" sz="1800" strike="noStrike" u="none">
+              <a:solidFill>
+                <a:srgbClr val="000000"/>
+              </a:solidFill>
+              <a:effectLst/>
+              <a:uFillTx/>
+              <a:latin typeface="Calibri"/>
+            </a:endParaRPr>
+          </a:p>
+          <a:p>
+            <a:pPr lvl="4" marL="2160000" indent="-216000">
+              <a:spcBef>
+                <a:spcPts val="283"/>
+              </a:spcBef>
+              <a:buClr>
+                <a:srgbClr val="000000"/>
+              </a:buClr>
+              <a:buSzPct val="45000"/>
+              <a:buFont typeface="Wingdings" charset="2"/>
+              <a:buChar char=""/>
+            </a:pPr>
+            <a:r>
+              <a:rPr b="0" lang="en-US" sz="1800" strike="noStrike" u="none">
+                <a:solidFill>
+                  <a:srgbClr val="000000"/>
+                </a:solidFill>
+                <a:effectLst/>
+                <a:uFillTx/>
+                <a:latin typeface="Calibri"/>
+              </a:rPr>
+              <a:t>Fifth Outline Level</a:t>
+            </a:r>
+            <a:endParaRPr b="0" lang="en-US" sz="1800" strike="noStrike" u="none">
+              <a:solidFill>
+                <a:srgbClr val="000000"/>
+              </a:solidFill>
+              <a:effectLst/>
+              <a:uFillTx/>
+              <a:latin typeface="Calibri"/>
+            </a:endParaRPr>
+          </a:p>
+          <a:p>
+            <a:pPr lvl="5" marL="2592000" indent="-216000">
+              <a:spcBef>
+                <a:spcPts val="283"/>
+              </a:spcBef>
+              <a:buClr>
+                <a:srgbClr val="000000"/>
+              </a:buClr>
+              <a:buSzPct val="45000"/>
+              <a:buFont typeface="Wingdings" charset="2"/>
+              <a:buChar char=""/>
+            </a:pPr>
+            <a:r>
+              <a:rPr b="0" lang="en-US" sz="1800" strike="noStrike" u="none">
+                <a:solidFill>
+                  <a:srgbClr val="000000"/>
+                </a:solidFill>
+                <a:effectLst/>
+                <a:uFillTx/>
+                <a:latin typeface="Calibri"/>
+              </a:rPr>
+              <a:t>Sixth Outline Level</a:t>
+            </a:r>
+            <a:endParaRPr b="0" lang="en-US" sz="1800" strike="noStrike" u="none">
+              <a:solidFill>
+                <a:srgbClr val="000000"/>
+              </a:solidFill>
+              <a:effectLst/>
+              <a:uFillTx/>
+              <a:latin typeface="Calibri"/>
+            </a:endParaRPr>
+          </a:p>
+          <a:p>
+            <a:pPr lvl="6" marL="3024000" indent="-216000">
+              <a:spcBef>
+                <a:spcPts val="283"/>
+              </a:spcBef>
+              <a:buClr>
+                <a:srgbClr val="000000"/>
+              </a:buClr>
+              <a:buSzPct val="45000"/>
+              <a:buFont typeface="Wingdings" charset="2"/>
+              <a:buChar char=""/>
+            </a:pPr>
+            <a:r>
+              <a:rPr b="0" lang="en-US" sz="1800" strike="noStrike" u="none">
+                <a:solidFill>
+                  <a:srgbClr val="000000"/>
+                </a:solidFill>
+                <a:effectLst/>
+                <a:uFillTx/>
+                <a:latin typeface="Calibri"/>
+              </a:rPr>
+              <a:t>Seventh Outline Level</a:t>
+            </a:r>
+            <a:endParaRPr b="0" lang="en-US" sz="1800" strike="noStrike" u="none">
+              <a:solidFill>
+                <a:srgbClr val="000000"/>
+              </a:solidFill>
+              <a:effectLst/>
+              <a:uFillTx/>
+              <a:latin typeface="Calibri"/>
+            </a:endParaRPr>
+          </a:p>
+        </p:txBody>
+      </p:sp>
+      <p:sp>
+        <p:nvSpPr>
+          <p:cNvPr id="14" name="PlaceHolder 4"/>
+          <p:cNvSpPr>
+            <a:spLocks noGrp="1"/>
+          </p:cNvSpPr>
+          <p:nvPr>
+            <p:ph type="ftr" idx="7"/>
+          </p:nvPr>
+        </p:nvSpPr>
+        <p:spPr>
+          <a:xfrm>
+            <a:off x="4559760" y="9637920"/>
+            <a:ext cx="4291200" cy="517680"/>
+          </a:xfrm>
+          <a:prstGeom prst="rect">
+            <a:avLst/>
+          </a:prstGeom>
+          <a:noFill/>
+          <a:ln w="0">
+            <a:noFill/>
+          </a:ln>
+        </p:spPr>
+        <p:txBody>
+          <a:bodyPr lIns="0" rIns="0" tIns="0" bIns="0" anchor="t">
+            <a:noAutofit/>
+          </a:bodyPr>
           <a:lstStyle>
-            <a:lvl1pPr algn="r">
-              <a:defRPr>
-                <a:solidFill>
-                  <a:schemeClr val="tx1">
-                    <a:tint val="75000"/>
-                  </a:schemeClr>
-                </a:solidFill>
+            <a:lvl1pPr indent="0" algn="ctr">
+              <a:buNone/>
+              <a:defRPr b="0" lang="en-US" sz="1400" strike="noStrike" u="none">
+                <a:solidFill>
+                  <a:srgbClr val="000000"/>
+                </a:solidFill>
+                <a:effectLst/>
+                <a:uFillTx/>
+                <a:latin typeface="Times New Roman"/>
               </a:defRPr>
             </a:lvl1pPr>
           </a:lstStyle>
           <a:p>
-            <a:fld id="{B6F15528-21DE-4FAA-801E-634DDDAF4B2B}" type="slidenum">
-              <a:t>#</a:t>
+            <a:pPr indent="0" algn="ctr">
+              <a:buNone/>
+            </a:pPr>
+            <a:r>
+              <a:rPr b="0" lang="en-US" sz="1400" strike="noStrike" u="none">
+                <a:solidFill>
+                  <a:srgbClr val="000000"/>
+                </a:solidFill>
+                <a:effectLst/>
+                <a:uFillTx/>
+                <a:latin typeface="Times New Roman"/>
+              </a:rPr>
+              <a:t>&lt;footer&gt;</a:t>
+            </a:r>
+            <a:endParaRPr b="0" lang="en-US" sz="1400" strike="noStrike" u="none">
+              <a:solidFill>
+                <a:srgbClr val="000000"/>
+              </a:solidFill>
+              <a:effectLst/>
+              <a:uFillTx/>
+              <a:latin typeface="Times New Roman"/>
+            </a:endParaRPr>
+          </a:p>
+        </p:txBody>
+      </p:sp>
+      <p:sp>
+        <p:nvSpPr>
+          <p:cNvPr id="15" name="PlaceHolder 5"/>
+          <p:cNvSpPr>
+            <a:spLocks noGrp="1"/>
+          </p:cNvSpPr>
+          <p:nvPr>
+            <p:ph type="dt" idx="8"/>
+          </p:nvPr>
+        </p:nvSpPr>
+        <p:spPr>
+          <a:xfrm>
+            <a:off x="670680" y="9637920"/>
+            <a:ext cx="3084120" cy="517680"/>
+          </a:xfrm>
+          <a:prstGeom prst="rect">
+            <a:avLst/>
+          </a:prstGeom>
+          <a:noFill/>
+          <a:ln w="0">
+            <a:noFill/>
+          </a:ln>
+        </p:spPr>
+        <p:txBody>
+          <a:bodyPr lIns="0" rIns="0" tIns="0" bIns="0" anchor="t">
+            <a:noAutofit/>
+          </a:bodyPr>
+          <a:lstStyle>
+            <a:lvl1pPr indent="0">
+              <a:buNone/>
+              <a:defRPr b="0" lang="en-US" sz="1400" strike="noStrike" u="none">
+                <a:solidFill>
+                  <a:srgbClr val="000000"/>
+                </a:solidFill>
+                <a:effectLst/>
+                <a:uFillTx/>
+                <a:latin typeface="Times New Roman"/>
+              </a:defRPr>
+            </a:lvl1pPr>
+          </a:lstStyle>
+          <a:p>
+            <a:pPr indent="0">
+              <a:buNone/>
+            </a:pPr>
+            <a:r>
+              <a:rPr b="0" lang="en-US" sz="1400" strike="noStrike" u="none">
+                <a:solidFill>
+                  <a:srgbClr val="000000"/>
+                </a:solidFill>
+                <a:effectLst/>
+                <a:uFillTx/>
+                <a:latin typeface="Times New Roman"/>
+              </a:rPr>
+              <a:t>&lt;date/time&gt;</a:t>
+            </a:r>
+            <a:endParaRPr b="0" lang="en-US" sz="1400" strike="noStrike" u="none">
+              <a:solidFill>
+                <a:srgbClr val="000000"/>
+              </a:solidFill>
+              <a:effectLst/>
+              <a:uFillTx/>
+              <a:latin typeface="Times New Roman"/>
+            </a:endParaRPr>
+          </a:p>
+        </p:txBody>
+      </p:sp>
+      <p:sp>
+        <p:nvSpPr>
+          <p:cNvPr id="16" name="PlaceHolder 6"/>
+          <p:cNvSpPr>
+            <a:spLocks noGrp="1"/>
+          </p:cNvSpPr>
+          <p:nvPr>
+            <p:ph type="sldNum" idx="9"/>
+          </p:nvPr>
+        </p:nvSpPr>
+        <p:spPr>
+          <a:xfrm>
+            <a:off x="9655920" y="9637920"/>
+            <a:ext cx="3084120" cy="517680"/>
+          </a:xfrm>
+          <a:prstGeom prst="rect">
+            <a:avLst/>
+          </a:prstGeom>
+          <a:noFill/>
+          <a:ln w="0">
+            <a:noFill/>
+          </a:ln>
+        </p:spPr>
+        <p:txBody>
+          <a:bodyPr lIns="0" rIns="0" tIns="0" bIns="0" anchor="t">
+            <a:noAutofit/>
+          </a:bodyPr>
+          <a:lstStyle>
+            <a:lvl1pPr indent="0" algn="r">
+              <a:lnSpc>
+                <a:spcPct val="100000"/>
+              </a:lnSpc>
+              <a:buNone/>
+              <a:defRPr b="0" lang="en-US" sz="1400" strike="noStrike" u="none">
+                <a:solidFill>
+                  <a:schemeClr val="dk1">
+                    <a:tint val="75000"/>
+                  </a:schemeClr>
+                </a:solidFill>
+                <a:effectLst/>
+                <a:uFillTx/>
+                <a:latin typeface="Times New Roman"/>
+              </a:defRPr>
+            </a:lvl1pPr>
+          </a:lstStyle>
+          <a:p>
+            <a:pPr indent="0" algn="r">
+              <a:lnSpc>
+                <a:spcPct val="100000"/>
+              </a:lnSpc>
+              <a:buNone/>
+            </a:pPr>
+            <a:fld id="{EC589D75-C282-4CDF-8ED3-3425EC2589C4}" type="slidenum">
+              <a:rPr b="0" lang="en-US" sz="1400" strike="noStrike" u="none">
+                <a:solidFill>
+                  <a:schemeClr val="dk1">
+                    <a:tint val="75000"/>
+                  </a:schemeClr>
+                </a:solidFill>
+                <a:effectLst/>
+                <a:uFillTx/>
+                <a:latin typeface="Times New Roman"/>
+              </a:rPr>
+              <a:t>&lt;number&gt;</a:t>
             </a:fld>
+            <a:endParaRPr b="0" lang="en-US" sz="1400" strike="noStrike" u="none">
+              <a:solidFill>
+                <a:srgbClr val="000000"/>
+              </a:solidFill>
+              <a:effectLst/>
+              <a:uFillTx/>
+              <a:latin typeface="Times New Roman"/>
+            </a:endParaRPr>
           </a:p>
         </p:txBody>
       </p:sp>
     </p:spTree>
   </p:cSld>
-  <p:clrMapOvr>
-    <a:masterClrMapping/>
-  </p:clrMapOvr>
 </p:sldLayout>
 </file>
 
 <file path=ppt/slideLayouts/slideLayout4.xml><?xml version="1.0" encoding="utf-8"?>
-<p:sldLayout xmlns:a="http://schemas.openxmlformats.org/drawingml/2006/main" xmlns:r="http://schemas.openxmlformats.org/officeDocument/2006/relationships" xmlns:p="http://schemas.openxmlformats.org/presentationml/2006/main" preserve="1" type="obj" showMasterSp="0">
+<p:sldLayout xmlns:a="http://schemas.openxmlformats.org/drawingml/2006/main" xmlns:p="http://schemas.openxmlformats.org/presentationml/2006/main" xmlns:r="http://schemas.openxmlformats.org/officeDocument/2006/relationships" xmlns:p14="http://schemas.microsoft.com/office/powerpoint/2010/main" xmlns:p15="http://schemas.microsoft.com/office/powerpoint/2012/main" xmlns:mc="http://schemas.openxmlformats.org/markup-compatibility/2006" type="obj" preserve="1">
   <p:cSld name="Title Only">
     <p:bg>
       <p:bgPr>
         <a:solidFill>
-          <a:schemeClr val="bg1"/>
+          <a:schemeClr val="lt1"/>
         </a:solidFill>
-        <a:effectLst/>
       </p:bgPr>
     </p:bg>
     <p:spTree>
@@ -607,29 +1683,31 @@
       </p:grpSpPr>
       <p:pic>
         <p:nvPicPr>
-          <p:cNvPr id="16" name="bg object 16"/>
+          <p:cNvPr id="17" name="bg object 16" descr=""/>
           <p:cNvPicPr/>
           <p:nvPr/>
         </p:nvPicPr>
         <p:blipFill>
-          <a:blip r:embed="rId2" cstate="print"/>
-          <a:stretch>
-            <a:fillRect/>
-          </a:stretch>
+          <a:blip r:embed="rId2"/>
+          <a:stretch/>
         </p:blipFill>
         <p:spPr>
           <a:xfrm>
             <a:off x="0" y="0"/>
-            <a:ext cx="13411200" cy="10363200"/>
-          </a:xfrm>
-          <a:prstGeom prst="rect">
-            <a:avLst/>
-          </a:prstGeom>
+            <a:ext cx="13410720" cy="10362960"/>
+          </a:xfrm>
+          <a:prstGeom prst="rect">
+            <a:avLst/>
+          </a:prstGeom>
+          <a:noFill/>
+          <a:ln w="0">
+            <a:noFill/>
+          </a:ln>
         </p:spPr>
       </p:pic>
       <p:sp>
         <p:nvSpPr>
-          <p:cNvPr id="2" name="Holder 2"/>
+          <p:cNvPr id="18" name="PlaceHolder 1"/>
           <p:cNvSpPr>
             <a:spLocks noGrp="1"/>
           </p:cNvSpPr>
@@ -637,243 +1715,523 @@
             <p:ph type="title"/>
           </p:nvPr>
         </p:nvSpPr>
-        <p:spPr/>
+        <p:spPr>
+          <a:xfrm>
+            <a:off x="856800" y="530640"/>
+            <a:ext cx="2056320" cy="781200"/>
+          </a:xfrm>
+          <a:prstGeom prst="rect">
+            <a:avLst/>
+          </a:prstGeom>
+          <a:noFill/>
+          <a:ln w="0">
+            <a:noFill/>
+          </a:ln>
+        </p:spPr>
         <p:txBody>
-          <a:bodyPr lIns="0" tIns="0" rIns="0" bIns="0"/>
-          <a:lstStyle>
-            <a:lvl1pPr>
-              <a:defRPr sz="4950" b="0" i="0">
-                <a:solidFill>
-                  <a:schemeClr val="tx1"/>
-                </a:solidFill>
-                <a:latin typeface="Cambria"/>
-                <a:cs typeface="Cambria"/>
-              </a:defRPr>
-            </a:lvl1pPr>
-          </a:lstStyle>
-          <a:p/>
-        </p:txBody>
-      </p:sp>
-      <p:sp>
-        <p:nvSpPr>
-          <p:cNvPr id="3" name="Holder 3"/>
-          <p:cNvSpPr>
-            <a:spLocks noGrp="1"/>
-          </p:cNvSpPr>
-          <p:nvPr>
-            <p:ph type="ftr" idx="5" sz="quarter"/>
-          </p:nvPr>
-        </p:nvSpPr>
-        <p:spPr/>
-        <p:txBody>
-          <a:bodyPr lIns="0" tIns="0" rIns="0" bIns="0"/>
-          <a:lstStyle>
-            <a:lvl1pPr algn="ctr">
-              <a:defRPr>
-                <a:solidFill>
-                  <a:schemeClr val="tx1">
-                    <a:tint val="75000"/>
-                  </a:schemeClr>
-                </a:solidFill>
-              </a:defRPr>
-            </a:lvl1pPr>
-          </a:lstStyle>
-          <a:p/>
-        </p:txBody>
-      </p:sp>
-      <p:sp>
-        <p:nvSpPr>
-          <p:cNvPr id="4" name="Holder 4"/>
-          <p:cNvSpPr>
-            <a:spLocks noGrp="1"/>
-          </p:cNvSpPr>
-          <p:nvPr>
-            <p:ph type="dt" idx="6" sz="half"/>
-          </p:nvPr>
-        </p:nvSpPr>
-        <p:spPr/>
-        <p:txBody>
-          <a:bodyPr lIns="0" tIns="0" rIns="0" bIns="0"/>
-          <a:lstStyle>
-            <a:lvl1pPr algn="l">
-              <a:defRPr>
-                <a:solidFill>
-                  <a:schemeClr val="tx1">
-                    <a:tint val="75000"/>
-                  </a:schemeClr>
-                </a:solidFill>
-              </a:defRPr>
-            </a:lvl1pPr>
-          </a:lstStyle>
+          <a:bodyPr lIns="0" rIns="0" tIns="0" bIns="0" anchor="t">
+            <a:noAutofit/>
+          </a:bodyPr>
           <a:p>
-            <a:fld id="{1D8BD707-D9CF-40AE-B4C6-C98DA3205C09}" type="datetimeFigureOut">
-              <a:rPr lang="en-US"/>
-            </a:fld>
+            <a:pPr indent="0">
+              <a:buNone/>
+            </a:pPr>
+            <a:r>
+              <a:rPr b="0" lang="en-US" sz="4950" strike="noStrike" u="none">
+                <a:solidFill>
+                  <a:srgbClr val="000000"/>
+                </a:solidFill>
+                <a:effectLst/>
+                <a:uFillTx/>
+                <a:latin typeface="Calibri"/>
+              </a:rPr>
+              <a:t>Click to edit the title text format</a:t>
+            </a:r>
+            <a:endParaRPr b="0" lang="en-US" sz="4950" strike="noStrike" u="none">
+              <a:solidFill>
+                <a:srgbClr val="000000"/>
+              </a:solidFill>
+              <a:effectLst/>
+              <a:uFillTx/>
+              <a:latin typeface="Calibri"/>
+            </a:endParaRPr>
           </a:p>
         </p:txBody>
       </p:sp>
       <p:sp>
         <p:nvSpPr>
-          <p:cNvPr id="5" name="Holder 5"/>
+          <p:cNvPr id="19" name="PlaceHolder 2"/>
           <p:cNvSpPr>
             <a:spLocks noGrp="1"/>
           </p:cNvSpPr>
           <p:nvPr>
-            <p:ph type="sldNum" idx="7" sz="quarter"/>
+            <p:ph type="ftr" idx="10"/>
           </p:nvPr>
         </p:nvSpPr>
-        <p:spPr/>
+        <p:spPr>
+          <a:xfrm>
+            <a:off x="4559760" y="9637920"/>
+            <a:ext cx="4291200" cy="517680"/>
+          </a:xfrm>
+          <a:prstGeom prst="rect">
+            <a:avLst/>
+          </a:prstGeom>
+          <a:noFill/>
+          <a:ln w="0">
+            <a:noFill/>
+          </a:ln>
+        </p:spPr>
         <p:txBody>
-          <a:bodyPr lIns="0" tIns="0" rIns="0" bIns="0"/>
+          <a:bodyPr lIns="0" rIns="0" tIns="0" bIns="0" anchor="t">
+            <a:noAutofit/>
+          </a:bodyPr>
           <a:lstStyle>
-            <a:lvl1pPr algn="r">
-              <a:defRPr>
-                <a:solidFill>
-                  <a:schemeClr val="tx1">
-                    <a:tint val="75000"/>
-                  </a:schemeClr>
-                </a:solidFill>
+            <a:lvl1pPr indent="0" algn="ctr">
+              <a:buNone/>
+              <a:defRPr b="0" lang="en-US" sz="1400" strike="noStrike" u="none">
+                <a:solidFill>
+                  <a:srgbClr val="000000"/>
+                </a:solidFill>
+                <a:effectLst/>
+                <a:uFillTx/>
+                <a:latin typeface="Times New Roman"/>
               </a:defRPr>
             </a:lvl1pPr>
           </a:lstStyle>
           <a:p>
-            <a:fld id="{B6F15528-21DE-4FAA-801E-634DDDAF4B2B}" type="slidenum">
-              <a:t>#</a:t>
+            <a:pPr indent="0" algn="ctr">
+              <a:buNone/>
+            </a:pPr>
+            <a:r>
+              <a:rPr b="0" lang="en-US" sz="1400" strike="noStrike" u="none">
+                <a:solidFill>
+                  <a:srgbClr val="000000"/>
+                </a:solidFill>
+                <a:effectLst/>
+                <a:uFillTx/>
+                <a:latin typeface="Times New Roman"/>
+              </a:rPr>
+              <a:t>&lt;footer&gt;</a:t>
+            </a:r>
+            <a:endParaRPr b="0" lang="en-US" sz="1400" strike="noStrike" u="none">
+              <a:solidFill>
+                <a:srgbClr val="000000"/>
+              </a:solidFill>
+              <a:effectLst/>
+              <a:uFillTx/>
+              <a:latin typeface="Times New Roman"/>
+            </a:endParaRPr>
+          </a:p>
+        </p:txBody>
+      </p:sp>
+      <p:sp>
+        <p:nvSpPr>
+          <p:cNvPr id="20" name="PlaceHolder 3"/>
+          <p:cNvSpPr>
+            <a:spLocks noGrp="1"/>
+          </p:cNvSpPr>
+          <p:nvPr>
+            <p:ph type="dt" idx="11"/>
+          </p:nvPr>
+        </p:nvSpPr>
+        <p:spPr>
+          <a:xfrm>
+            <a:off x="670680" y="9637920"/>
+            <a:ext cx="3084120" cy="517680"/>
+          </a:xfrm>
+          <a:prstGeom prst="rect">
+            <a:avLst/>
+          </a:prstGeom>
+          <a:noFill/>
+          <a:ln w="0">
+            <a:noFill/>
+          </a:ln>
+        </p:spPr>
+        <p:txBody>
+          <a:bodyPr lIns="0" rIns="0" tIns="0" bIns="0" anchor="t">
+            <a:noAutofit/>
+          </a:bodyPr>
+          <a:lstStyle>
+            <a:lvl1pPr indent="0">
+              <a:buNone/>
+              <a:defRPr b="0" lang="en-US" sz="1400" strike="noStrike" u="none">
+                <a:solidFill>
+                  <a:srgbClr val="000000"/>
+                </a:solidFill>
+                <a:effectLst/>
+                <a:uFillTx/>
+                <a:latin typeface="Times New Roman"/>
+              </a:defRPr>
+            </a:lvl1pPr>
+          </a:lstStyle>
+          <a:p>
+            <a:pPr indent="0">
+              <a:buNone/>
+            </a:pPr>
+            <a:r>
+              <a:rPr b="0" lang="en-US" sz="1400" strike="noStrike" u="none">
+                <a:solidFill>
+                  <a:srgbClr val="000000"/>
+                </a:solidFill>
+                <a:effectLst/>
+                <a:uFillTx/>
+                <a:latin typeface="Times New Roman"/>
+              </a:rPr>
+              <a:t>&lt;date/time&gt;</a:t>
+            </a:r>
+            <a:endParaRPr b="0" lang="en-US" sz="1400" strike="noStrike" u="none">
+              <a:solidFill>
+                <a:srgbClr val="000000"/>
+              </a:solidFill>
+              <a:effectLst/>
+              <a:uFillTx/>
+              <a:latin typeface="Times New Roman"/>
+            </a:endParaRPr>
+          </a:p>
+        </p:txBody>
+      </p:sp>
+      <p:sp>
+        <p:nvSpPr>
+          <p:cNvPr id="21" name="PlaceHolder 4"/>
+          <p:cNvSpPr>
+            <a:spLocks noGrp="1"/>
+          </p:cNvSpPr>
+          <p:nvPr>
+            <p:ph type="sldNum" idx="12"/>
+          </p:nvPr>
+        </p:nvSpPr>
+        <p:spPr>
+          <a:xfrm>
+            <a:off x="9655920" y="9637920"/>
+            <a:ext cx="3084120" cy="517680"/>
+          </a:xfrm>
+          <a:prstGeom prst="rect">
+            <a:avLst/>
+          </a:prstGeom>
+          <a:noFill/>
+          <a:ln w="0">
+            <a:noFill/>
+          </a:ln>
+        </p:spPr>
+        <p:txBody>
+          <a:bodyPr lIns="0" rIns="0" tIns="0" bIns="0" anchor="t">
+            <a:noAutofit/>
+          </a:bodyPr>
+          <a:lstStyle>
+            <a:lvl1pPr indent="0" algn="r">
+              <a:lnSpc>
+                <a:spcPct val="100000"/>
+              </a:lnSpc>
+              <a:buNone/>
+              <a:defRPr b="0" lang="en-US" sz="1400" strike="noStrike" u="none">
+                <a:solidFill>
+                  <a:schemeClr val="dk1">
+                    <a:tint val="75000"/>
+                  </a:schemeClr>
+                </a:solidFill>
+                <a:effectLst/>
+                <a:uFillTx/>
+                <a:latin typeface="Times New Roman"/>
+              </a:defRPr>
+            </a:lvl1pPr>
+          </a:lstStyle>
+          <a:p>
+            <a:pPr indent="0" algn="r">
+              <a:lnSpc>
+                <a:spcPct val="100000"/>
+              </a:lnSpc>
+              <a:buNone/>
+            </a:pPr>
+            <a:fld id="{F39D3348-8D97-4A9D-80AA-DF1EA2057F22}" type="slidenum">
+              <a:rPr b="0" lang="en-US" sz="1400" strike="noStrike" u="none">
+                <a:solidFill>
+                  <a:schemeClr val="dk1">
+                    <a:tint val="75000"/>
+                  </a:schemeClr>
+                </a:solidFill>
+                <a:effectLst/>
+                <a:uFillTx/>
+                <a:latin typeface="Times New Roman"/>
+              </a:rPr>
+              <a:t>&lt;number&gt;</a:t>
             </a:fld>
+            <a:endParaRPr b="0" lang="en-US" sz="1400" strike="noStrike" u="none">
+              <a:solidFill>
+                <a:srgbClr val="000000"/>
+              </a:solidFill>
+              <a:effectLst/>
+              <a:uFillTx/>
+              <a:latin typeface="Times New Roman"/>
+            </a:endParaRPr>
+          </a:p>
+        </p:txBody>
+      </p:sp>
+      <p:sp>
+        <p:nvSpPr>
+          <p:cNvPr id="22" name="PlaceHolder 5"/>
+          <p:cNvSpPr>
+            <a:spLocks noGrp="1"/>
+          </p:cNvSpPr>
+          <p:nvPr>
+            <p:ph type="body"/>
+          </p:nvPr>
+        </p:nvSpPr>
+        <p:spPr>
+          <a:xfrm>
+            <a:off x="670320" y="2424960"/>
+            <a:ext cx="12069360" cy="6010200"/>
+          </a:xfrm>
+          <a:prstGeom prst="rect">
+            <a:avLst/>
+          </a:prstGeom>
+          <a:noFill/>
+          <a:ln w="0">
+            <a:noFill/>
+          </a:ln>
+        </p:spPr>
+        <p:txBody>
+          <a:bodyPr lIns="0" rIns="0" tIns="0" bIns="0" anchor="t">
+            <a:normAutofit/>
+          </a:bodyPr>
+          <a:p>
+            <a:pPr marL="432000" indent="-324000">
+              <a:spcBef>
+                <a:spcPts val="1417"/>
+              </a:spcBef>
+              <a:buClr>
+                <a:srgbClr val="000000"/>
+              </a:buClr>
+              <a:buSzPct val="45000"/>
+              <a:buFont typeface="Wingdings" charset="2"/>
+              <a:buChar char=""/>
+            </a:pPr>
+            <a:r>
+              <a:rPr b="0" lang="en-US" sz="1800" strike="noStrike" u="none">
+                <a:solidFill>
+                  <a:srgbClr val="000000"/>
+                </a:solidFill>
+                <a:effectLst/>
+                <a:uFillTx/>
+                <a:latin typeface="Calibri"/>
+              </a:rPr>
+              <a:t>Click to edit the outline text format</a:t>
+            </a:r>
+            <a:endParaRPr b="0" lang="en-US" sz="1800" strike="noStrike" u="none">
+              <a:solidFill>
+                <a:srgbClr val="000000"/>
+              </a:solidFill>
+              <a:effectLst/>
+              <a:uFillTx/>
+              <a:latin typeface="Calibri"/>
+            </a:endParaRPr>
+          </a:p>
+          <a:p>
+            <a:pPr lvl="1" marL="864000" indent="-324000">
+              <a:spcBef>
+                <a:spcPts val="1134"/>
+              </a:spcBef>
+              <a:buClr>
+                <a:srgbClr val="000000"/>
+              </a:buClr>
+              <a:buSzPct val="75000"/>
+              <a:buFont typeface="Symbol" charset="2"/>
+              <a:buChar char=""/>
+            </a:pPr>
+            <a:r>
+              <a:rPr b="0" lang="en-US" sz="1800" strike="noStrike" u="none">
+                <a:solidFill>
+                  <a:srgbClr val="000000"/>
+                </a:solidFill>
+                <a:effectLst/>
+                <a:uFillTx/>
+                <a:latin typeface="Calibri"/>
+              </a:rPr>
+              <a:t>Second Outline Level</a:t>
+            </a:r>
+            <a:endParaRPr b="0" lang="en-US" sz="1800" strike="noStrike" u="none">
+              <a:solidFill>
+                <a:srgbClr val="000000"/>
+              </a:solidFill>
+              <a:effectLst/>
+              <a:uFillTx/>
+              <a:latin typeface="Calibri"/>
+            </a:endParaRPr>
+          </a:p>
+          <a:p>
+            <a:pPr lvl="2" marL="1296000" indent="-288000">
+              <a:spcBef>
+                <a:spcPts val="850"/>
+              </a:spcBef>
+              <a:buClr>
+                <a:srgbClr val="000000"/>
+              </a:buClr>
+              <a:buSzPct val="45000"/>
+              <a:buFont typeface="Wingdings" charset="2"/>
+              <a:buChar char=""/>
+            </a:pPr>
+            <a:r>
+              <a:rPr b="0" lang="en-US" sz="1800" strike="noStrike" u="none">
+                <a:solidFill>
+                  <a:srgbClr val="000000"/>
+                </a:solidFill>
+                <a:effectLst/>
+                <a:uFillTx/>
+                <a:latin typeface="Calibri"/>
+              </a:rPr>
+              <a:t>Third Outline Level</a:t>
+            </a:r>
+            <a:endParaRPr b="0" lang="en-US" sz="1800" strike="noStrike" u="none">
+              <a:solidFill>
+                <a:srgbClr val="000000"/>
+              </a:solidFill>
+              <a:effectLst/>
+              <a:uFillTx/>
+              <a:latin typeface="Calibri"/>
+            </a:endParaRPr>
+          </a:p>
+          <a:p>
+            <a:pPr lvl="3" marL="1728000" indent="-216000">
+              <a:spcBef>
+                <a:spcPts val="567"/>
+              </a:spcBef>
+              <a:buClr>
+                <a:srgbClr val="000000"/>
+              </a:buClr>
+              <a:buSzPct val="75000"/>
+              <a:buFont typeface="Symbol" charset="2"/>
+              <a:buChar char=""/>
+            </a:pPr>
+            <a:r>
+              <a:rPr b="0" lang="en-US" sz="1800" strike="noStrike" u="none">
+                <a:solidFill>
+                  <a:srgbClr val="000000"/>
+                </a:solidFill>
+                <a:effectLst/>
+                <a:uFillTx/>
+                <a:latin typeface="Calibri"/>
+              </a:rPr>
+              <a:t>Fourth Outline Level</a:t>
+            </a:r>
+            <a:endParaRPr b="0" lang="en-US" sz="1800" strike="noStrike" u="none">
+              <a:solidFill>
+                <a:srgbClr val="000000"/>
+              </a:solidFill>
+              <a:effectLst/>
+              <a:uFillTx/>
+              <a:latin typeface="Calibri"/>
+            </a:endParaRPr>
+          </a:p>
+          <a:p>
+            <a:pPr lvl="4" marL="2160000" indent="-216000">
+              <a:spcBef>
+                <a:spcPts val="283"/>
+              </a:spcBef>
+              <a:buClr>
+                <a:srgbClr val="000000"/>
+              </a:buClr>
+              <a:buSzPct val="45000"/>
+              <a:buFont typeface="Wingdings" charset="2"/>
+              <a:buChar char=""/>
+            </a:pPr>
+            <a:r>
+              <a:rPr b="0" lang="en-US" sz="2000" strike="noStrike" u="none">
+                <a:solidFill>
+                  <a:srgbClr val="000000"/>
+                </a:solidFill>
+                <a:effectLst/>
+                <a:uFillTx/>
+                <a:latin typeface="Calibri"/>
+              </a:rPr>
+              <a:t>Fifth Outline Level</a:t>
+            </a:r>
+            <a:endParaRPr b="0" lang="en-US" sz="2000" strike="noStrike" u="none">
+              <a:solidFill>
+                <a:srgbClr val="000000"/>
+              </a:solidFill>
+              <a:effectLst/>
+              <a:uFillTx/>
+              <a:latin typeface="Calibri"/>
+            </a:endParaRPr>
+          </a:p>
+          <a:p>
+            <a:pPr lvl="5" marL="2592000" indent="-216000">
+              <a:spcBef>
+                <a:spcPts val="283"/>
+              </a:spcBef>
+              <a:buClr>
+                <a:srgbClr val="000000"/>
+              </a:buClr>
+              <a:buSzPct val="45000"/>
+              <a:buFont typeface="Wingdings" charset="2"/>
+              <a:buChar char=""/>
+            </a:pPr>
+            <a:r>
+              <a:rPr b="0" lang="en-US" sz="2000" strike="noStrike" u="none">
+                <a:solidFill>
+                  <a:srgbClr val="000000"/>
+                </a:solidFill>
+                <a:effectLst/>
+                <a:uFillTx/>
+                <a:latin typeface="Calibri"/>
+              </a:rPr>
+              <a:t>Sixth Outline Level</a:t>
+            </a:r>
+            <a:endParaRPr b="0" lang="en-US" sz="2000" strike="noStrike" u="none">
+              <a:solidFill>
+                <a:srgbClr val="000000"/>
+              </a:solidFill>
+              <a:effectLst/>
+              <a:uFillTx/>
+              <a:latin typeface="Calibri"/>
+            </a:endParaRPr>
+          </a:p>
+          <a:p>
+            <a:pPr lvl="6" marL="3024000" indent="-216000">
+              <a:spcBef>
+                <a:spcPts val="283"/>
+              </a:spcBef>
+              <a:buClr>
+                <a:srgbClr val="000000"/>
+              </a:buClr>
+              <a:buSzPct val="45000"/>
+              <a:buFont typeface="Wingdings" charset="2"/>
+              <a:buChar char=""/>
+            </a:pPr>
+            <a:r>
+              <a:rPr b="0" lang="en-US" sz="2000" strike="noStrike" u="none">
+                <a:solidFill>
+                  <a:srgbClr val="000000"/>
+                </a:solidFill>
+                <a:effectLst/>
+                <a:uFillTx/>
+                <a:latin typeface="Calibri"/>
+              </a:rPr>
+              <a:t>Seventh Outline Level</a:t>
+            </a:r>
+            <a:endParaRPr b="0" lang="en-US" sz="2000" strike="noStrike" u="none">
+              <a:solidFill>
+                <a:srgbClr val="000000"/>
+              </a:solidFill>
+              <a:effectLst/>
+              <a:uFillTx/>
+              <a:latin typeface="Calibri"/>
+            </a:endParaRPr>
           </a:p>
         </p:txBody>
       </p:sp>
     </p:spTree>
   </p:cSld>
-  <p:clrMapOvr>
-    <a:masterClrMapping/>
-  </p:clrMapOvr>
 </p:sldLayout>
 </file>
 
 <file path=ppt/slideLayouts/slideLayout5.xml><?xml version="1.0" encoding="utf-8"?>
-<p:sldLayout xmlns:a="http://schemas.openxmlformats.org/drawingml/2006/main" xmlns:r="http://schemas.openxmlformats.org/officeDocument/2006/relationships" xmlns:p="http://schemas.openxmlformats.org/presentationml/2006/main" preserve="1" type="obj">
+<p:sldLayout xmlns:a="http://schemas.openxmlformats.org/drawingml/2006/main" xmlns:p="http://schemas.openxmlformats.org/presentationml/2006/main" xmlns:r="http://schemas.openxmlformats.org/officeDocument/2006/relationships" xmlns:p14="http://schemas.microsoft.com/office/powerpoint/2010/main" xmlns:p15="http://schemas.microsoft.com/office/powerpoint/2012/main" xmlns:mc="http://schemas.openxmlformats.org/markup-compatibility/2006" type="obj" preserve="1">
   <p:cSld name="Blank">
-    <p:spTree>
-      <p:nvGrpSpPr>
-        <p:cNvPr id="1" name=""/>
-        <p:cNvGrpSpPr/>
-        <p:nvPr/>
-      </p:nvGrpSpPr>
-      <p:grpSpPr>
-        <a:xfrm>
-          <a:off x="0" y="0"/>
-          <a:ext cx="0" cy="0"/>
-          <a:chOff x="0" y="0"/>
-          <a:chExt cx="0" cy="0"/>
-        </a:xfrm>
-      </p:grpSpPr>
-      <p:sp>
-        <p:nvSpPr>
-          <p:cNvPr id="2" name="Holder 2"/>
-          <p:cNvSpPr>
-            <a:spLocks noGrp="1"/>
-          </p:cNvSpPr>
-          <p:nvPr>
-            <p:ph type="ftr" idx="5" sz="quarter"/>
-          </p:nvPr>
-        </p:nvSpPr>
-        <p:spPr/>
-        <p:txBody>
-          <a:bodyPr lIns="0" tIns="0" rIns="0" bIns="0"/>
-          <a:lstStyle>
-            <a:lvl1pPr algn="ctr">
-              <a:defRPr>
-                <a:solidFill>
-                  <a:schemeClr val="tx1">
-                    <a:tint val="75000"/>
-                  </a:schemeClr>
-                </a:solidFill>
-              </a:defRPr>
-            </a:lvl1pPr>
-          </a:lstStyle>
-          <a:p/>
-        </p:txBody>
-      </p:sp>
-      <p:sp>
-        <p:nvSpPr>
-          <p:cNvPr id="3" name="Holder 3"/>
-          <p:cNvSpPr>
-            <a:spLocks noGrp="1"/>
-          </p:cNvSpPr>
-          <p:nvPr>
-            <p:ph type="dt" idx="6" sz="half"/>
-          </p:nvPr>
-        </p:nvSpPr>
-        <p:spPr/>
-        <p:txBody>
-          <a:bodyPr lIns="0" tIns="0" rIns="0" bIns="0"/>
-          <a:lstStyle>
-            <a:lvl1pPr algn="l">
-              <a:defRPr>
-                <a:solidFill>
-                  <a:schemeClr val="tx1">
-                    <a:tint val="75000"/>
-                  </a:schemeClr>
-                </a:solidFill>
-              </a:defRPr>
-            </a:lvl1pPr>
-          </a:lstStyle>
-          <a:p>
-            <a:fld id="{1D8BD707-D9CF-40AE-B4C6-C98DA3205C09}" type="datetimeFigureOut">
-              <a:rPr lang="en-US"/>
-            </a:fld>
-          </a:p>
-        </p:txBody>
-      </p:sp>
-      <p:sp>
-        <p:nvSpPr>
-          <p:cNvPr id="4" name="Holder 4"/>
-          <p:cNvSpPr>
-            <a:spLocks noGrp="1"/>
-          </p:cNvSpPr>
-          <p:nvPr>
-            <p:ph type="sldNum" idx="7" sz="quarter"/>
-          </p:nvPr>
-        </p:nvSpPr>
-        <p:spPr/>
-        <p:txBody>
-          <a:bodyPr lIns="0" tIns="0" rIns="0" bIns="0"/>
-          <a:lstStyle>
-            <a:lvl1pPr algn="r">
-              <a:defRPr>
-                <a:solidFill>
-                  <a:schemeClr val="tx1">
-                    <a:tint val="75000"/>
-                  </a:schemeClr>
-                </a:solidFill>
-              </a:defRPr>
-            </a:lvl1pPr>
-          </a:lstStyle>
-          <a:p>
-            <a:fld id="{B6F15528-21DE-4FAA-801E-634DDDAF4B2B}" type="slidenum">
-              <a:t>#</a:t>
-            </a:fld>
-          </a:p>
-        </p:txBody>
-      </p:sp>
-    </p:spTree>
-  </p:cSld>
-  <p:clrMapOvr>
-    <a:masterClrMapping/>
-  </p:clrMapOvr>
-</p:sldLayout>
-</file>
-
-<file path=ppt/slideMasters/slideMaster1.xml><?xml version="1.0" encoding="utf-8"?>
-<p:sldMaster xmlns:a="http://schemas.openxmlformats.org/drawingml/2006/main" xmlns:r="http://schemas.openxmlformats.org/officeDocument/2006/relationships" xmlns:p="http://schemas.openxmlformats.org/presentationml/2006/main">
-  <p:cSld>
     <p:bg>
       <p:bgPr>
         <a:solidFill>
-          <a:schemeClr val="bg1"/>
+          <a:schemeClr val="lt1"/>
         </a:solidFill>
-        <a:effectLst/>
       </p:bgPr>
     </p:bg>
     <p:spTree>
@@ -892,7 +2250,215 @@
       </p:grpSpPr>
       <p:sp>
         <p:nvSpPr>
-          <p:cNvPr id="2" name="Holder 2"/>
+          <p:cNvPr id="23" name="PlaceHolder 1"/>
+          <p:cNvSpPr>
+            <a:spLocks noGrp="1"/>
+          </p:cNvSpPr>
+          <p:nvPr>
+            <p:ph type="ftr" idx="13"/>
+          </p:nvPr>
+        </p:nvSpPr>
+        <p:spPr>
+          <a:xfrm>
+            <a:off x="4559760" y="9637920"/>
+            <a:ext cx="4291200" cy="517680"/>
+          </a:xfrm>
+          <a:prstGeom prst="rect">
+            <a:avLst/>
+          </a:prstGeom>
+          <a:noFill/>
+          <a:ln w="0">
+            <a:noFill/>
+          </a:ln>
+        </p:spPr>
+        <p:txBody>
+          <a:bodyPr lIns="0" rIns="0" tIns="0" bIns="0" anchor="t">
+            <a:noAutofit/>
+          </a:bodyPr>
+          <a:lstStyle>
+            <a:lvl1pPr indent="0" algn="ctr">
+              <a:buNone/>
+              <a:defRPr b="0" lang="en-US" sz="1400" strike="noStrike" u="none">
+                <a:solidFill>
+                  <a:srgbClr val="000000"/>
+                </a:solidFill>
+                <a:effectLst/>
+                <a:uFillTx/>
+                <a:latin typeface="Times New Roman"/>
+              </a:defRPr>
+            </a:lvl1pPr>
+          </a:lstStyle>
+          <a:p>
+            <a:pPr indent="0" algn="ctr">
+              <a:buNone/>
+            </a:pPr>
+            <a:r>
+              <a:rPr b="0" lang="en-US" sz="1400" strike="noStrike" u="none">
+                <a:solidFill>
+                  <a:srgbClr val="000000"/>
+                </a:solidFill>
+                <a:effectLst/>
+                <a:uFillTx/>
+                <a:latin typeface="Times New Roman"/>
+              </a:rPr>
+              <a:t>&lt;footer&gt;</a:t>
+            </a:r>
+            <a:endParaRPr b="0" lang="en-US" sz="1400" strike="noStrike" u="none">
+              <a:solidFill>
+                <a:srgbClr val="000000"/>
+              </a:solidFill>
+              <a:effectLst/>
+              <a:uFillTx/>
+              <a:latin typeface="Times New Roman"/>
+            </a:endParaRPr>
+          </a:p>
+        </p:txBody>
+      </p:sp>
+      <p:sp>
+        <p:nvSpPr>
+          <p:cNvPr id="24" name="PlaceHolder 2"/>
+          <p:cNvSpPr>
+            <a:spLocks noGrp="1"/>
+          </p:cNvSpPr>
+          <p:nvPr>
+            <p:ph type="dt" idx="14"/>
+          </p:nvPr>
+        </p:nvSpPr>
+        <p:spPr>
+          <a:xfrm>
+            <a:off x="670680" y="9637920"/>
+            <a:ext cx="3084120" cy="517680"/>
+          </a:xfrm>
+          <a:prstGeom prst="rect">
+            <a:avLst/>
+          </a:prstGeom>
+          <a:noFill/>
+          <a:ln w="0">
+            <a:noFill/>
+          </a:ln>
+        </p:spPr>
+        <p:txBody>
+          <a:bodyPr lIns="0" rIns="0" tIns="0" bIns="0" anchor="t">
+            <a:noAutofit/>
+          </a:bodyPr>
+          <a:lstStyle>
+            <a:lvl1pPr indent="0">
+              <a:buNone/>
+              <a:defRPr b="0" lang="en-US" sz="1400" strike="noStrike" u="none">
+                <a:solidFill>
+                  <a:srgbClr val="000000"/>
+                </a:solidFill>
+                <a:effectLst/>
+                <a:uFillTx/>
+                <a:latin typeface="Times New Roman"/>
+              </a:defRPr>
+            </a:lvl1pPr>
+          </a:lstStyle>
+          <a:p>
+            <a:pPr indent="0">
+              <a:buNone/>
+            </a:pPr>
+            <a:r>
+              <a:rPr b="0" lang="en-US" sz="1400" strike="noStrike" u="none">
+                <a:solidFill>
+                  <a:srgbClr val="000000"/>
+                </a:solidFill>
+                <a:effectLst/>
+                <a:uFillTx/>
+                <a:latin typeface="Times New Roman"/>
+              </a:rPr>
+              <a:t>&lt;date/time&gt;</a:t>
+            </a:r>
+            <a:endParaRPr b="0" lang="en-US" sz="1400" strike="noStrike" u="none">
+              <a:solidFill>
+                <a:srgbClr val="000000"/>
+              </a:solidFill>
+              <a:effectLst/>
+              <a:uFillTx/>
+              <a:latin typeface="Times New Roman"/>
+            </a:endParaRPr>
+          </a:p>
+        </p:txBody>
+      </p:sp>
+      <p:sp>
+        <p:nvSpPr>
+          <p:cNvPr id="25" name="PlaceHolder 3"/>
+          <p:cNvSpPr>
+            <a:spLocks noGrp="1"/>
+          </p:cNvSpPr>
+          <p:nvPr>
+            <p:ph type="sldNum" idx="15"/>
+          </p:nvPr>
+        </p:nvSpPr>
+        <p:spPr>
+          <a:xfrm>
+            <a:off x="9655920" y="9637920"/>
+            <a:ext cx="3084120" cy="517680"/>
+          </a:xfrm>
+          <a:prstGeom prst="rect">
+            <a:avLst/>
+          </a:prstGeom>
+          <a:noFill/>
+          <a:ln w="0">
+            <a:noFill/>
+          </a:ln>
+        </p:spPr>
+        <p:txBody>
+          <a:bodyPr lIns="0" rIns="0" tIns="0" bIns="0" anchor="t">
+            <a:noAutofit/>
+          </a:bodyPr>
+          <a:lstStyle>
+            <a:lvl1pPr indent="0" algn="r">
+              <a:lnSpc>
+                <a:spcPct val="100000"/>
+              </a:lnSpc>
+              <a:buNone/>
+              <a:defRPr b="0" lang="en-US" sz="1400" strike="noStrike" u="none">
+                <a:solidFill>
+                  <a:schemeClr val="dk1">
+                    <a:tint val="75000"/>
+                  </a:schemeClr>
+                </a:solidFill>
+                <a:effectLst/>
+                <a:uFillTx/>
+                <a:latin typeface="Times New Roman"/>
+              </a:defRPr>
+            </a:lvl1pPr>
+          </a:lstStyle>
+          <a:p>
+            <a:pPr indent="0" algn="r">
+              <a:lnSpc>
+                <a:spcPct val="100000"/>
+              </a:lnSpc>
+              <a:buNone/>
+            </a:pPr>
+            <a:fld id="{80AA504B-7F3D-41D2-A691-DD5D01F0DA42}" type="slidenum">
+              <a:rPr b="0" lang="en-US" sz="1400" strike="noStrike" u="none">
+                <a:solidFill>
+                  <a:schemeClr val="dk1">
+                    <a:tint val="75000"/>
+                  </a:schemeClr>
+                </a:solidFill>
+                <a:effectLst/>
+                <a:uFillTx/>
+                <a:latin typeface="Times New Roman"/>
+              </a:rPr>
+              <a:t>&lt;number&gt;</a:t>
+            </a:fld>
+            <a:endParaRPr b="0" lang="en-US" sz="1400" strike="noStrike" u="none">
+              <a:solidFill>
+                <a:srgbClr val="000000"/>
+              </a:solidFill>
+              <a:effectLst/>
+              <a:uFillTx/>
+              <a:latin typeface="Times New Roman"/>
+            </a:endParaRPr>
+          </a:p>
+        </p:txBody>
+      </p:sp>
+      <p:sp>
+        <p:nvSpPr>
+          <p:cNvPr id="26" name="PlaceHolder 4"/>
           <p:cNvSpPr>
             <a:spLocks noGrp="1"/>
           </p:cNvSpPr>
@@ -902,337 +2468,337 @@
         </p:nvSpPr>
         <p:spPr>
           <a:xfrm>
-            <a:off x="856753" y="530790"/>
-            <a:ext cx="2056764" cy="781685"/>
-          </a:xfrm>
-          <a:prstGeom prst="rect">
-            <a:avLst/>
-          </a:prstGeom>
+            <a:off x="670320" y="413280"/>
+            <a:ext cx="12069360" cy="1730160"/>
+          </a:xfrm>
+          <a:prstGeom prst="rect">
+            <a:avLst/>
+          </a:prstGeom>
+          <a:noFill/>
+          <a:ln w="0">
+            <a:noFill/>
+          </a:ln>
         </p:spPr>
         <p:txBody>
-          <a:bodyPr wrap="square" lIns="0" tIns="0" rIns="0" bIns="0">
-            <a:spAutoFit/>
+          <a:bodyPr lIns="0" rIns="0" tIns="0" bIns="0" anchor="ctr">
+            <a:noAutofit/>
           </a:bodyPr>
-          <a:lstStyle>
-            <a:lvl1pPr>
-              <a:defRPr sz="4950" b="0" i="0">
-                <a:solidFill>
-                  <a:schemeClr val="tx1"/>
-                </a:solidFill>
-                <a:latin typeface="Cambria"/>
-                <a:cs typeface="Cambria"/>
-              </a:defRPr>
-            </a:lvl1pPr>
-          </a:lstStyle>
-          <a:p/>
-        </p:txBody>
-      </p:sp>
-      <p:sp>
-        <p:nvSpPr>
-          <p:cNvPr id="3" name="Holder 3"/>
-          <p:cNvSpPr>
-            <a:spLocks noGrp="1"/>
-          </p:cNvSpPr>
-          <p:nvPr>
-            <p:ph type="body" idx="1"/>
-          </p:nvPr>
-        </p:nvSpPr>
-        <p:spPr>
-          <a:xfrm>
-            <a:off x="670560" y="2383536"/>
-            <a:ext cx="12070080" cy="6839712"/>
-          </a:xfrm>
-          <a:prstGeom prst="rect">
-            <a:avLst/>
-          </a:prstGeom>
-        </p:spPr>
-        <p:txBody>
-          <a:bodyPr wrap="square" lIns="0" tIns="0" rIns="0" bIns="0">
-            <a:spAutoFit/>
-          </a:bodyPr>
-          <a:lstStyle>
-            <a:lvl1pPr>
-              <a:defRPr/>
-            </a:lvl1pPr>
-          </a:lstStyle>
-          <a:p/>
-        </p:txBody>
-      </p:sp>
-      <p:sp>
-        <p:nvSpPr>
-          <p:cNvPr id="4" name="Holder 4"/>
-          <p:cNvSpPr>
-            <a:spLocks noGrp="1"/>
-          </p:cNvSpPr>
-          <p:nvPr>
-            <p:ph type="ftr" idx="5" sz="quarter"/>
-          </p:nvPr>
-        </p:nvSpPr>
-        <p:spPr>
-          <a:xfrm>
-            <a:off x="4559808" y="9637776"/>
-            <a:ext cx="4291584" cy="518160"/>
-          </a:xfrm>
-          <a:prstGeom prst="rect">
-            <a:avLst/>
-          </a:prstGeom>
-        </p:spPr>
-        <p:txBody>
-          <a:bodyPr wrap="square" lIns="0" tIns="0" rIns="0" bIns="0">
-            <a:spAutoFit/>
-          </a:bodyPr>
-          <a:lstStyle>
-            <a:lvl1pPr algn="ctr">
-              <a:defRPr>
-                <a:solidFill>
-                  <a:schemeClr val="tx1">
-                    <a:tint val="75000"/>
-                  </a:schemeClr>
-                </a:solidFill>
-              </a:defRPr>
-            </a:lvl1pPr>
-          </a:lstStyle>
-          <a:p/>
-        </p:txBody>
-      </p:sp>
-      <p:sp>
-        <p:nvSpPr>
-          <p:cNvPr id="5" name="Holder 5"/>
-          <p:cNvSpPr>
-            <a:spLocks noGrp="1"/>
-          </p:cNvSpPr>
-          <p:nvPr>
-            <p:ph type="dt" idx="6" sz="half"/>
-          </p:nvPr>
-        </p:nvSpPr>
-        <p:spPr>
-          <a:xfrm>
-            <a:off x="670560" y="9637776"/>
-            <a:ext cx="3084576" cy="518160"/>
-          </a:xfrm>
-          <a:prstGeom prst="rect">
-            <a:avLst/>
-          </a:prstGeom>
-        </p:spPr>
-        <p:txBody>
-          <a:bodyPr wrap="square" lIns="0" tIns="0" rIns="0" bIns="0">
-            <a:spAutoFit/>
-          </a:bodyPr>
-          <a:lstStyle>
-            <a:lvl1pPr algn="l">
-              <a:defRPr>
-                <a:solidFill>
-                  <a:schemeClr val="tx1">
-                    <a:tint val="75000"/>
-                  </a:schemeClr>
-                </a:solidFill>
-              </a:defRPr>
-            </a:lvl1pPr>
-          </a:lstStyle>
           <a:p>
-            <a:fld id="{1D8BD707-D9CF-40AE-B4C6-C98DA3205C09}" type="datetimeFigureOut">
-              <a:rPr lang="en-US"/>
-            </a:fld>
+            <a:pPr indent="0" algn="ctr">
+              <a:buNone/>
+            </a:pPr>
+            <a:r>
+              <a:rPr b="0" lang="en-US" sz="1800" strike="noStrike" u="none">
+                <a:solidFill>
+                  <a:srgbClr val="000000"/>
+                </a:solidFill>
+                <a:effectLst/>
+                <a:uFillTx/>
+                <a:latin typeface="Calibri"/>
+              </a:rPr>
+              <a:t>Click to edit the title text format</a:t>
+            </a:r>
+            <a:endParaRPr b="0" lang="en-US" sz="1800" strike="noStrike" u="none">
+              <a:solidFill>
+                <a:srgbClr val="000000"/>
+              </a:solidFill>
+              <a:effectLst/>
+              <a:uFillTx/>
+              <a:latin typeface="Calibri"/>
+            </a:endParaRPr>
           </a:p>
         </p:txBody>
       </p:sp>
       <p:sp>
         <p:nvSpPr>
-          <p:cNvPr id="6" name="Holder 6"/>
+          <p:cNvPr id="27" name="PlaceHolder 5"/>
           <p:cNvSpPr>
             <a:spLocks noGrp="1"/>
           </p:cNvSpPr>
           <p:nvPr>
-            <p:ph type="sldNum" idx="7" sz="quarter"/>
+            <p:ph type="body"/>
           </p:nvPr>
         </p:nvSpPr>
         <p:spPr>
           <a:xfrm>
-            <a:off x="9656064" y="9637776"/>
-            <a:ext cx="3084576" cy="518160"/>
-          </a:xfrm>
-          <a:prstGeom prst="rect">
-            <a:avLst/>
-          </a:prstGeom>
+            <a:off x="670320" y="2424960"/>
+            <a:ext cx="12069360" cy="6010200"/>
+          </a:xfrm>
+          <a:prstGeom prst="rect">
+            <a:avLst/>
+          </a:prstGeom>
+          <a:noFill/>
+          <a:ln w="0">
+            <a:noFill/>
+          </a:ln>
         </p:spPr>
         <p:txBody>
-          <a:bodyPr wrap="square" lIns="0" tIns="0" rIns="0" bIns="0">
-            <a:spAutoFit/>
+          <a:bodyPr lIns="0" rIns="0" tIns="0" bIns="0" anchor="t">
+            <a:normAutofit/>
           </a:bodyPr>
-          <a:lstStyle>
-            <a:lvl1pPr algn="r">
-              <a:defRPr>
-                <a:solidFill>
-                  <a:schemeClr val="tx1">
-                    <a:tint val="75000"/>
-                  </a:schemeClr>
-                </a:solidFill>
-              </a:defRPr>
-            </a:lvl1pPr>
-          </a:lstStyle>
           <a:p>
-            <a:fld id="{B6F15528-21DE-4FAA-801E-634DDDAF4B2B}" type="slidenum">
-              <a:t>#</a:t>
-            </a:fld>
+            <a:pPr marL="432000" indent="-324000">
+              <a:spcBef>
+                <a:spcPts val="1417"/>
+              </a:spcBef>
+              <a:buClr>
+                <a:srgbClr val="000000"/>
+              </a:buClr>
+              <a:buSzPct val="45000"/>
+              <a:buFont typeface="Wingdings" charset="2"/>
+              <a:buChar char=""/>
+            </a:pPr>
+            <a:r>
+              <a:rPr b="0" lang="en-US" sz="1800" strike="noStrike" u="none">
+                <a:solidFill>
+                  <a:srgbClr val="000000"/>
+                </a:solidFill>
+                <a:effectLst/>
+                <a:uFillTx/>
+                <a:latin typeface="Calibri"/>
+              </a:rPr>
+              <a:t>Click to edit the outline text format</a:t>
+            </a:r>
+            <a:endParaRPr b="0" lang="en-US" sz="1800" strike="noStrike" u="none">
+              <a:solidFill>
+                <a:srgbClr val="000000"/>
+              </a:solidFill>
+              <a:effectLst/>
+              <a:uFillTx/>
+              <a:latin typeface="Calibri"/>
+            </a:endParaRPr>
+          </a:p>
+          <a:p>
+            <a:pPr lvl="1" marL="864000" indent="-324000">
+              <a:spcBef>
+                <a:spcPts val="1134"/>
+              </a:spcBef>
+              <a:buClr>
+                <a:srgbClr val="000000"/>
+              </a:buClr>
+              <a:buSzPct val="75000"/>
+              <a:buFont typeface="Symbol" charset="2"/>
+              <a:buChar char=""/>
+            </a:pPr>
+            <a:r>
+              <a:rPr b="0" lang="en-US" sz="1800" strike="noStrike" u="none">
+                <a:solidFill>
+                  <a:srgbClr val="000000"/>
+                </a:solidFill>
+                <a:effectLst/>
+                <a:uFillTx/>
+                <a:latin typeface="Calibri"/>
+              </a:rPr>
+              <a:t>Second Outline Level</a:t>
+            </a:r>
+            <a:endParaRPr b="0" lang="en-US" sz="1800" strike="noStrike" u="none">
+              <a:solidFill>
+                <a:srgbClr val="000000"/>
+              </a:solidFill>
+              <a:effectLst/>
+              <a:uFillTx/>
+              <a:latin typeface="Calibri"/>
+            </a:endParaRPr>
+          </a:p>
+          <a:p>
+            <a:pPr lvl="2" marL="1296000" indent="-288000">
+              <a:spcBef>
+                <a:spcPts val="850"/>
+              </a:spcBef>
+              <a:buClr>
+                <a:srgbClr val="000000"/>
+              </a:buClr>
+              <a:buSzPct val="45000"/>
+              <a:buFont typeface="Wingdings" charset="2"/>
+              <a:buChar char=""/>
+            </a:pPr>
+            <a:r>
+              <a:rPr b="0" lang="en-US" sz="1800" strike="noStrike" u="none">
+                <a:solidFill>
+                  <a:srgbClr val="000000"/>
+                </a:solidFill>
+                <a:effectLst/>
+                <a:uFillTx/>
+                <a:latin typeface="Calibri"/>
+              </a:rPr>
+              <a:t>Third Outline Level</a:t>
+            </a:r>
+            <a:endParaRPr b="0" lang="en-US" sz="1800" strike="noStrike" u="none">
+              <a:solidFill>
+                <a:srgbClr val="000000"/>
+              </a:solidFill>
+              <a:effectLst/>
+              <a:uFillTx/>
+              <a:latin typeface="Calibri"/>
+            </a:endParaRPr>
+          </a:p>
+          <a:p>
+            <a:pPr lvl="3" marL="1728000" indent="-216000">
+              <a:spcBef>
+                <a:spcPts val="567"/>
+              </a:spcBef>
+              <a:buClr>
+                <a:srgbClr val="000000"/>
+              </a:buClr>
+              <a:buSzPct val="75000"/>
+              <a:buFont typeface="Symbol" charset="2"/>
+              <a:buChar char=""/>
+            </a:pPr>
+            <a:r>
+              <a:rPr b="0" lang="en-US" sz="1800" strike="noStrike" u="none">
+                <a:solidFill>
+                  <a:srgbClr val="000000"/>
+                </a:solidFill>
+                <a:effectLst/>
+                <a:uFillTx/>
+                <a:latin typeface="Calibri"/>
+              </a:rPr>
+              <a:t>Fourth Outline Level</a:t>
+            </a:r>
+            <a:endParaRPr b="0" lang="en-US" sz="1800" strike="noStrike" u="none">
+              <a:solidFill>
+                <a:srgbClr val="000000"/>
+              </a:solidFill>
+              <a:effectLst/>
+              <a:uFillTx/>
+              <a:latin typeface="Calibri"/>
+            </a:endParaRPr>
+          </a:p>
+          <a:p>
+            <a:pPr lvl="4" marL="2160000" indent="-216000">
+              <a:spcBef>
+                <a:spcPts val="283"/>
+              </a:spcBef>
+              <a:buClr>
+                <a:srgbClr val="000000"/>
+              </a:buClr>
+              <a:buSzPct val="45000"/>
+              <a:buFont typeface="Wingdings" charset="2"/>
+              <a:buChar char=""/>
+            </a:pPr>
+            <a:r>
+              <a:rPr b="0" lang="en-US" sz="2000" strike="noStrike" u="none">
+                <a:solidFill>
+                  <a:srgbClr val="000000"/>
+                </a:solidFill>
+                <a:effectLst/>
+                <a:uFillTx/>
+                <a:latin typeface="Calibri"/>
+              </a:rPr>
+              <a:t>Fifth Outline Level</a:t>
+            </a:r>
+            <a:endParaRPr b="0" lang="en-US" sz="2000" strike="noStrike" u="none">
+              <a:solidFill>
+                <a:srgbClr val="000000"/>
+              </a:solidFill>
+              <a:effectLst/>
+              <a:uFillTx/>
+              <a:latin typeface="Calibri"/>
+            </a:endParaRPr>
+          </a:p>
+          <a:p>
+            <a:pPr lvl="5" marL="2592000" indent="-216000">
+              <a:spcBef>
+                <a:spcPts val="283"/>
+              </a:spcBef>
+              <a:buClr>
+                <a:srgbClr val="000000"/>
+              </a:buClr>
+              <a:buSzPct val="45000"/>
+              <a:buFont typeface="Wingdings" charset="2"/>
+              <a:buChar char=""/>
+            </a:pPr>
+            <a:r>
+              <a:rPr b="0" lang="en-US" sz="2000" strike="noStrike" u="none">
+                <a:solidFill>
+                  <a:srgbClr val="000000"/>
+                </a:solidFill>
+                <a:effectLst/>
+                <a:uFillTx/>
+                <a:latin typeface="Calibri"/>
+              </a:rPr>
+              <a:t>Sixth Outline Level</a:t>
+            </a:r>
+            <a:endParaRPr b="0" lang="en-US" sz="2000" strike="noStrike" u="none">
+              <a:solidFill>
+                <a:srgbClr val="000000"/>
+              </a:solidFill>
+              <a:effectLst/>
+              <a:uFillTx/>
+              <a:latin typeface="Calibri"/>
+            </a:endParaRPr>
+          </a:p>
+          <a:p>
+            <a:pPr lvl="6" marL="3024000" indent="-216000">
+              <a:spcBef>
+                <a:spcPts val="283"/>
+              </a:spcBef>
+              <a:buClr>
+                <a:srgbClr val="000000"/>
+              </a:buClr>
+              <a:buSzPct val="45000"/>
+              <a:buFont typeface="Wingdings" charset="2"/>
+              <a:buChar char=""/>
+            </a:pPr>
+            <a:r>
+              <a:rPr b="0" lang="en-US" sz="2000" strike="noStrike" u="none">
+                <a:solidFill>
+                  <a:srgbClr val="000000"/>
+                </a:solidFill>
+                <a:effectLst/>
+                <a:uFillTx/>
+                <a:latin typeface="Calibri"/>
+              </a:rPr>
+              <a:t>Seventh Outline Level</a:t>
+            </a:r>
+            <a:endParaRPr b="0" lang="en-US" sz="2000" strike="noStrike" u="none">
+              <a:solidFill>
+                <a:srgbClr val="000000"/>
+              </a:solidFill>
+              <a:effectLst/>
+              <a:uFillTx/>
+              <a:latin typeface="Calibri"/>
+            </a:endParaRPr>
           </a:p>
         </p:txBody>
       </p:sp>
     </p:spTree>
   </p:cSld>
-  <p:clrMap folHlink="folHlink" hlink="hlink" accent1="accent1" accent2="accent2" accent3="accent3" accent4="accent4" accent5="accent5" accent6="accent6" tx2="dk2" bg2="lt2" tx1="dk1" bg1="lt1"/>
+</p:sldLayout>
+</file>
+
+<file path=ppt/slideMasters/slideMaster1.xml><?xml version="1.0" encoding="utf-8"?>
+<p:sldMaster xmlns:a="http://schemas.openxmlformats.org/drawingml/2006/main" xmlns:p="http://schemas.openxmlformats.org/presentationml/2006/main" xmlns:r="http://schemas.openxmlformats.org/officeDocument/2006/relationships" xmlns:p14="http://schemas.microsoft.com/office/powerpoint/2010/main" xmlns:p15="http://schemas.microsoft.com/office/powerpoint/2012/main" xmlns:mc="http://schemas.openxmlformats.org/markup-compatibility/2006">
+  <p:cSld>
+    <p:spTree>
+      <p:nvGrpSpPr>
+        <p:cNvPr id="1" name=""/>
+        <p:cNvGrpSpPr/>
+        <p:nvPr/>
+      </p:nvGrpSpPr>
+      <p:grpSpPr>
+        <a:xfrm>
+          <a:off x="0" y="0"/>
+          <a:ext cx="0" cy="0"/>
+          <a:chOff x="0" y="0"/>
+          <a:chExt cx="0" cy="0"/>
+        </a:xfrm>
+      </p:grpSpPr>
+    </p:spTree>
+  </p:cSld>
+  <p:clrMap bg1="lt1" tx1="dk1" bg2="lt2" tx2="dk2" accent1="accent1" accent2="accent2" accent3="accent3" accent4="accent4" accent5="accent5" accent6="accent6" hlink="hlink" folHlink="folHlink"/>
   <p:sldLayoutIdLst>
-    <p:sldLayoutId id="2147483661" r:id="rId1"/>
-    <p:sldLayoutId id="2147483662" r:id="rId2"/>
-    <p:sldLayoutId id="2147483663" r:id="rId3"/>
-    <p:sldLayoutId id="2147483664" r:id="rId4"/>
-    <p:sldLayoutId id="2147483665" r:id="rId5"/>
+    <p:sldLayoutId id="2147483649" r:id="rId2"/>
+    <p:sldLayoutId id="2147483650" r:id="rId3"/>
+    <p:sldLayoutId id="2147483651" r:id="rId4"/>
+    <p:sldLayoutId id="2147483652" r:id="rId5"/>
+    <p:sldLayoutId id="2147483653" r:id="rId6"/>
   </p:sldLayoutIdLst>
-  <p:txStyles>
-    <p:titleStyle>
-      <a:lvl1pPr>
-        <a:defRPr>
-          <a:latin typeface="+mj-lt"/>
-          <a:ea typeface="+mj-ea"/>
-          <a:cs typeface="+mj-cs"/>
-        </a:defRPr>
-      </a:lvl1pPr>
-    </p:titleStyle>
-    <p:bodyStyle>
-      <a:lvl1pPr marL="0">
-        <a:defRPr>
-          <a:latin typeface="+mn-lt"/>
-          <a:ea typeface="+mn-ea"/>
-          <a:cs typeface="+mn-cs"/>
-        </a:defRPr>
-      </a:lvl1pPr>
-      <a:lvl2pPr marL="457200">
-        <a:defRPr>
-          <a:latin typeface="+mn-lt"/>
-          <a:ea typeface="+mn-ea"/>
-          <a:cs typeface="+mn-cs"/>
-        </a:defRPr>
-      </a:lvl2pPr>
-      <a:lvl3pPr marL="914400">
-        <a:defRPr>
-          <a:latin typeface="+mn-lt"/>
-          <a:ea typeface="+mn-ea"/>
-          <a:cs typeface="+mn-cs"/>
-        </a:defRPr>
-      </a:lvl3pPr>
-      <a:lvl4pPr marL="1371600">
-        <a:defRPr>
-          <a:latin typeface="+mn-lt"/>
-          <a:ea typeface="+mn-ea"/>
-          <a:cs typeface="+mn-cs"/>
-        </a:defRPr>
-      </a:lvl4pPr>
-      <a:lvl5pPr marL="1828800">
-        <a:defRPr>
-          <a:latin typeface="+mn-lt"/>
-          <a:ea typeface="+mn-ea"/>
-          <a:cs typeface="+mn-cs"/>
-        </a:defRPr>
-      </a:lvl5pPr>
-      <a:lvl6pPr marL="2286000">
-        <a:defRPr>
-          <a:latin typeface="+mn-lt"/>
-          <a:ea typeface="+mn-ea"/>
-          <a:cs typeface="+mn-cs"/>
-        </a:defRPr>
-      </a:lvl6pPr>
-      <a:lvl7pPr marL="2743200">
-        <a:defRPr>
-          <a:latin typeface="+mn-lt"/>
-          <a:ea typeface="+mn-ea"/>
-          <a:cs typeface="+mn-cs"/>
-        </a:defRPr>
-      </a:lvl7pPr>
-      <a:lvl8pPr marL="3200400">
-        <a:defRPr>
-          <a:latin typeface="+mn-lt"/>
-          <a:ea typeface="+mn-ea"/>
-          <a:cs typeface="+mn-cs"/>
-        </a:defRPr>
-      </a:lvl8pPr>
-      <a:lvl9pPr marL="3657600">
-        <a:defRPr>
-          <a:latin typeface="+mn-lt"/>
-          <a:ea typeface="+mn-ea"/>
-          <a:cs typeface="+mn-cs"/>
-        </a:defRPr>
-      </a:lvl9pPr>
-    </p:bodyStyle>
-    <p:otherStyle>
-      <a:lvl1pPr marL="0">
-        <a:defRPr>
-          <a:latin typeface="+mn-lt"/>
-          <a:ea typeface="+mn-ea"/>
-          <a:cs typeface="+mn-cs"/>
-        </a:defRPr>
-      </a:lvl1pPr>
-      <a:lvl2pPr marL="457200">
-        <a:defRPr>
-          <a:latin typeface="+mn-lt"/>
-          <a:ea typeface="+mn-ea"/>
-          <a:cs typeface="+mn-cs"/>
-        </a:defRPr>
-      </a:lvl2pPr>
-      <a:lvl3pPr marL="914400">
-        <a:defRPr>
-          <a:latin typeface="+mn-lt"/>
-          <a:ea typeface="+mn-ea"/>
-          <a:cs typeface="+mn-cs"/>
-        </a:defRPr>
-      </a:lvl3pPr>
-      <a:lvl4pPr marL="1371600">
-        <a:defRPr>
-          <a:latin typeface="+mn-lt"/>
-          <a:ea typeface="+mn-ea"/>
-          <a:cs typeface="+mn-cs"/>
-        </a:defRPr>
-      </a:lvl4pPr>
-      <a:lvl5pPr marL="1828800">
-        <a:defRPr>
-          <a:latin typeface="+mn-lt"/>
-          <a:ea typeface="+mn-ea"/>
-          <a:cs typeface="+mn-cs"/>
-        </a:defRPr>
-      </a:lvl5pPr>
-      <a:lvl6pPr marL="2286000">
-        <a:defRPr>
-          <a:latin typeface="+mn-lt"/>
-          <a:ea typeface="+mn-ea"/>
-          <a:cs typeface="+mn-cs"/>
-        </a:defRPr>
-      </a:lvl6pPr>
-      <a:lvl7pPr marL="2743200">
-        <a:defRPr>
-          <a:latin typeface="+mn-lt"/>
-          <a:ea typeface="+mn-ea"/>
-          <a:cs typeface="+mn-cs"/>
-        </a:defRPr>
-      </a:lvl7pPr>
-      <a:lvl8pPr marL="3200400">
-        <a:defRPr>
-          <a:latin typeface="+mn-lt"/>
-          <a:ea typeface="+mn-ea"/>
-          <a:cs typeface="+mn-cs"/>
-        </a:defRPr>
-      </a:lvl8pPr>
-      <a:lvl9pPr marL="3657600">
-        <a:defRPr>
-          <a:latin typeface="+mn-lt"/>
-          <a:ea typeface="+mn-ea"/>
-          <a:cs typeface="+mn-cs"/>
-        </a:defRPr>
-      </a:lvl9pPr>
-    </p:otherStyle>
-  </p:txStyles>
 </p:sldMaster>
 </file>
 
 <file path=ppt/slides/slide1.xml><?xml version="1.0" encoding="utf-8"?>
-<p:sld xmlns:a="http://schemas.openxmlformats.org/drawingml/2006/main" xmlns:r="http://schemas.openxmlformats.org/officeDocument/2006/relationships" xmlns:p="http://schemas.openxmlformats.org/presentationml/2006/main" showMasterSp="0">
+<p:sld xmlns:a="http://schemas.openxmlformats.org/drawingml/2006/main" xmlns:p="http://schemas.openxmlformats.org/presentationml/2006/main" xmlns:r="http://schemas.openxmlformats.org/officeDocument/2006/relationships" xmlns:p14="http://schemas.microsoft.com/office/powerpoint/2010/main" xmlns:p15="http://schemas.microsoft.com/office/powerpoint/2012/main" xmlns:mc="http://schemas.openxmlformats.org/markup-compatibility/2006" showMasterSp="0">
   <p:cSld>
     <p:spTree>
       <p:nvGrpSpPr>
@@ -1250,278 +2816,307 @@
       </p:grpSpPr>
       <p:pic>
         <p:nvPicPr>
-          <p:cNvPr id="2" name="object 2" descr=""/>
+          <p:cNvPr id="28" name="object 2" descr=""/>
           <p:cNvPicPr/>
           <p:nvPr/>
         </p:nvPicPr>
         <p:blipFill>
-          <a:blip r:embed="rId2" cstate="print"/>
-          <a:stretch>
-            <a:fillRect/>
-          </a:stretch>
+          <a:blip r:embed="rId1"/>
+          <a:stretch/>
         </p:blipFill>
         <p:spPr>
           <a:xfrm>
             <a:off x="0" y="0"/>
-            <a:ext cx="13411200" cy="10363200"/>
-          </a:xfrm>
-          <a:prstGeom prst="rect">
-            <a:avLst/>
-          </a:prstGeom>
+            <a:ext cx="13410720" cy="10362960"/>
+          </a:xfrm>
+          <a:prstGeom prst="rect">
+            <a:avLst/>
+          </a:prstGeom>
+          <a:noFill/>
+          <a:ln w="0">
+            <a:noFill/>
+          </a:ln>
         </p:spPr>
       </p:pic>
       <p:pic>
         <p:nvPicPr>
-          <p:cNvPr id="3" name="object 3" descr=""/>
+          <p:cNvPr id="29" name="object 3" descr=""/>
           <p:cNvPicPr/>
           <p:nvPr/>
         </p:nvPicPr>
         <p:blipFill>
-          <a:blip r:embed="rId3" cstate="print"/>
-          <a:stretch>
-            <a:fillRect/>
-          </a:stretch>
+          <a:blip r:embed="rId2"/>
+          <a:stretch/>
         </p:blipFill>
         <p:spPr>
           <a:xfrm>
-            <a:off x="2485085" y="3806453"/>
-            <a:ext cx="2003945" cy="943740"/>
-          </a:xfrm>
-          <a:prstGeom prst="rect">
-            <a:avLst/>
-          </a:prstGeom>
+            <a:off x="2485080" y="3806280"/>
+            <a:ext cx="2003760" cy="943560"/>
+          </a:xfrm>
+          <a:prstGeom prst="rect">
+            <a:avLst/>
+          </a:prstGeom>
+          <a:noFill/>
+          <a:ln w="0">
+            <a:noFill/>
+          </a:ln>
         </p:spPr>
       </p:pic>
       <p:pic>
         <p:nvPicPr>
-          <p:cNvPr id="4" name="object 4" descr=""/>
+          <p:cNvPr id="30" name="object 4" descr=""/>
           <p:cNvPicPr/>
           <p:nvPr/>
         </p:nvPicPr>
         <p:blipFill>
-          <a:blip r:embed="rId4" cstate="print"/>
-          <a:stretch>
-            <a:fillRect/>
-          </a:stretch>
+          <a:blip r:embed="rId3"/>
+          <a:stretch/>
         </p:blipFill>
         <p:spPr>
           <a:xfrm>
-            <a:off x="5191267" y="3922460"/>
-            <a:ext cx="2899572" cy="804022"/>
-          </a:xfrm>
-          <a:prstGeom prst="rect">
-            <a:avLst/>
-          </a:prstGeom>
+            <a:off x="5191200" y="3922560"/>
+            <a:ext cx="2899080" cy="803520"/>
+          </a:xfrm>
+          <a:prstGeom prst="rect">
+            <a:avLst/>
+          </a:prstGeom>
+          <a:noFill/>
+          <a:ln w="0">
+            <a:noFill/>
+          </a:ln>
         </p:spPr>
       </p:pic>
       <p:pic>
         <p:nvPicPr>
-          <p:cNvPr id="5" name="object 5" descr=""/>
+          <p:cNvPr id="31" name="object 5" descr=""/>
           <p:cNvPicPr/>
           <p:nvPr/>
         </p:nvPicPr>
         <p:blipFill>
-          <a:blip r:embed="rId5" cstate="print"/>
-          <a:stretch>
-            <a:fillRect/>
-          </a:stretch>
+          <a:blip r:embed="rId4"/>
+          <a:stretch/>
         </p:blipFill>
         <p:spPr>
           <a:xfrm>
-            <a:off x="8788552" y="3953979"/>
-            <a:ext cx="1506639" cy="718382"/>
-          </a:xfrm>
-          <a:prstGeom prst="rect">
-            <a:avLst/>
-          </a:prstGeom>
+            <a:off x="8788680" y="3953880"/>
+            <a:ext cx="1506240" cy="718200"/>
+          </a:xfrm>
+          <a:prstGeom prst="rect">
+            <a:avLst/>
+          </a:prstGeom>
+          <a:noFill/>
+          <a:ln w="0">
+            <a:noFill/>
+          </a:ln>
         </p:spPr>
       </p:pic>
       <p:pic>
         <p:nvPicPr>
-          <p:cNvPr id="6" name="object 6" descr=""/>
+          <p:cNvPr id="32" name="object 6" descr=""/>
           <p:cNvPicPr/>
           <p:nvPr/>
         </p:nvPicPr>
         <p:blipFill>
-          <a:blip r:embed="rId6" cstate="print"/>
-          <a:stretch>
-            <a:fillRect/>
-          </a:stretch>
+          <a:blip r:embed="rId5"/>
+          <a:stretch/>
         </p:blipFill>
         <p:spPr>
           <a:xfrm>
-            <a:off x="4232021" y="4992535"/>
-            <a:ext cx="2347722" cy="1103421"/>
-          </a:xfrm>
-          <a:prstGeom prst="rect">
-            <a:avLst/>
-          </a:prstGeom>
+            <a:off x="4232160" y="4992480"/>
+            <a:ext cx="2347200" cy="1103040"/>
+          </a:xfrm>
+          <a:prstGeom prst="rect">
+            <a:avLst/>
+          </a:prstGeom>
+          <a:noFill/>
+          <a:ln w="0">
+            <a:noFill/>
+          </a:ln>
         </p:spPr>
       </p:pic>
       <p:pic>
         <p:nvPicPr>
-          <p:cNvPr id="7" name="object 7" descr=""/>
+          <p:cNvPr id="33" name="object 7" descr=""/>
           <p:cNvPicPr/>
           <p:nvPr/>
         </p:nvPicPr>
         <p:blipFill>
-          <a:blip r:embed="rId7" cstate="print"/>
-          <a:stretch>
-            <a:fillRect/>
-          </a:stretch>
+          <a:blip r:embed="rId6"/>
+          <a:stretch/>
         </p:blipFill>
         <p:spPr>
           <a:xfrm>
-            <a:off x="7004617" y="5075093"/>
-            <a:ext cx="697122" cy="824754"/>
-          </a:xfrm>
-          <a:prstGeom prst="rect">
-            <a:avLst/>
-          </a:prstGeom>
+            <a:off x="7004520" y="5074920"/>
+            <a:ext cx="696600" cy="824400"/>
+          </a:xfrm>
+          <a:prstGeom prst="rect">
+            <a:avLst/>
+          </a:prstGeom>
+          <a:noFill/>
+          <a:ln w="0">
+            <a:noFill/>
+          </a:ln>
         </p:spPr>
       </p:pic>
       <p:pic>
         <p:nvPicPr>
-          <p:cNvPr id="8" name="object 8" descr=""/>
+          <p:cNvPr id="34" name="object 8" descr=""/>
           <p:cNvPicPr/>
           <p:nvPr/>
         </p:nvPicPr>
         <p:blipFill>
-          <a:blip r:embed="rId8" cstate="print"/>
-          <a:stretch>
-            <a:fillRect/>
-          </a:stretch>
+          <a:blip r:embed="rId7"/>
+          <a:stretch/>
         </p:blipFill>
         <p:spPr>
           <a:xfrm>
-            <a:off x="7805140" y="5481243"/>
-            <a:ext cx="686390" cy="490334"/>
-          </a:xfrm>
-          <a:prstGeom prst="rect">
-            <a:avLst/>
-          </a:prstGeom>
+            <a:off x="7805160" y="5481360"/>
+            <a:ext cx="686160" cy="489960"/>
+          </a:xfrm>
+          <a:prstGeom prst="rect">
+            <a:avLst/>
+          </a:prstGeom>
+          <a:noFill/>
+          <a:ln w="0">
+            <a:noFill/>
+          </a:ln>
         </p:spPr>
       </p:pic>
       <p:pic>
         <p:nvPicPr>
-          <p:cNvPr id="9" name="object 9" descr=""/>
+          <p:cNvPr id="35" name="object 9" descr=""/>
           <p:cNvPicPr/>
           <p:nvPr/>
         </p:nvPicPr>
         <p:blipFill>
-          <a:blip r:embed="rId9" cstate="print"/>
-          <a:stretch>
-            <a:fillRect/>
-          </a:stretch>
+          <a:blip r:embed="rId8"/>
+          <a:stretch/>
         </p:blipFill>
         <p:spPr>
           <a:xfrm>
-            <a:off x="9049429" y="5313103"/>
-            <a:ext cx="168717" cy="544622"/>
-          </a:xfrm>
-          <a:prstGeom prst="rect">
-            <a:avLst/>
-          </a:prstGeom>
+            <a:off x="9049320" y="5313240"/>
+            <a:ext cx="168480" cy="544320"/>
+          </a:xfrm>
+          <a:prstGeom prst="rect">
+            <a:avLst/>
+          </a:prstGeom>
+          <a:noFill/>
+          <a:ln w="0">
+            <a:noFill/>
+          </a:ln>
         </p:spPr>
       </p:pic>
       <p:pic>
         <p:nvPicPr>
-          <p:cNvPr id="10" name="object 10" descr=""/>
+          <p:cNvPr id="36" name="object 10" descr=""/>
           <p:cNvPicPr/>
           <p:nvPr/>
         </p:nvPicPr>
         <p:blipFill>
-          <a:blip r:embed="rId10" cstate="print"/>
-          <a:stretch>
-            <a:fillRect/>
-          </a:stretch>
+          <a:blip r:embed="rId9"/>
+          <a:stretch/>
         </p:blipFill>
         <p:spPr>
           <a:xfrm>
-            <a:off x="9300565" y="5496502"/>
-            <a:ext cx="335502" cy="393306"/>
-          </a:xfrm>
-          <a:prstGeom prst="rect">
-            <a:avLst/>
-          </a:prstGeom>
+            <a:off x="9300600" y="5496480"/>
+            <a:ext cx="335160" cy="393120"/>
+          </a:xfrm>
+          <a:prstGeom prst="rect">
+            <a:avLst/>
+          </a:prstGeom>
+          <a:noFill/>
+          <a:ln w="0">
+            <a:noFill/>
+          </a:ln>
         </p:spPr>
       </p:pic>
       <p:pic>
         <p:nvPicPr>
-          <p:cNvPr id="11" name="object 11" descr=""/>
+          <p:cNvPr id="37" name="object 11" descr=""/>
           <p:cNvPicPr/>
           <p:nvPr/>
         </p:nvPicPr>
         <p:blipFill>
-          <a:blip r:embed="rId11" cstate="print"/>
-          <a:stretch>
-            <a:fillRect/>
-          </a:stretch>
+          <a:blip r:embed="rId10"/>
+          <a:stretch/>
         </p:blipFill>
         <p:spPr>
           <a:xfrm>
-            <a:off x="6506819" y="6218491"/>
-            <a:ext cx="2751420" cy="546938"/>
-          </a:xfrm>
-          <a:prstGeom prst="rect">
-            <a:avLst/>
-          </a:prstGeom>
+            <a:off x="6506640" y="6218640"/>
+            <a:ext cx="2751120" cy="546480"/>
+          </a:xfrm>
+          <a:prstGeom prst="rect">
+            <a:avLst/>
+          </a:prstGeom>
+          <a:noFill/>
+          <a:ln w="0">
+            <a:noFill/>
+          </a:ln>
         </p:spPr>
       </p:pic>
       <p:pic>
         <p:nvPicPr>
-          <p:cNvPr id="12" name="object 12" descr=""/>
+          <p:cNvPr id="38" name="object 12" descr=""/>
           <p:cNvPicPr/>
           <p:nvPr/>
         </p:nvPicPr>
         <p:blipFill>
-          <a:blip r:embed="rId12" cstate="print"/>
-          <a:stretch>
-            <a:fillRect/>
-          </a:stretch>
+          <a:blip r:embed="rId11"/>
+          <a:stretch/>
         </p:blipFill>
         <p:spPr>
           <a:xfrm>
-            <a:off x="9471367" y="6024854"/>
-            <a:ext cx="246062" cy="614271"/>
-          </a:xfrm>
-          <a:prstGeom prst="rect">
-            <a:avLst/>
-          </a:prstGeom>
+            <a:off x="9471240" y="6024960"/>
+            <a:ext cx="245880" cy="613800"/>
+          </a:xfrm>
+          <a:prstGeom prst="rect">
+            <a:avLst/>
+          </a:prstGeom>
+          <a:noFill/>
+          <a:ln w="0">
+            <a:noFill/>
+          </a:ln>
         </p:spPr>
       </p:pic>
       <p:pic>
         <p:nvPicPr>
-          <p:cNvPr id="13" name="object 13" descr=""/>
+          <p:cNvPr id="39" name="object 13" descr=""/>
           <p:cNvPicPr/>
           <p:nvPr/>
         </p:nvPicPr>
         <p:blipFill>
-          <a:blip r:embed="rId13" cstate="print"/>
-          <a:stretch>
-            <a:fillRect/>
-          </a:stretch>
+          <a:blip r:embed="rId12"/>
+          <a:stretch/>
         </p:blipFill>
         <p:spPr>
           <a:xfrm>
-            <a:off x="9582899" y="6800694"/>
-            <a:ext cx="76204" cy="66024"/>
-          </a:xfrm>
-          <a:prstGeom prst="rect">
-            <a:avLst/>
-          </a:prstGeom>
+            <a:off x="9582840" y="6800760"/>
+            <a:ext cx="75960" cy="65520"/>
+          </a:xfrm>
+          <a:prstGeom prst="rect">
+            <a:avLst/>
+          </a:prstGeom>
+          <a:noFill/>
+          <a:ln w="0">
+            <a:noFill/>
+          </a:ln>
         </p:spPr>
       </p:pic>
     </p:spTree>
   </p:cSld>
-  <p:clrMapOvr>
-    <a:masterClrMapping/>
-  </p:clrMapOvr>
+  <mc:AlternateContent>
+    <mc:Choice Requires="p14">
+      <p:transition spd="slow" p14:dur="2000"/>
+    </mc:Choice>
+    <mc:Fallback>
+      <p:transition spd="slow"/>
+    </mc:Fallback>
+  </mc:AlternateContent>
 </p:sld>
 </file>
 
 <file path=ppt/slides/slide10.xml><?xml version="1.0" encoding="utf-8"?>
-<p:sld xmlns:a="http://schemas.openxmlformats.org/drawingml/2006/main" xmlns:r="http://schemas.openxmlformats.org/officeDocument/2006/relationships" xmlns:p="http://schemas.openxmlformats.org/presentationml/2006/main" showMasterSp="0">
+<p:sld xmlns:a="http://schemas.openxmlformats.org/drawingml/2006/main" xmlns:p="http://schemas.openxmlformats.org/presentationml/2006/main" xmlns:r="http://schemas.openxmlformats.org/officeDocument/2006/relationships" xmlns:p14="http://schemas.microsoft.com/office/powerpoint/2010/main" xmlns:p15="http://schemas.microsoft.com/office/powerpoint/2012/main" xmlns:mc="http://schemas.openxmlformats.org/markup-compatibility/2006" showMasterSp="0">
   <p:cSld>
     <p:spTree>
       <p:nvGrpSpPr>
@@ -1539,58 +3134,67 @@
       </p:grpSpPr>
       <p:pic>
         <p:nvPicPr>
-          <p:cNvPr id="2" name="object 2" descr=""/>
+          <p:cNvPr id="78" name="object 2" descr=""/>
           <p:cNvPicPr/>
           <p:nvPr/>
         </p:nvPicPr>
         <p:blipFill>
-          <a:blip r:embed="rId2" cstate="print"/>
-          <a:stretch>
-            <a:fillRect/>
-          </a:stretch>
+          <a:blip r:embed="rId1"/>
+          <a:stretch/>
         </p:blipFill>
         <p:spPr>
           <a:xfrm>
             <a:off x="0" y="0"/>
-            <a:ext cx="13411200" cy="10363200"/>
-          </a:xfrm>
-          <a:prstGeom prst="rect">
-            <a:avLst/>
-          </a:prstGeom>
+            <a:ext cx="13410720" cy="10362960"/>
+          </a:xfrm>
+          <a:prstGeom prst="rect">
+            <a:avLst/>
+          </a:prstGeom>
+          <a:noFill/>
+          <a:ln w="0">
+            <a:noFill/>
+          </a:ln>
         </p:spPr>
       </p:pic>
       <p:pic>
         <p:nvPicPr>
-          <p:cNvPr id="3" name="object 3" descr=""/>
+          <p:cNvPr id="79" name="object 3" descr=""/>
           <p:cNvPicPr/>
           <p:nvPr/>
         </p:nvPicPr>
         <p:blipFill>
-          <a:blip r:embed="rId3" cstate="print"/>
-          <a:stretch>
-            <a:fillRect/>
-          </a:stretch>
+          <a:blip r:embed="rId2"/>
+          <a:stretch/>
         </p:blipFill>
         <p:spPr>
           <a:xfrm>
-            <a:off x="952652" y="758202"/>
-            <a:ext cx="6990054" cy="3931919"/>
-          </a:xfrm>
-          <a:prstGeom prst="rect">
-            <a:avLst/>
-          </a:prstGeom>
+            <a:off x="952560" y="758160"/>
+            <a:ext cx="6989760" cy="3931560"/>
+          </a:xfrm>
+          <a:prstGeom prst="rect">
+            <a:avLst/>
+          </a:prstGeom>
+          <a:noFill/>
+          <a:ln w="0">
+            <a:noFill/>
+          </a:ln>
         </p:spPr>
       </p:pic>
     </p:spTree>
   </p:cSld>
-  <p:clrMapOvr>
-    <a:masterClrMapping/>
-  </p:clrMapOvr>
+  <mc:AlternateContent>
+    <mc:Choice Requires="p14">
+      <p:transition spd="slow" p14:dur="2000"/>
+    </mc:Choice>
+    <mc:Fallback>
+      <p:transition spd="slow"/>
+    </mc:Fallback>
+  </mc:AlternateContent>
 </p:sld>
 </file>
 
 <file path=ppt/slides/slide11.xml><?xml version="1.0" encoding="utf-8"?>
-<p:sld xmlns:a="http://schemas.openxmlformats.org/drawingml/2006/main" xmlns:r="http://schemas.openxmlformats.org/officeDocument/2006/relationships" xmlns:p="http://schemas.openxmlformats.org/presentationml/2006/main" showMasterSp="0">
+<p:sld xmlns:a="http://schemas.openxmlformats.org/drawingml/2006/main" xmlns:p="http://schemas.openxmlformats.org/presentationml/2006/main" xmlns:r="http://schemas.openxmlformats.org/officeDocument/2006/relationships" xmlns:p14="http://schemas.microsoft.com/office/powerpoint/2010/main" xmlns:p15="http://schemas.microsoft.com/office/powerpoint/2012/main" xmlns:mc="http://schemas.openxmlformats.org/markup-compatibility/2006" showMasterSp="0">
   <p:cSld>
     <p:spTree>
       <p:nvGrpSpPr>
@@ -1608,58 +3212,67 @@
       </p:grpSpPr>
       <p:pic>
         <p:nvPicPr>
-          <p:cNvPr id="2" name="object 2" descr=""/>
+          <p:cNvPr id="80" name="object 2" descr=""/>
           <p:cNvPicPr/>
           <p:nvPr/>
         </p:nvPicPr>
         <p:blipFill>
-          <a:blip r:embed="rId2" cstate="print"/>
-          <a:stretch>
-            <a:fillRect/>
-          </a:stretch>
+          <a:blip r:embed="rId1"/>
+          <a:stretch/>
         </p:blipFill>
         <p:spPr>
           <a:xfrm>
             <a:off x="0" y="0"/>
-            <a:ext cx="13411200" cy="10363200"/>
-          </a:xfrm>
-          <a:prstGeom prst="rect">
-            <a:avLst/>
-          </a:prstGeom>
+            <a:ext cx="13410720" cy="10362960"/>
+          </a:xfrm>
+          <a:prstGeom prst="rect">
+            <a:avLst/>
+          </a:prstGeom>
+          <a:noFill/>
+          <a:ln w="0">
+            <a:noFill/>
+          </a:ln>
         </p:spPr>
       </p:pic>
       <p:pic>
         <p:nvPicPr>
-          <p:cNvPr id="3" name="object 3" descr=""/>
+          <p:cNvPr id="81" name="object 3" descr=""/>
           <p:cNvPicPr/>
           <p:nvPr/>
         </p:nvPicPr>
         <p:blipFill>
-          <a:blip r:embed="rId3" cstate="print"/>
-          <a:stretch>
-            <a:fillRect/>
-          </a:stretch>
+          <a:blip r:embed="rId2"/>
+          <a:stretch/>
         </p:blipFill>
         <p:spPr>
           <a:xfrm>
-            <a:off x="4313351" y="2785770"/>
-            <a:ext cx="5130787" cy="4104627"/>
-          </a:xfrm>
-          <a:prstGeom prst="rect">
-            <a:avLst/>
-          </a:prstGeom>
+            <a:off x="4313520" y="2785680"/>
+            <a:ext cx="5130360" cy="4104360"/>
+          </a:xfrm>
+          <a:prstGeom prst="rect">
+            <a:avLst/>
+          </a:prstGeom>
+          <a:noFill/>
+          <a:ln w="0">
+            <a:noFill/>
+          </a:ln>
         </p:spPr>
       </p:pic>
     </p:spTree>
   </p:cSld>
-  <p:clrMapOvr>
-    <a:masterClrMapping/>
-  </p:clrMapOvr>
+  <mc:AlternateContent>
+    <mc:Choice Requires="p14">
+      <p:transition spd="slow" p14:dur="2000"/>
+    </mc:Choice>
+    <mc:Fallback>
+      <p:transition spd="slow"/>
+    </mc:Fallback>
+  </mc:AlternateContent>
 </p:sld>
 </file>
 
 <file path=ppt/slides/slide12.xml><?xml version="1.0" encoding="utf-8"?>
-<p:sld xmlns:a="http://schemas.openxmlformats.org/drawingml/2006/main" xmlns:r="http://schemas.openxmlformats.org/officeDocument/2006/relationships" xmlns:p="http://schemas.openxmlformats.org/presentationml/2006/main" showMasterSp="0">
+<p:sld xmlns:a="http://schemas.openxmlformats.org/drawingml/2006/main" xmlns:p="http://schemas.openxmlformats.org/presentationml/2006/main" xmlns:r="http://schemas.openxmlformats.org/officeDocument/2006/relationships" xmlns:p14="http://schemas.microsoft.com/office/powerpoint/2010/main" xmlns:p15="http://schemas.microsoft.com/office/powerpoint/2012/main" xmlns:mc="http://schemas.openxmlformats.org/markup-compatibility/2006" showMasterSp="0">
   <p:cSld>
     <p:spTree>
       <p:nvGrpSpPr>
@@ -1677,143 +3290,193 @@
       </p:grpSpPr>
       <p:pic>
         <p:nvPicPr>
-          <p:cNvPr id="2" name="object 2" descr=""/>
+          <p:cNvPr id="82" name="object 2" descr=""/>
           <p:cNvPicPr/>
           <p:nvPr/>
         </p:nvPicPr>
         <p:blipFill>
-          <a:blip r:embed="rId2" cstate="print"/>
-          <a:stretch>
-            <a:fillRect/>
-          </a:stretch>
+          <a:blip r:embed="rId1"/>
+          <a:stretch/>
         </p:blipFill>
         <p:spPr>
           <a:xfrm>
             <a:off x="0" y="0"/>
-            <a:ext cx="13411200" cy="10363200"/>
-          </a:xfrm>
-          <a:prstGeom prst="rect">
-            <a:avLst/>
-          </a:prstGeom>
+            <a:ext cx="13410720" cy="10362960"/>
+          </a:xfrm>
+          <a:prstGeom prst="rect">
+            <a:avLst/>
+          </a:prstGeom>
+          <a:noFill/>
+          <a:ln w="0">
+            <a:noFill/>
+          </a:ln>
         </p:spPr>
       </p:pic>
       <p:pic>
         <p:nvPicPr>
-          <p:cNvPr id="3" name="object 3" descr=""/>
+          <p:cNvPr id="83" name="object 3" descr=""/>
           <p:cNvPicPr/>
           <p:nvPr/>
         </p:nvPicPr>
         <p:blipFill>
-          <a:blip r:embed="rId3" cstate="print"/>
-          <a:stretch>
-            <a:fillRect/>
-          </a:stretch>
+          <a:blip r:embed="rId2"/>
+          <a:stretch/>
         </p:blipFill>
         <p:spPr>
           <a:xfrm>
-            <a:off x="810221" y="705815"/>
-            <a:ext cx="4658258" cy="6311773"/>
-          </a:xfrm>
-          <a:prstGeom prst="rect">
-            <a:avLst/>
-          </a:prstGeom>
+            <a:off x="810360" y="705960"/>
+            <a:ext cx="4658040" cy="6311520"/>
+          </a:xfrm>
+          <a:prstGeom prst="rect">
+            <a:avLst/>
+          </a:prstGeom>
+          <a:noFill/>
+          <a:ln w="0">
+            <a:noFill/>
+          </a:ln>
         </p:spPr>
       </p:pic>
       <p:sp>
         <p:nvSpPr>
-          <p:cNvPr id="4" name="object 4" descr=""/>
-          <p:cNvSpPr txBox="1"/>
+          <p:cNvPr id="84" name="object 4"/>
+          <p:cNvSpPr/>
           <p:nvPr/>
         </p:nvSpPr>
         <p:spPr>
           <a:xfrm>
-            <a:off x="871686" y="7016601"/>
-            <a:ext cx="5035550" cy="513080"/>
-          </a:xfrm>
-          <a:prstGeom prst="rect">
-            <a:avLst/>
-          </a:prstGeom>
-        </p:spPr>
+            <a:off x="871560" y="7016760"/>
+            <a:ext cx="5035320" cy="512640"/>
+          </a:xfrm>
+          <a:prstGeom prst="rect">
+            <a:avLst/>
+          </a:prstGeom>
+          <a:noFill/>
+          <a:ln w="0">
+            <a:noFill/>
+          </a:ln>
+        </p:spPr>
+        <p:style>
+          <a:lnRef idx="0"/>
+          <a:fillRef idx="0"/>
+          <a:effectRef idx="0"/>
+          <a:fontRef idx="minor"/>
+        </p:style>
         <p:txBody>
-          <a:bodyPr wrap="square" lIns="0" tIns="12700" rIns="0" bIns="0" rtlCol="0" vert="horz">
+          <a:bodyPr lIns="0" rIns="0" tIns="12600" bIns="0" anchor="t">
             <a:spAutoFit/>
           </a:bodyPr>
-          <a:lstStyle/>
           <a:p>
-            <a:pPr marL="12700">
+            <a:pPr marL="12600">
               <a:lnSpc>
                 <a:spcPct val="100000"/>
               </a:lnSpc>
               <a:spcBef>
-                <a:spcPts val="100"/>
+                <a:spcPts val="99"/>
               </a:spcBef>
             </a:pPr>
             <a:r>
-              <a:rPr dirty="0" sz="3200" spc="245">
+              <a:rPr b="0" lang="en-US" sz="3200" spc="244" strike="noStrike" u="none">
+                <a:solidFill>
+                  <a:srgbClr val="000000"/>
+                </a:solidFill>
+                <a:effectLst/>
+                <a:uFillTx/>
                 <a:latin typeface="Cambria"/>
-                <a:cs typeface="Cambria"/>
               </a:rPr>
               <a:t>(Baumeister</a:t>
             </a:r>
             <a:r>
-              <a:rPr dirty="0" sz="3200" spc="285">
+              <a:rPr b="0" lang="en-US" sz="3200" spc="286" strike="noStrike" u="none">
+                <a:solidFill>
+                  <a:srgbClr val="000000"/>
+                </a:solidFill>
+                <a:effectLst/>
+                <a:uFillTx/>
                 <a:latin typeface="Cambria"/>
-                <a:cs typeface="Cambria"/>
               </a:rPr>
               <a:t> </a:t>
             </a:r>
             <a:r>
-              <a:rPr dirty="0" sz="3200" spc="250">
+              <a:rPr b="0" lang="en-US" sz="3200" spc="249" strike="noStrike" u="none">
+                <a:solidFill>
+                  <a:srgbClr val="000000"/>
+                </a:solidFill>
+                <a:effectLst/>
+                <a:uFillTx/>
                 <a:latin typeface="Cambria"/>
-                <a:cs typeface="Cambria"/>
               </a:rPr>
               <a:t>et</a:t>
             </a:r>
             <a:r>
-              <a:rPr dirty="0" sz="3200" spc="335">
+              <a:rPr b="0" lang="en-US" sz="3200" spc="334" strike="noStrike" u="none">
+                <a:solidFill>
+                  <a:srgbClr val="000000"/>
+                </a:solidFill>
+                <a:effectLst/>
+                <a:uFillTx/>
                 <a:latin typeface="Cambria"/>
-                <a:cs typeface="Cambria"/>
               </a:rPr>
               <a:t> </a:t>
             </a:r>
             <a:r>
-              <a:rPr dirty="0" sz="3200" spc="295">
+              <a:rPr b="0" lang="en-US" sz="3200" spc="295" strike="noStrike" u="none">
+                <a:solidFill>
+                  <a:srgbClr val="000000"/>
+                </a:solidFill>
+                <a:effectLst/>
+                <a:uFillTx/>
                 <a:latin typeface="Cambria"/>
-                <a:cs typeface="Cambria"/>
               </a:rPr>
               <a:t>at.</a:t>
             </a:r>
             <a:r>
-              <a:rPr dirty="0" sz="3200" spc="300">
+              <a:rPr b="0" lang="en-US" sz="3200" spc="300" strike="noStrike" u="none">
+                <a:solidFill>
+                  <a:srgbClr val="000000"/>
+                </a:solidFill>
+                <a:effectLst/>
+                <a:uFillTx/>
                 <a:latin typeface="Cambria"/>
-                <a:cs typeface="Cambria"/>
               </a:rPr>
               <a:t> </a:t>
             </a:r>
             <a:r>
-              <a:rPr dirty="0" sz="3200" spc="155">
+              <a:rPr b="0" lang="en-US" sz="3200" spc="156" strike="noStrike" u="none">
+                <a:solidFill>
+                  <a:srgbClr val="000000"/>
+                </a:solidFill>
+                <a:effectLst/>
+                <a:uFillTx/>
                 <a:latin typeface="Cambria"/>
-                <a:cs typeface="Cambria"/>
               </a:rPr>
               <a:t>1998)</a:t>
             </a:r>
-            <a:endParaRPr sz="3200">
-              <a:latin typeface="Cambria"/>
-              <a:cs typeface="Cambria"/>
+            <a:endParaRPr b="0" lang="en-US" sz="3200" strike="noStrike" u="none">
+              <a:solidFill>
+                <a:srgbClr val="000000"/>
+              </a:solidFill>
+              <a:effectLst/>
+              <a:uFillTx/>
+              <a:latin typeface="Arial"/>
             </a:endParaRPr>
           </a:p>
         </p:txBody>
       </p:sp>
     </p:spTree>
   </p:cSld>
-  <p:clrMapOvr>
-    <a:masterClrMapping/>
-  </p:clrMapOvr>
+  <mc:AlternateContent>
+    <mc:Choice Requires="p14">
+      <p:transition spd="slow" p14:dur="2000"/>
+    </mc:Choice>
+    <mc:Fallback>
+      <p:transition spd="slow"/>
+    </mc:Fallback>
+  </mc:AlternateContent>
 </p:sld>
 </file>
 
 <file path=ppt/slides/slide13.xml><?xml version="1.0" encoding="utf-8"?>
-<p:sld xmlns:a="http://schemas.openxmlformats.org/drawingml/2006/main" xmlns:r="http://schemas.openxmlformats.org/officeDocument/2006/relationships" xmlns:p="http://schemas.openxmlformats.org/presentationml/2006/main" showMasterSp="0">
+<p:sld xmlns:a="http://schemas.openxmlformats.org/drawingml/2006/main" xmlns:p="http://schemas.openxmlformats.org/presentationml/2006/main" xmlns:r="http://schemas.openxmlformats.org/officeDocument/2006/relationships" xmlns:p14="http://schemas.microsoft.com/office/powerpoint/2010/main" xmlns:p15="http://schemas.microsoft.com/office/powerpoint/2012/main" xmlns:mc="http://schemas.openxmlformats.org/markup-compatibility/2006" showMasterSp="0">
   <p:cSld>
     <p:spTree>
       <p:nvGrpSpPr>
@@ -1831,58 +3494,67 @@
       </p:grpSpPr>
       <p:pic>
         <p:nvPicPr>
-          <p:cNvPr id="2" name="object 2" descr=""/>
+          <p:cNvPr id="85" name="object 2" descr=""/>
           <p:cNvPicPr/>
           <p:nvPr/>
         </p:nvPicPr>
         <p:blipFill>
-          <a:blip r:embed="rId2" cstate="print"/>
-          <a:stretch>
-            <a:fillRect/>
-          </a:stretch>
+          <a:blip r:embed="rId1"/>
+          <a:stretch/>
         </p:blipFill>
         <p:spPr>
           <a:xfrm>
             <a:off x="0" y="0"/>
-            <a:ext cx="13411200" cy="10363200"/>
-          </a:xfrm>
-          <a:prstGeom prst="rect">
-            <a:avLst/>
-          </a:prstGeom>
+            <a:ext cx="13410720" cy="10362960"/>
+          </a:xfrm>
+          <a:prstGeom prst="rect">
+            <a:avLst/>
+          </a:prstGeom>
+          <a:noFill/>
+          <a:ln w="0">
+            <a:noFill/>
+          </a:ln>
         </p:spPr>
       </p:pic>
       <p:pic>
         <p:nvPicPr>
-          <p:cNvPr id="3" name="object 3" descr=""/>
+          <p:cNvPr id="86" name="object 3" descr=""/>
           <p:cNvPicPr/>
           <p:nvPr/>
         </p:nvPicPr>
         <p:blipFill>
-          <a:blip r:embed="rId3" cstate="print"/>
-          <a:stretch>
-            <a:fillRect/>
-          </a:stretch>
+          <a:blip r:embed="rId2"/>
+          <a:stretch/>
         </p:blipFill>
         <p:spPr>
           <a:xfrm>
-            <a:off x="3492156" y="3334905"/>
-            <a:ext cx="6319520" cy="3554729"/>
-          </a:xfrm>
-          <a:prstGeom prst="rect">
-            <a:avLst/>
-          </a:prstGeom>
+            <a:off x="3492000" y="3335040"/>
+            <a:ext cx="6319080" cy="3554280"/>
+          </a:xfrm>
+          <a:prstGeom prst="rect">
+            <a:avLst/>
+          </a:prstGeom>
+          <a:noFill/>
+          <a:ln w="0">
+            <a:noFill/>
+          </a:ln>
         </p:spPr>
       </p:pic>
     </p:spTree>
   </p:cSld>
-  <p:clrMapOvr>
-    <a:masterClrMapping/>
-  </p:clrMapOvr>
+  <mc:AlternateContent>
+    <mc:Choice Requires="p14">
+      <p:transition spd="slow" p14:dur="2000"/>
+    </mc:Choice>
+    <mc:Fallback>
+      <p:transition spd="slow"/>
+    </mc:Fallback>
+  </mc:AlternateContent>
 </p:sld>
 </file>
 
 <file path=ppt/slides/slide14.xml><?xml version="1.0" encoding="utf-8"?>
-<p:sld xmlns:a="http://schemas.openxmlformats.org/drawingml/2006/main" xmlns:r="http://schemas.openxmlformats.org/officeDocument/2006/relationships" xmlns:p="http://schemas.openxmlformats.org/presentationml/2006/main" showMasterSp="0">
+<p:sld xmlns:a="http://schemas.openxmlformats.org/drawingml/2006/main" xmlns:p="http://schemas.openxmlformats.org/presentationml/2006/main" xmlns:r="http://schemas.openxmlformats.org/officeDocument/2006/relationships" xmlns:p14="http://schemas.microsoft.com/office/powerpoint/2010/main" xmlns:p15="http://schemas.microsoft.com/office/powerpoint/2012/main" xmlns:mc="http://schemas.openxmlformats.org/markup-compatibility/2006" showMasterSp="0">
   <p:cSld>
     <p:spTree>
       <p:nvGrpSpPr>
@@ -1900,151 +3572,195 @@
       </p:grpSpPr>
       <p:pic>
         <p:nvPicPr>
-          <p:cNvPr id="2" name="object 2" descr=""/>
+          <p:cNvPr id="87" name="object 2" descr=""/>
           <p:cNvPicPr/>
           <p:nvPr/>
         </p:nvPicPr>
         <p:blipFill>
-          <a:blip r:embed="rId2" cstate="print"/>
-          <a:stretch>
-            <a:fillRect/>
-          </a:stretch>
+          <a:blip r:embed="rId1"/>
+          <a:stretch/>
         </p:blipFill>
         <p:spPr>
           <a:xfrm>
             <a:off x="0" y="0"/>
-            <a:ext cx="13411200" cy="10363200"/>
-          </a:xfrm>
-          <a:prstGeom prst="rect">
-            <a:avLst/>
-          </a:prstGeom>
+            <a:ext cx="13410720" cy="10362960"/>
+          </a:xfrm>
+          <a:prstGeom prst="rect">
+            <a:avLst/>
+          </a:prstGeom>
+          <a:noFill/>
+          <a:ln w="0">
+            <a:noFill/>
+          </a:ln>
         </p:spPr>
       </p:pic>
       <p:pic>
         <p:nvPicPr>
-          <p:cNvPr id="3" name="object 3" descr=""/>
+          <p:cNvPr id="88" name="object 3" descr=""/>
           <p:cNvPicPr/>
           <p:nvPr/>
         </p:nvPicPr>
         <p:blipFill>
-          <a:blip r:embed="rId3" cstate="print"/>
-          <a:stretch>
-            <a:fillRect/>
-          </a:stretch>
+          <a:blip r:embed="rId2"/>
+          <a:stretch/>
         </p:blipFill>
         <p:spPr>
           <a:xfrm>
-            <a:off x="992797" y="936878"/>
-            <a:ext cx="7393990" cy="8538641"/>
-          </a:xfrm>
-          <a:prstGeom prst="rect">
-            <a:avLst/>
-          </a:prstGeom>
+            <a:off x="992880" y="936720"/>
+            <a:ext cx="7393680" cy="8538120"/>
+          </a:xfrm>
+          <a:prstGeom prst="rect">
+            <a:avLst/>
+          </a:prstGeom>
+          <a:noFill/>
+          <a:ln w="0">
+            <a:noFill/>
+          </a:ln>
         </p:spPr>
       </p:pic>
       <p:pic>
         <p:nvPicPr>
-          <p:cNvPr id="4" name="object 4" descr=""/>
+          <p:cNvPr id="89" name="object 4" descr=""/>
           <p:cNvPicPr/>
           <p:nvPr/>
         </p:nvPicPr>
         <p:blipFill>
-          <a:blip r:embed="rId4" cstate="print"/>
-          <a:stretch>
-            <a:fillRect/>
-          </a:stretch>
+          <a:blip r:embed="rId3"/>
+          <a:stretch/>
         </p:blipFill>
         <p:spPr>
           <a:xfrm>
-            <a:off x="9163939" y="7550848"/>
-            <a:ext cx="2893568" cy="1808454"/>
-          </a:xfrm>
-          <a:prstGeom prst="rect">
-            <a:avLst/>
-          </a:prstGeom>
+            <a:off x="9163800" y="7551000"/>
+            <a:ext cx="2893320" cy="1807920"/>
+          </a:xfrm>
+          <a:prstGeom prst="rect">
+            <a:avLst/>
+          </a:prstGeom>
+          <a:noFill/>
+          <a:ln w="0">
+            <a:noFill/>
+          </a:ln>
         </p:spPr>
       </p:pic>
       <p:sp>
         <p:nvSpPr>
-          <p:cNvPr id="5" name="object 5" descr=""/>
-          <p:cNvSpPr txBox="1"/>
+          <p:cNvPr id="90" name="object 5"/>
+          <p:cNvSpPr/>
           <p:nvPr/>
         </p:nvSpPr>
         <p:spPr>
           <a:xfrm>
-            <a:off x="1046162" y="9536162"/>
-            <a:ext cx="5251450" cy="513080"/>
-          </a:xfrm>
-          <a:prstGeom prst="rect">
-            <a:avLst/>
-          </a:prstGeom>
-        </p:spPr>
+            <a:off x="1046160" y="9536040"/>
+            <a:ext cx="5250960" cy="512640"/>
+          </a:xfrm>
+          <a:prstGeom prst="rect">
+            <a:avLst/>
+          </a:prstGeom>
+          <a:noFill/>
+          <a:ln w="0">
+            <a:noFill/>
+          </a:ln>
+        </p:spPr>
+        <p:style>
+          <a:lnRef idx="0"/>
+          <a:fillRef idx="0"/>
+          <a:effectRef idx="0"/>
+          <a:fontRef idx="minor"/>
+        </p:style>
         <p:txBody>
-          <a:bodyPr wrap="square" lIns="0" tIns="12700" rIns="0" bIns="0" rtlCol="0" vert="horz">
+          <a:bodyPr lIns="0" rIns="0" tIns="12600" bIns="0" anchor="t">
             <a:spAutoFit/>
           </a:bodyPr>
-          <a:lstStyle/>
           <a:p>
-            <a:pPr marL="12700">
+            <a:pPr marL="12600">
               <a:lnSpc>
                 <a:spcPct val="100000"/>
               </a:lnSpc>
               <a:spcBef>
-                <a:spcPts val="100"/>
+                <a:spcPts val="99"/>
               </a:spcBef>
             </a:pPr>
             <a:r>
-              <a:rPr dirty="0" sz="3200" spc="204">
+              <a:rPr b="0" lang="en-US" sz="3200" spc="204" strike="noStrike" u="none">
+                <a:solidFill>
+                  <a:srgbClr val="000000"/>
+                </a:solidFill>
+                <a:effectLst/>
+                <a:uFillTx/>
                 <a:latin typeface="Cambria"/>
-                <a:cs typeface="Cambria"/>
               </a:rPr>
               <a:t>(Tedeschi</a:t>
             </a:r>
             <a:r>
-              <a:rPr dirty="0" sz="3200" spc="290">
+              <a:rPr b="0" lang="en-US" sz="3200" spc="289" strike="noStrike" u="none">
+                <a:solidFill>
+                  <a:srgbClr val="000000"/>
+                </a:solidFill>
+                <a:effectLst/>
+                <a:uFillTx/>
                 <a:latin typeface="Cambria"/>
-                <a:cs typeface="Cambria"/>
               </a:rPr>
               <a:t> </a:t>
             </a:r>
             <a:r>
-              <a:rPr dirty="0" sz="3200" spc="315">
+              <a:rPr b="0" lang="en-US" sz="3200" spc="315" strike="noStrike" u="none">
+                <a:solidFill>
+                  <a:srgbClr val="000000"/>
+                </a:solidFill>
+                <a:effectLst/>
+                <a:uFillTx/>
                 <a:latin typeface="Cambria"/>
-                <a:cs typeface="Cambria"/>
               </a:rPr>
               <a:t>Calhoun,</a:t>
             </a:r>
             <a:r>
-              <a:rPr dirty="0" sz="3200" spc="295">
+              <a:rPr b="0" lang="en-US" sz="3200" spc="295" strike="noStrike" u="none">
+                <a:solidFill>
+                  <a:srgbClr val="000000"/>
+                </a:solidFill>
+                <a:effectLst/>
+                <a:uFillTx/>
                 <a:latin typeface="Cambria"/>
-                <a:cs typeface="Cambria"/>
               </a:rPr>
               <a:t> </a:t>
             </a:r>
             <a:r>
-              <a:rPr dirty="0" sz="3200" spc="145">
+              <a:rPr b="0" lang="en-US" sz="3200" spc="145" strike="noStrike" u="none">
+                <a:solidFill>
+                  <a:srgbClr val="000000"/>
+                </a:solidFill>
+                <a:effectLst/>
+                <a:uFillTx/>
                 <a:latin typeface="Cambria"/>
-                <a:cs typeface="Cambria"/>
               </a:rPr>
               <a:t>2004)</a:t>
             </a:r>
-            <a:endParaRPr sz="3200">
-              <a:latin typeface="Cambria"/>
-              <a:cs typeface="Cambria"/>
+            <a:endParaRPr b="0" lang="en-US" sz="3200" strike="noStrike" u="none">
+              <a:solidFill>
+                <a:srgbClr val="000000"/>
+              </a:solidFill>
+              <a:effectLst/>
+              <a:uFillTx/>
+              <a:latin typeface="Arial"/>
             </a:endParaRPr>
           </a:p>
         </p:txBody>
       </p:sp>
     </p:spTree>
   </p:cSld>
-  <p:clrMapOvr>
-    <a:masterClrMapping/>
-  </p:clrMapOvr>
+  <mc:AlternateContent>
+    <mc:Choice Requires="p14">
+      <p:transition spd="slow" p14:dur="2000"/>
+    </mc:Choice>
+    <mc:Fallback>
+      <p:transition spd="slow"/>
+    </mc:Fallback>
+  </mc:AlternateContent>
 </p:sld>
 </file>
 
 <file path=ppt/slides/slide15.xml><?xml version="1.0" encoding="utf-8"?>
-<p:sld xmlns:a="http://schemas.openxmlformats.org/drawingml/2006/main" xmlns:r="http://schemas.openxmlformats.org/officeDocument/2006/relationships" xmlns:p="http://schemas.openxmlformats.org/presentationml/2006/main">
+<p:sld xmlns:a="http://schemas.openxmlformats.org/drawingml/2006/main" xmlns:p="http://schemas.openxmlformats.org/presentationml/2006/main" xmlns:r="http://schemas.openxmlformats.org/officeDocument/2006/relationships" xmlns:p14="http://schemas.microsoft.com/office/powerpoint/2010/main" xmlns:p15="http://schemas.microsoft.com/office/powerpoint/2012/main" xmlns:mc="http://schemas.openxmlformats.org/markup-compatibility/2006">
   <p:cSld>
     <p:spTree>
       <p:nvGrpSpPr>
@@ -2062,8 +3778,8 @@
       </p:grpSpPr>
       <p:sp>
         <p:nvSpPr>
-          <p:cNvPr id="2" name="object 2"/>
-          <p:cNvSpPr txBox="1">
+          <p:cNvPr id="91" name="PlaceHolder 1"/>
+          <p:cNvSpPr>
             <a:spLocks noGrp="1"/>
           </p:cNvSpPr>
           <p:nvPr>
@@ -2071,63 +3787,135 @@
           </p:nvPr>
         </p:nvSpPr>
         <p:spPr>
-          <a:prstGeom prst="rect"/>
+          <a:xfrm>
+            <a:off x="856800" y="530640"/>
+            <a:ext cx="2800800" cy="2277000"/>
+          </a:xfrm>
+          <a:prstGeom prst="rect">
+            <a:avLst/>
+          </a:prstGeom>
+          <a:noFill/>
+          <a:ln w="0">
+            <a:noFill/>
+          </a:ln>
         </p:spPr>
         <p:txBody>
-          <a:bodyPr wrap="square" lIns="0" tIns="13970" rIns="0" bIns="0" rtlCol="0" vert="horz">
+          <a:bodyPr lIns="0" rIns="0" tIns="14040" bIns="0" anchor="t">
             <a:spAutoFit/>
           </a:bodyPr>
-          <a:lstStyle/>
           <a:p>
-            <a:pPr marL="12700">
+            <a:pPr marL="12600" indent="0">
               <a:lnSpc>
                 <a:spcPct val="100000"/>
               </a:lnSpc>
               <a:spcBef>
-                <a:spcPts val="110"/>
+                <a:spcPts val="111"/>
               </a:spcBef>
+              <a:buNone/>
             </a:pPr>
             <a:r>
-              <a:rPr dirty="0" spc="365"/>
+              <a:rPr b="0" lang="en-US" sz="4950" spc="366" strike="noStrike" u="none">
+                <a:solidFill>
+                  <a:schemeClr val="dk1"/>
+                </a:solidFill>
+                <a:effectLst/>
+                <a:uFillTx/>
+                <a:latin typeface="Cambria"/>
+              </a:rPr>
               <a:t>L</a:t>
             </a:r>
             <a:r>
-              <a:rPr dirty="0" spc="400"/>
+              <a:rPr b="0" lang="en-US" sz="4950" spc="400" strike="noStrike" u="none">
+                <a:solidFill>
+                  <a:schemeClr val="dk1"/>
+                </a:solidFill>
+                <a:effectLst/>
+                <a:uFillTx/>
+                <a:latin typeface="Cambria"/>
+              </a:rPr>
               <a:t>a</a:t>
             </a:r>
             <a:r>
-              <a:rPr dirty="0" spc="335"/>
+              <a:rPr b="0" lang="en-US" sz="4950" spc="334" strike="noStrike" u="none">
+                <a:solidFill>
+                  <a:schemeClr val="dk1"/>
+                </a:solidFill>
+                <a:effectLst/>
+                <a:uFillTx/>
+                <a:latin typeface="Cambria"/>
+              </a:rPr>
               <a:t>s</a:t>
             </a:r>
             <a:r>
-              <a:rPr dirty="0" spc="415"/>
+              <a:rPr b="0" lang="en-US" sz="4950" spc="414" strike="noStrike" u="none">
+                <a:solidFill>
+                  <a:schemeClr val="dk1"/>
+                </a:solidFill>
+                <a:effectLst/>
+                <a:uFillTx/>
+                <a:latin typeface="Cambria"/>
+              </a:rPr>
               <a:t>t</a:t>
             </a:r>
             <a:r>
-              <a:rPr dirty="0" spc="370"/>
+              <a:rPr b="0" lang="en-US" sz="4950" spc="371" strike="noStrike" u="none">
+                <a:solidFill>
+                  <a:schemeClr val="dk1"/>
+                </a:solidFill>
+                <a:effectLst/>
+                <a:uFillTx/>
+                <a:latin typeface="Cambria"/>
+              </a:rPr>
               <a:t>l</a:t>
             </a:r>
             <a:r>
-              <a:rPr dirty="0" spc="-170"/>
+              <a:rPr b="0" lang="en-US" sz="4950" spc="-170" strike="noStrike" u="none">
+                <a:solidFill>
+                  <a:schemeClr val="dk1"/>
+                </a:solidFill>
+                <a:effectLst/>
+                <a:uFillTx/>
+                <a:latin typeface="Cambria"/>
+              </a:rPr>
               <a:t>y</a:t>
             </a:r>
             <a:r>
-              <a:rPr dirty="0" spc="400"/>
+              <a:rPr b="0" lang="en-US" sz="4950" spc="400" strike="noStrike" u="none">
+                <a:solidFill>
+                  <a:schemeClr val="dk1"/>
+                </a:solidFill>
+                <a:effectLst/>
+                <a:uFillTx/>
+                <a:latin typeface="Cambria"/>
+              </a:rPr>
               <a:t>,</a:t>
             </a:r>
+            <a:endParaRPr b="0" lang="en-US" sz="4950" strike="noStrike" u="none">
+              <a:solidFill>
+                <a:srgbClr val="000000"/>
+              </a:solidFill>
+              <a:effectLst/>
+              <a:uFillTx/>
+              <a:latin typeface="Calibri"/>
+            </a:endParaRPr>
           </a:p>
         </p:txBody>
       </p:sp>
     </p:spTree>
   </p:cSld>
-  <p:clrMapOvr>
-    <a:masterClrMapping/>
-  </p:clrMapOvr>
+  <mc:AlternateContent>
+    <mc:Choice Requires="p14">
+      <p:transition spd="slow" p14:dur="2000"/>
+    </mc:Choice>
+    <mc:Fallback>
+      <p:transition spd="slow"/>
+    </mc:Fallback>
+  </mc:AlternateContent>
 </p:sld>
 </file>
 
 <file path=ppt/slides/slide16.xml><?xml version="1.0" encoding="utf-8"?>
-<p:sld xmlns:a="http://schemas.openxmlformats.org/drawingml/2006/main" xmlns:r="http://schemas.openxmlformats.org/officeDocument/2006/relationships" xmlns:p="http://schemas.openxmlformats.org/presentationml/2006/main" showMasterSp="0">
+<p:sld xmlns:a="http://schemas.openxmlformats.org/drawingml/2006/main" xmlns:p="http://schemas.openxmlformats.org/presentationml/2006/main" xmlns:r="http://schemas.openxmlformats.org/officeDocument/2006/relationships" xmlns:p14="http://schemas.microsoft.com/office/powerpoint/2010/main" xmlns:p15="http://schemas.microsoft.com/office/powerpoint/2012/main" xmlns:mc="http://schemas.openxmlformats.org/markup-compatibility/2006" showMasterSp="0">
   <p:cSld>
     <p:spTree>
       <p:nvGrpSpPr>
@@ -2145,87 +3933,98 @@
       </p:grpSpPr>
       <p:pic>
         <p:nvPicPr>
-          <p:cNvPr id="2" name="object 2" descr=""/>
+          <p:cNvPr id="92" name="object 2" descr=""/>
           <p:cNvPicPr/>
           <p:nvPr/>
         </p:nvPicPr>
         <p:blipFill>
-          <a:blip r:embed="rId2" cstate="print"/>
-          <a:stretch>
-            <a:fillRect/>
-          </a:stretch>
+          <a:blip r:embed="rId1"/>
+          <a:stretch/>
         </p:blipFill>
         <p:spPr>
           <a:xfrm>
             <a:off x="0" y="0"/>
-            <a:ext cx="13411200" cy="10363200"/>
-          </a:xfrm>
-          <a:prstGeom prst="rect">
-            <a:avLst/>
-          </a:prstGeom>
+            <a:ext cx="13410720" cy="10362960"/>
+          </a:xfrm>
+          <a:prstGeom prst="rect">
+            <a:avLst/>
+          </a:prstGeom>
+          <a:noFill/>
+          <a:ln w="0">
+            <a:noFill/>
+          </a:ln>
         </p:spPr>
       </p:pic>
       <p:pic>
         <p:nvPicPr>
-          <p:cNvPr id="3" name="object 3" descr=""/>
+          <p:cNvPr id="93" name="object 3" descr=""/>
           <p:cNvPicPr/>
           <p:nvPr/>
         </p:nvPicPr>
         <p:blipFill>
-          <a:blip r:embed="rId3" cstate="print"/>
-          <a:stretch>
-            <a:fillRect/>
-          </a:stretch>
+          <a:blip r:embed="rId2"/>
+          <a:stretch/>
         </p:blipFill>
         <p:spPr>
           <a:xfrm>
-            <a:off x="3815145" y="3702100"/>
-            <a:ext cx="2531533" cy="1697799"/>
-          </a:xfrm>
-          <a:prstGeom prst="rect">
-            <a:avLst/>
-          </a:prstGeom>
+            <a:off x="3815280" y="3702240"/>
+            <a:ext cx="2531160" cy="1697400"/>
+          </a:xfrm>
+          <a:prstGeom prst="rect">
+            <a:avLst/>
+          </a:prstGeom>
+          <a:noFill/>
+          <a:ln w="0">
+            <a:noFill/>
+          </a:ln>
         </p:spPr>
       </p:pic>
       <p:pic>
         <p:nvPicPr>
-          <p:cNvPr id="4" name="object 4" descr=""/>
+          <p:cNvPr id="94" name="object 4" descr=""/>
           <p:cNvPicPr/>
           <p:nvPr/>
         </p:nvPicPr>
         <p:blipFill>
-          <a:blip r:embed="rId4" cstate="print"/>
-          <a:stretch>
-            <a:fillRect/>
-          </a:stretch>
+          <a:blip r:embed="rId3"/>
+          <a:stretch/>
         </p:blipFill>
         <p:spPr>
           <a:xfrm>
-            <a:off x="6675786" y="4091460"/>
-            <a:ext cx="1563884" cy="1547758"/>
-          </a:xfrm>
-          <a:prstGeom prst="rect">
-            <a:avLst/>
-          </a:prstGeom>
+            <a:off x="6675840" y="4091400"/>
+            <a:ext cx="1563480" cy="1547280"/>
+          </a:xfrm>
+          <a:prstGeom prst="rect">
+            <a:avLst/>
+          </a:prstGeom>
+          <a:noFill/>
+          <a:ln w="0">
+            <a:noFill/>
+          </a:ln>
         </p:spPr>
       </p:pic>
       <p:sp>
         <p:nvSpPr>
-          <p:cNvPr id="5" name="object 5" descr=""/>
+          <p:cNvPr id="95" name="object 5"/>
           <p:cNvSpPr/>
           <p:nvPr/>
         </p:nvSpPr>
         <p:spPr>
           <a:xfrm>
-            <a:off x="8810130" y="4220540"/>
-            <a:ext cx="354330" cy="1174115"/>
+            <a:off x="8810280" y="4220640"/>
+            <a:ext cx="353880" cy="1173600"/>
           </a:xfrm>
           <a:custGeom>
             <a:avLst/>
-            <a:gdLst/>
+            <a:gdLst>
+              <a:gd name="textAreaLeft" fmla="*/ 0 w 353880"/>
+              <a:gd name="textAreaRight" fmla="*/ 354240 w 353880"/>
+              <a:gd name="textAreaTop" fmla="*/ 0 h 1173600"/>
+              <a:gd name="textAreaBottom" fmla="*/ 1173960 h 1173600"/>
+            </a:gdLst>
             <a:ahLst/>
             <a:cxnLst/>
-            <a:rect l="l" t="t" r="r" b="b"/>
+            <a:rect l="textAreaLeft" t="textAreaTop" r="textAreaRight" b="textAreaBottom"/>
             <a:pathLst>
               <a:path w="354329" h="1174114">
                 <a:moveTo>
@@ -2619,82 +4418,115 @@
           <a:solidFill>
             <a:srgbClr val="000000"/>
           </a:solidFill>
-        </p:spPr>
+          <a:ln w="0">
+            <a:noFill/>
+          </a:ln>
+        </p:spPr>
+        <p:style>
+          <a:lnRef idx="0"/>
+          <a:fillRef idx="0"/>
+          <a:effectRef idx="0"/>
+          <a:fontRef idx="minor"/>
+        </p:style>
         <p:txBody>
-          <a:bodyPr wrap="square" lIns="0" tIns="0" rIns="0" bIns="0" rtlCol="0"/>
-          <a:lstStyle/>
-          <a:p/>
+          <a:bodyPr lIns="0" rIns="0" tIns="0" bIns="0" anchor="t">
+            <a:noAutofit/>
+          </a:bodyPr>
+          <a:p>
+            <a:pPr>
+              <a:lnSpc>
+                <a:spcPct val="100000"/>
+              </a:lnSpc>
+            </a:pPr>
+            <a:endParaRPr b="0" lang="en-US" sz="1800" strike="noStrike" u="none">
+              <a:solidFill>
+                <a:srgbClr val="ffffff"/>
+              </a:solidFill>
+              <a:effectLst/>
+              <a:uFillTx/>
+              <a:latin typeface="Arial"/>
+            </a:endParaRPr>
+          </a:p>
         </p:txBody>
       </p:sp>
       <p:grpSp>
         <p:nvGrpSpPr>
-          <p:cNvPr id="6" name="object 6" descr=""/>
+          <p:cNvPr id="96" name="object 6"/>
           <p:cNvGrpSpPr/>
           <p:nvPr/>
         </p:nvGrpSpPr>
         <p:grpSpPr>
           <a:xfrm>
-            <a:off x="3234869" y="5621134"/>
-            <a:ext cx="6561455" cy="1217295"/>
-            <a:chOff x="3234869" y="5621134"/>
-            <a:chExt cx="6561455" cy="1217295"/>
+            <a:off x="3234960" y="5621040"/>
+            <a:ext cx="6560640" cy="1216800"/>
+            <a:chOff x="3234960" y="5621040"/>
+            <a:chExt cx="6560640" cy="1216800"/>
           </a:xfrm>
         </p:grpSpPr>
         <p:pic>
           <p:nvPicPr>
-            <p:cNvPr id="7" name="object 7" descr=""/>
+            <p:cNvPr id="97" name="object 7" descr=""/>
             <p:cNvPicPr/>
             <p:nvPr/>
           </p:nvPicPr>
           <p:blipFill>
-            <a:blip r:embed="rId5" cstate="print"/>
-            <a:stretch>
-              <a:fillRect/>
-            </a:stretch>
+            <a:blip r:embed="rId4"/>
+            <a:stretch/>
           </p:blipFill>
           <p:spPr>
             <a:xfrm>
-              <a:off x="8697260" y="5621134"/>
-              <a:ext cx="251448" cy="191135"/>
+              <a:off x="8697240" y="5621040"/>
+              <a:ext cx="250920" cy="190800"/>
             </a:xfrm>
             <a:prstGeom prst="rect">
               <a:avLst/>
             </a:prstGeom>
+            <a:noFill/>
+            <a:ln w="0">
+              <a:noFill/>
+            </a:ln>
           </p:spPr>
         </p:pic>
         <p:pic>
           <p:nvPicPr>
-            <p:cNvPr id="8" name="object 8" descr=""/>
+            <p:cNvPr id="98" name="object 8" descr=""/>
             <p:cNvPicPr/>
             <p:nvPr/>
           </p:nvPicPr>
           <p:blipFill>
-            <a:blip r:embed="rId6" cstate="print"/>
-            <a:stretch>
-              <a:fillRect/>
-            </a:stretch>
+            <a:blip r:embed="rId5"/>
+            <a:stretch/>
           </p:blipFill>
           <p:spPr>
             <a:xfrm>
-              <a:off x="3234869" y="5788863"/>
-              <a:ext cx="6561047" cy="1049489"/>
+              <a:off x="3234960" y="5788800"/>
+              <a:ext cx="6560640" cy="1049040"/>
             </a:xfrm>
             <a:prstGeom prst="rect">
               <a:avLst/>
             </a:prstGeom>
+            <a:noFill/>
+            <a:ln w="0">
+              <a:noFill/>
+            </a:ln>
           </p:spPr>
         </p:pic>
       </p:grpSp>
     </p:spTree>
   </p:cSld>
-  <p:clrMapOvr>
-    <a:masterClrMapping/>
-  </p:clrMapOvr>
+  <mc:AlternateContent>
+    <mc:Choice Requires="p14">
+      <p:transition spd="slow" p14:dur="2000"/>
+    </mc:Choice>
+    <mc:Fallback>
+      <p:transition spd="slow"/>
+    </mc:Fallback>
+  </mc:AlternateContent>
 </p:sld>
 </file>
 
 <file path=ppt/slides/slide17.xml><?xml version="1.0" encoding="utf-8"?>
-<p:sld xmlns:a="http://schemas.openxmlformats.org/drawingml/2006/main" xmlns:r="http://schemas.openxmlformats.org/officeDocument/2006/relationships" xmlns:p="http://schemas.openxmlformats.org/presentationml/2006/main" showMasterSp="0">
+<p:sld xmlns:a="http://schemas.openxmlformats.org/drawingml/2006/main" xmlns:p="http://schemas.openxmlformats.org/presentationml/2006/main" xmlns:r="http://schemas.openxmlformats.org/officeDocument/2006/relationships" xmlns:p14="http://schemas.microsoft.com/office/powerpoint/2010/main" xmlns:p15="http://schemas.microsoft.com/office/powerpoint/2012/main" xmlns:mc="http://schemas.openxmlformats.org/markup-compatibility/2006" showMasterSp="0">
   <p:cSld>
     <p:spTree>
       <p:nvGrpSpPr>
@@ -2712,124 +4544,139 @@
       </p:grpSpPr>
       <p:pic>
         <p:nvPicPr>
-          <p:cNvPr id="2" name="object 2" descr=""/>
+          <p:cNvPr id="99" name="object 2" descr=""/>
           <p:cNvPicPr/>
           <p:nvPr/>
         </p:nvPicPr>
         <p:blipFill>
-          <a:blip r:embed="rId2" cstate="print"/>
-          <a:stretch>
-            <a:fillRect/>
-          </a:stretch>
+          <a:blip r:embed="rId1"/>
+          <a:stretch/>
         </p:blipFill>
         <p:spPr>
           <a:xfrm>
             <a:off x="0" y="0"/>
-            <a:ext cx="13411200" cy="10363200"/>
-          </a:xfrm>
-          <a:prstGeom prst="rect">
-            <a:avLst/>
-          </a:prstGeom>
+            <a:ext cx="13410720" cy="10362960"/>
+          </a:xfrm>
+          <a:prstGeom prst="rect">
+            <a:avLst/>
+          </a:prstGeom>
+          <a:noFill/>
+          <a:ln w="0">
+            <a:noFill/>
+          </a:ln>
         </p:spPr>
       </p:pic>
       <p:pic>
         <p:nvPicPr>
-          <p:cNvPr id="3" name="object 3" descr=""/>
+          <p:cNvPr id="100" name="object 3" descr=""/>
           <p:cNvPicPr/>
           <p:nvPr/>
         </p:nvPicPr>
         <p:blipFill>
-          <a:blip r:embed="rId3" cstate="print"/>
-          <a:stretch>
-            <a:fillRect/>
-          </a:stretch>
+          <a:blip r:embed="rId2"/>
+          <a:stretch/>
         </p:blipFill>
         <p:spPr>
           <a:xfrm>
-            <a:off x="1001572" y="2531033"/>
-            <a:ext cx="11140960" cy="5365826"/>
-          </a:xfrm>
-          <a:prstGeom prst="rect">
-            <a:avLst/>
-          </a:prstGeom>
+            <a:off x="1001520" y="2531160"/>
+            <a:ext cx="11140560" cy="5365440"/>
+          </a:xfrm>
+          <a:prstGeom prst="rect">
+            <a:avLst/>
+          </a:prstGeom>
+          <a:noFill/>
+          <a:ln w="0">
+            <a:noFill/>
+          </a:ln>
         </p:spPr>
       </p:pic>
       <p:pic>
         <p:nvPicPr>
-          <p:cNvPr id="4" name="object 4" descr=""/>
+          <p:cNvPr id="101" name="object 4" descr=""/>
           <p:cNvPicPr/>
           <p:nvPr/>
         </p:nvPicPr>
         <p:blipFill>
-          <a:blip r:embed="rId4" cstate="print"/>
-          <a:stretch>
-            <a:fillRect/>
-          </a:stretch>
+          <a:blip r:embed="rId3"/>
+          <a:stretch/>
         </p:blipFill>
         <p:spPr>
           <a:xfrm>
-            <a:off x="1135164" y="1290840"/>
-            <a:ext cx="581248" cy="579348"/>
-          </a:xfrm>
-          <a:prstGeom prst="rect">
-            <a:avLst/>
-          </a:prstGeom>
+            <a:off x="1135080" y="1290960"/>
+            <a:ext cx="581040" cy="578880"/>
+          </a:xfrm>
+          <a:prstGeom prst="rect">
+            <a:avLst/>
+          </a:prstGeom>
+          <a:noFill/>
+          <a:ln w="0">
+            <a:noFill/>
+          </a:ln>
         </p:spPr>
       </p:pic>
       <p:pic>
         <p:nvPicPr>
-          <p:cNvPr id="5" name="object 5" descr=""/>
+          <p:cNvPr id="102" name="object 5" descr=""/>
           <p:cNvPicPr/>
           <p:nvPr/>
         </p:nvPicPr>
         <p:blipFill>
-          <a:blip r:embed="rId5" cstate="print"/>
-          <a:stretch>
-            <a:fillRect/>
-          </a:stretch>
+          <a:blip r:embed="rId4"/>
+          <a:stretch/>
         </p:blipFill>
         <p:spPr>
           <a:xfrm>
-            <a:off x="1839572" y="1218412"/>
-            <a:ext cx="1948502" cy="628243"/>
-          </a:xfrm>
-          <a:prstGeom prst="rect">
-            <a:avLst/>
-          </a:prstGeom>
+            <a:off x="1839600" y="1218240"/>
+            <a:ext cx="1948320" cy="627840"/>
+          </a:xfrm>
+          <a:prstGeom prst="rect">
+            <a:avLst/>
+          </a:prstGeom>
+          <a:noFill/>
+          <a:ln w="0">
+            <a:noFill/>
+          </a:ln>
         </p:spPr>
       </p:pic>
       <p:pic>
         <p:nvPicPr>
-          <p:cNvPr id="6" name="object 6" descr=""/>
+          <p:cNvPr id="103" name="object 6" descr=""/>
           <p:cNvPicPr/>
           <p:nvPr/>
         </p:nvPicPr>
         <p:blipFill>
-          <a:blip r:embed="rId6" cstate="print"/>
-          <a:stretch>
-            <a:fillRect/>
-          </a:stretch>
+          <a:blip r:embed="rId5"/>
+          <a:stretch/>
         </p:blipFill>
         <p:spPr>
           <a:xfrm>
-            <a:off x="4126134" y="1461242"/>
-            <a:ext cx="427027" cy="330956"/>
-          </a:xfrm>
-          <a:prstGeom prst="rect">
-            <a:avLst/>
-          </a:prstGeom>
+            <a:off x="4125960" y="1461240"/>
+            <a:ext cx="426600" cy="330480"/>
+          </a:xfrm>
+          <a:prstGeom prst="rect">
+            <a:avLst/>
+          </a:prstGeom>
+          <a:noFill/>
+          <a:ln w="0">
+            <a:noFill/>
+          </a:ln>
         </p:spPr>
       </p:pic>
     </p:spTree>
   </p:cSld>
-  <p:clrMapOvr>
-    <a:masterClrMapping/>
-  </p:clrMapOvr>
+  <mc:AlternateContent>
+    <mc:Choice Requires="p14">
+      <p:transition spd="slow" p14:dur="2000"/>
+    </mc:Choice>
+    <mc:Fallback>
+      <p:transition spd="slow"/>
+    </mc:Fallback>
+  </mc:AlternateContent>
 </p:sld>
 </file>
 
 <file path=ppt/slides/slide2.xml><?xml version="1.0" encoding="utf-8"?>
-<p:sld xmlns:a="http://schemas.openxmlformats.org/drawingml/2006/main" xmlns:r="http://schemas.openxmlformats.org/officeDocument/2006/relationships" xmlns:p="http://schemas.openxmlformats.org/presentationml/2006/main" showMasterSp="0">
+<p:sld xmlns:a="http://schemas.openxmlformats.org/drawingml/2006/main" xmlns:p="http://schemas.openxmlformats.org/presentationml/2006/main" xmlns:r="http://schemas.openxmlformats.org/officeDocument/2006/relationships" xmlns:p14="http://schemas.microsoft.com/office/powerpoint/2010/main" xmlns:p15="http://schemas.microsoft.com/office/powerpoint/2012/main" xmlns:mc="http://schemas.openxmlformats.org/markup-compatibility/2006" showMasterSp="0">
   <p:cSld>
     <p:spTree>
       <p:nvGrpSpPr>
@@ -2847,80 +4694,91 @@
       </p:grpSpPr>
       <p:pic>
         <p:nvPicPr>
-          <p:cNvPr id="2" name="object 2" descr=""/>
+          <p:cNvPr id="40" name="object 2" descr=""/>
           <p:cNvPicPr/>
           <p:nvPr/>
         </p:nvPicPr>
         <p:blipFill>
-          <a:blip r:embed="rId2" cstate="print"/>
-          <a:stretch>
-            <a:fillRect/>
-          </a:stretch>
+          <a:blip r:embed="rId1"/>
+          <a:stretch/>
         </p:blipFill>
         <p:spPr>
           <a:xfrm>
             <a:off x="0" y="0"/>
-            <a:ext cx="13411200" cy="10363200"/>
-          </a:xfrm>
-          <a:prstGeom prst="rect">
-            <a:avLst/>
-          </a:prstGeom>
+            <a:ext cx="13410720" cy="10362960"/>
+          </a:xfrm>
+          <a:prstGeom prst="rect">
+            <a:avLst/>
+          </a:prstGeom>
+          <a:noFill/>
+          <a:ln w="0">
+            <a:noFill/>
+          </a:ln>
         </p:spPr>
       </p:pic>
       <p:pic>
         <p:nvPicPr>
-          <p:cNvPr id="3" name="object 3" descr=""/>
+          <p:cNvPr id="41" name="object 3" descr=""/>
           <p:cNvPicPr/>
           <p:nvPr/>
         </p:nvPicPr>
         <p:blipFill>
-          <a:blip r:embed="rId3" cstate="print"/>
-          <a:stretch>
-            <a:fillRect/>
-          </a:stretch>
+          <a:blip r:embed="rId2"/>
+          <a:stretch/>
         </p:blipFill>
         <p:spPr>
           <a:xfrm>
-            <a:off x="785710" y="605180"/>
-            <a:ext cx="6710159" cy="3594696"/>
-          </a:xfrm>
-          <a:prstGeom prst="rect">
-            <a:avLst/>
-          </a:prstGeom>
+            <a:off x="785880" y="605160"/>
+            <a:ext cx="6709680" cy="3594240"/>
+          </a:xfrm>
+          <a:prstGeom prst="rect">
+            <a:avLst/>
+          </a:prstGeom>
+          <a:noFill/>
+          <a:ln w="0">
+            <a:noFill/>
+          </a:ln>
         </p:spPr>
       </p:pic>
       <p:pic>
         <p:nvPicPr>
-          <p:cNvPr id="4" name="object 4" descr=""/>
+          <p:cNvPr id="42" name="object 4" descr=""/>
           <p:cNvPicPr/>
           <p:nvPr/>
         </p:nvPicPr>
         <p:blipFill>
-          <a:blip r:embed="rId4" cstate="print"/>
-          <a:stretch>
-            <a:fillRect/>
-          </a:stretch>
+          <a:blip r:embed="rId3"/>
+          <a:stretch/>
         </p:blipFill>
         <p:spPr>
           <a:xfrm>
-            <a:off x="4031360" y="4605680"/>
-            <a:ext cx="8355558" cy="4699990"/>
-          </a:xfrm>
-          <a:prstGeom prst="rect">
-            <a:avLst/>
-          </a:prstGeom>
+            <a:off x="4031280" y="4605840"/>
+            <a:ext cx="8355240" cy="4699800"/>
+          </a:xfrm>
+          <a:prstGeom prst="rect">
+            <a:avLst/>
+          </a:prstGeom>
+          <a:noFill/>
+          <a:ln w="0">
+            <a:noFill/>
+          </a:ln>
         </p:spPr>
       </p:pic>
     </p:spTree>
   </p:cSld>
-  <p:clrMapOvr>
-    <a:masterClrMapping/>
-  </p:clrMapOvr>
+  <mc:AlternateContent>
+    <mc:Choice Requires="p14">
+      <p:transition spd="slow" p14:dur="2000"/>
+    </mc:Choice>
+    <mc:Fallback>
+      <p:transition spd="slow"/>
+    </mc:Fallback>
+  </mc:AlternateContent>
 </p:sld>
 </file>
 
 <file path=ppt/slides/slide3.xml><?xml version="1.0" encoding="utf-8"?>
-<p:sld xmlns:a="http://schemas.openxmlformats.org/drawingml/2006/main" xmlns:r="http://schemas.openxmlformats.org/officeDocument/2006/relationships" xmlns:p="http://schemas.openxmlformats.org/presentationml/2006/main" showMasterSp="0">
+<p:sld xmlns:a="http://schemas.openxmlformats.org/drawingml/2006/main" xmlns:p="http://schemas.openxmlformats.org/presentationml/2006/main" xmlns:r="http://schemas.openxmlformats.org/officeDocument/2006/relationships" xmlns:p14="http://schemas.microsoft.com/office/powerpoint/2010/main" xmlns:p15="http://schemas.microsoft.com/office/powerpoint/2012/main" xmlns:mc="http://schemas.openxmlformats.org/markup-compatibility/2006" showMasterSp="0">
   <p:cSld>
     <p:spTree>
       <p:nvGrpSpPr>
@@ -2938,80 +4796,91 @@
       </p:grpSpPr>
       <p:pic>
         <p:nvPicPr>
-          <p:cNvPr id="2" name="object 2" descr=""/>
+          <p:cNvPr id="43" name="object 2" descr=""/>
           <p:cNvPicPr/>
           <p:nvPr/>
         </p:nvPicPr>
         <p:blipFill>
-          <a:blip r:embed="rId2" cstate="print"/>
-          <a:stretch>
-            <a:fillRect/>
-          </a:stretch>
+          <a:blip r:embed="rId1"/>
+          <a:stretch/>
         </p:blipFill>
         <p:spPr>
           <a:xfrm>
             <a:off x="0" y="0"/>
-            <a:ext cx="13411200" cy="10363200"/>
-          </a:xfrm>
-          <a:prstGeom prst="rect">
-            <a:avLst/>
-          </a:prstGeom>
+            <a:ext cx="13410720" cy="10362960"/>
+          </a:xfrm>
+          <a:prstGeom prst="rect">
+            <a:avLst/>
+          </a:prstGeom>
+          <a:noFill/>
+          <a:ln w="0">
+            <a:noFill/>
+          </a:ln>
         </p:spPr>
       </p:pic>
       <p:pic>
         <p:nvPicPr>
-          <p:cNvPr id="3" name="object 3" descr=""/>
+          <p:cNvPr id="44" name="object 3" descr=""/>
           <p:cNvPicPr/>
           <p:nvPr/>
         </p:nvPicPr>
         <p:blipFill>
-          <a:blip r:embed="rId3" cstate="print"/>
-          <a:stretch>
-            <a:fillRect/>
-          </a:stretch>
+          <a:blip r:embed="rId2"/>
+          <a:stretch/>
         </p:blipFill>
         <p:spPr>
           <a:xfrm>
-            <a:off x="4365587" y="5341239"/>
-            <a:ext cx="8241792" cy="4635995"/>
-          </a:xfrm>
-          <a:prstGeom prst="rect">
-            <a:avLst/>
-          </a:prstGeom>
+            <a:off x="4365720" y="5341320"/>
+            <a:ext cx="8241480" cy="4635720"/>
+          </a:xfrm>
+          <a:prstGeom prst="rect">
+            <a:avLst/>
+          </a:prstGeom>
+          <a:noFill/>
+          <a:ln w="0">
+            <a:noFill/>
+          </a:ln>
         </p:spPr>
       </p:pic>
       <p:pic>
         <p:nvPicPr>
-          <p:cNvPr id="4" name="object 4" descr=""/>
+          <p:cNvPr id="45" name="object 4" descr=""/>
           <p:cNvPicPr/>
           <p:nvPr/>
         </p:nvPicPr>
         <p:blipFill>
-          <a:blip r:embed="rId4" cstate="print"/>
-          <a:stretch>
-            <a:fillRect/>
-          </a:stretch>
+          <a:blip r:embed="rId3"/>
+          <a:stretch/>
         </p:blipFill>
         <p:spPr>
           <a:xfrm>
-            <a:off x="317271" y="354711"/>
-            <a:ext cx="6684441" cy="4099458"/>
-          </a:xfrm>
-          <a:prstGeom prst="rect">
-            <a:avLst/>
-          </a:prstGeom>
+            <a:off x="317160" y="354600"/>
+            <a:ext cx="6684120" cy="4098960"/>
+          </a:xfrm>
+          <a:prstGeom prst="rect">
+            <a:avLst/>
+          </a:prstGeom>
+          <a:noFill/>
+          <a:ln w="0">
+            <a:noFill/>
+          </a:ln>
         </p:spPr>
       </p:pic>
     </p:spTree>
   </p:cSld>
-  <p:clrMapOvr>
-    <a:masterClrMapping/>
-  </p:clrMapOvr>
+  <mc:AlternateContent>
+    <mc:Choice Requires="p14">
+      <p:transition spd="slow" p14:dur="2000"/>
+    </mc:Choice>
+    <mc:Fallback>
+      <p:transition spd="slow"/>
+    </mc:Fallback>
+  </mc:AlternateContent>
 </p:sld>
 </file>
 
 <file path=ppt/slides/slide4.xml><?xml version="1.0" encoding="utf-8"?>
-<p:sld xmlns:a="http://schemas.openxmlformats.org/drawingml/2006/main" xmlns:r="http://schemas.openxmlformats.org/officeDocument/2006/relationships" xmlns:p="http://schemas.openxmlformats.org/presentationml/2006/main" showMasterSp="0">
+<p:sld xmlns:a="http://schemas.openxmlformats.org/drawingml/2006/main" xmlns:p="http://schemas.openxmlformats.org/presentationml/2006/main" xmlns:r="http://schemas.openxmlformats.org/officeDocument/2006/relationships" xmlns:p14="http://schemas.microsoft.com/office/powerpoint/2010/main" xmlns:p15="http://schemas.microsoft.com/office/powerpoint/2012/main" xmlns:mc="http://schemas.openxmlformats.org/markup-compatibility/2006" showMasterSp="0">
   <p:cSld>
     <p:spTree>
       <p:nvGrpSpPr>
@@ -3029,92 +4898,107 @@
       </p:grpSpPr>
       <p:pic>
         <p:nvPicPr>
-          <p:cNvPr id="2" name="object 2" descr=""/>
+          <p:cNvPr id="46" name="object 2" descr=""/>
           <p:cNvPicPr/>
           <p:nvPr/>
         </p:nvPicPr>
         <p:blipFill>
-          <a:blip r:embed="rId2" cstate="print"/>
-          <a:stretch>
-            <a:fillRect/>
-          </a:stretch>
+          <a:blip r:embed="rId1"/>
+          <a:stretch/>
         </p:blipFill>
         <p:spPr>
           <a:xfrm>
             <a:off x="0" y="0"/>
-            <a:ext cx="13411200" cy="10363200"/>
-          </a:xfrm>
-          <a:prstGeom prst="rect">
-            <a:avLst/>
-          </a:prstGeom>
+            <a:ext cx="13410720" cy="10362960"/>
+          </a:xfrm>
+          <a:prstGeom prst="rect">
+            <a:avLst/>
+          </a:prstGeom>
+          <a:noFill/>
+          <a:ln w="0">
+            <a:noFill/>
+          </a:ln>
         </p:spPr>
       </p:pic>
       <p:pic>
         <p:nvPicPr>
-          <p:cNvPr id="3" name="object 3" descr=""/>
+          <p:cNvPr id="47" name="object 3" descr=""/>
           <p:cNvPicPr/>
           <p:nvPr/>
         </p:nvPicPr>
         <p:blipFill>
-          <a:blip r:embed="rId3" cstate="print"/>
-          <a:stretch>
-            <a:fillRect/>
-          </a:stretch>
+          <a:blip r:embed="rId2"/>
+          <a:stretch/>
         </p:blipFill>
         <p:spPr>
           <a:xfrm>
-            <a:off x="414439" y="378574"/>
-            <a:ext cx="5201894" cy="4155427"/>
-          </a:xfrm>
-          <a:prstGeom prst="rect">
-            <a:avLst/>
-          </a:prstGeom>
+            <a:off x="414360" y="378720"/>
+            <a:ext cx="5201640" cy="4155120"/>
+          </a:xfrm>
+          <a:prstGeom prst="rect">
+            <a:avLst/>
+          </a:prstGeom>
+          <a:noFill/>
+          <a:ln w="0">
+            <a:noFill/>
+          </a:ln>
         </p:spPr>
       </p:pic>
       <p:pic>
         <p:nvPicPr>
-          <p:cNvPr id="4" name="object 4" descr=""/>
+          <p:cNvPr id="48" name="object 4" descr=""/>
           <p:cNvPicPr/>
           <p:nvPr/>
         </p:nvPicPr>
         <p:blipFill>
-          <a:blip r:embed="rId4" cstate="print"/>
-          <a:stretch>
-            <a:fillRect/>
-          </a:stretch>
+          <a:blip r:embed="rId3"/>
+          <a:stretch/>
         </p:blipFill>
         <p:spPr>
           <a:xfrm>
-            <a:off x="787247" y="4789690"/>
-            <a:ext cx="4270121" cy="2059660"/>
-          </a:xfrm>
-          <a:prstGeom prst="rect">
-            <a:avLst/>
-          </a:prstGeom>
+            <a:off x="787320" y="4789800"/>
+            <a:ext cx="4269600" cy="2059200"/>
+          </a:xfrm>
+          <a:prstGeom prst="rect">
+            <a:avLst/>
+          </a:prstGeom>
+          <a:noFill/>
+          <a:ln w="0">
+            <a:noFill/>
+          </a:ln>
         </p:spPr>
       </p:pic>
       <p:sp>
         <p:nvSpPr>
-          <p:cNvPr id="5" name="object 5" descr=""/>
-          <p:cNvSpPr txBox="1"/>
+          <p:cNvPr id="49" name="object 5"/>
+          <p:cNvSpPr/>
           <p:nvPr/>
         </p:nvSpPr>
         <p:spPr>
           <a:xfrm>
-            <a:off x="604440" y="6874716"/>
-            <a:ext cx="3625215" cy="575310"/>
-          </a:xfrm>
-          <a:prstGeom prst="rect">
-            <a:avLst/>
-          </a:prstGeom>
-        </p:spPr>
+            <a:off x="604440" y="6874560"/>
+            <a:ext cx="3624840" cy="574920"/>
+          </a:xfrm>
+          <a:prstGeom prst="rect">
+            <a:avLst/>
+          </a:prstGeom>
+          <a:noFill/>
+          <a:ln w="0">
+            <a:noFill/>
+          </a:ln>
+        </p:spPr>
+        <p:style>
+          <a:lnRef idx="0"/>
+          <a:fillRef idx="0"/>
+          <a:effectRef idx="0"/>
+          <a:fontRef idx="minor"/>
+        </p:style>
         <p:txBody>
-          <a:bodyPr wrap="square" lIns="0" tIns="13335" rIns="0" bIns="0" rtlCol="0" vert="horz">
+          <a:bodyPr lIns="0" rIns="0" tIns="13320" bIns="0" anchor="t">
             <a:spAutoFit/>
           </a:bodyPr>
-          <a:lstStyle/>
           <a:p>
-            <a:pPr marL="12700">
+            <a:pPr marL="12600">
               <a:lnSpc>
                 <a:spcPct val="100000"/>
               </a:lnSpc>
@@ -3123,43 +5007,64 @@
               </a:spcBef>
             </a:pPr>
             <a:r>
-              <a:rPr dirty="0" sz="3600" spc="310">
+              <a:rPr b="0" lang="en-US" sz="3600" spc="309" strike="noStrike" u="none">
+                <a:solidFill>
+                  <a:srgbClr val="000000"/>
+                </a:solidFill>
+                <a:effectLst/>
+                <a:uFillTx/>
                 <a:latin typeface="Cambria"/>
-                <a:cs typeface="Cambria"/>
               </a:rPr>
               <a:t>(Mischel,</a:t>
             </a:r>
             <a:r>
-              <a:rPr dirty="0" sz="3600" spc="345">
+              <a:rPr b="0" lang="en-US" sz="3600" spc="346" strike="noStrike" u="none">
+                <a:solidFill>
+                  <a:srgbClr val="000000"/>
+                </a:solidFill>
+                <a:effectLst/>
+                <a:uFillTx/>
                 <a:latin typeface="Cambria"/>
-                <a:cs typeface="Cambria"/>
               </a:rPr>
               <a:t> </a:t>
             </a:r>
             <a:r>
-              <a:rPr dirty="0" sz="3600" spc="200">
+              <a:rPr b="0" lang="en-US" sz="3600" spc="201" strike="noStrike" u="none">
+                <a:solidFill>
+                  <a:srgbClr val="000000"/>
+                </a:solidFill>
+                <a:effectLst/>
+                <a:uFillTx/>
                 <a:latin typeface="Cambria"/>
-                <a:cs typeface="Cambria"/>
               </a:rPr>
               <a:t>1972)</a:t>
             </a:r>
-            <a:endParaRPr sz="3600">
-              <a:latin typeface="Cambria"/>
-              <a:cs typeface="Cambria"/>
+            <a:endParaRPr b="0" lang="en-US" sz="3600" strike="noStrike" u="none">
+              <a:solidFill>
+                <a:srgbClr val="000000"/>
+              </a:solidFill>
+              <a:effectLst/>
+              <a:uFillTx/>
+              <a:latin typeface="Arial"/>
             </a:endParaRPr>
           </a:p>
         </p:txBody>
       </p:sp>
     </p:spTree>
   </p:cSld>
-  <p:clrMapOvr>
-    <a:masterClrMapping/>
-  </p:clrMapOvr>
+  <mc:AlternateContent>
+    <mc:Choice Requires="p14">
+      <p:transition spd="slow" p14:dur="2000"/>
+    </mc:Choice>
+    <mc:Fallback>
+      <p:transition spd="slow"/>
+    </mc:Fallback>
+  </mc:AlternateContent>
 </p:sld>
 </file>
 
 <file path=ppt/slides/slide5.xml><?xml version="1.0" encoding="utf-8"?>
-<p:sld xmlns:a="http://schemas.openxmlformats.org/drawingml/2006/main" xmlns:r="http://schemas.openxmlformats.org/officeDocument/2006/relationships" xmlns:p="http://schemas.openxmlformats.org/presentationml/2006/main" showMasterSp="0">
+<p:sld xmlns:a="http://schemas.openxmlformats.org/drawingml/2006/main" xmlns:p="http://schemas.openxmlformats.org/presentationml/2006/main" xmlns:r="http://schemas.openxmlformats.org/officeDocument/2006/relationships" xmlns:p14="http://schemas.microsoft.com/office/powerpoint/2010/main" xmlns:p15="http://schemas.microsoft.com/office/powerpoint/2012/main" xmlns:mc="http://schemas.openxmlformats.org/markup-compatibility/2006" showMasterSp="0">
   <p:cSld>
     <p:spTree>
       <p:nvGrpSpPr>
@@ -3177,102 +5082,115 @@
       </p:grpSpPr>
       <p:pic>
         <p:nvPicPr>
-          <p:cNvPr id="2" name="object 2" descr=""/>
+          <p:cNvPr id="50" name="object 2" descr=""/>
           <p:cNvPicPr/>
           <p:nvPr/>
         </p:nvPicPr>
         <p:blipFill>
-          <a:blip r:embed="rId2" cstate="print"/>
-          <a:stretch>
-            <a:fillRect/>
-          </a:stretch>
+          <a:blip r:embed="rId1"/>
+          <a:stretch/>
         </p:blipFill>
         <p:spPr>
           <a:xfrm>
             <a:off x="0" y="0"/>
-            <a:ext cx="13411200" cy="10363200"/>
-          </a:xfrm>
-          <a:prstGeom prst="rect">
-            <a:avLst/>
-          </a:prstGeom>
+            <a:ext cx="13410720" cy="10362960"/>
+          </a:xfrm>
+          <a:prstGeom prst="rect">
+            <a:avLst/>
+          </a:prstGeom>
+          <a:noFill/>
+          <a:ln w="0">
+            <a:noFill/>
+          </a:ln>
         </p:spPr>
       </p:pic>
       <p:pic>
         <p:nvPicPr>
-          <p:cNvPr id="3" name="object 3" descr=""/>
+          <p:cNvPr id="51" name="object 3" descr=""/>
           <p:cNvPicPr/>
           <p:nvPr/>
         </p:nvPicPr>
         <p:blipFill>
-          <a:blip r:embed="rId3" cstate="print"/>
-          <a:stretch>
-            <a:fillRect/>
-          </a:stretch>
+          <a:blip r:embed="rId2"/>
+          <a:stretch/>
         </p:blipFill>
         <p:spPr>
           <a:xfrm>
-            <a:off x="671169" y="6620344"/>
-            <a:ext cx="6240754" cy="3120390"/>
-          </a:xfrm>
-          <a:prstGeom prst="rect">
-            <a:avLst/>
-          </a:prstGeom>
+            <a:off x="671040" y="6620400"/>
+            <a:ext cx="6240240" cy="3120120"/>
+          </a:xfrm>
+          <a:prstGeom prst="rect">
+            <a:avLst/>
+          </a:prstGeom>
+          <a:noFill/>
+          <a:ln w="0">
+            <a:noFill/>
+          </a:ln>
         </p:spPr>
       </p:pic>
       <p:pic>
         <p:nvPicPr>
-          <p:cNvPr id="4" name="object 4" descr=""/>
+          <p:cNvPr id="52" name="object 4" descr=""/>
           <p:cNvPicPr/>
           <p:nvPr/>
         </p:nvPicPr>
         <p:blipFill>
-          <a:blip r:embed="rId4" cstate="print"/>
-          <a:stretch>
-            <a:fillRect/>
-          </a:stretch>
+          <a:blip r:embed="rId3"/>
+          <a:stretch/>
         </p:blipFill>
         <p:spPr>
           <a:xfrm>
-            <a:off x="8375395" y="1106741"/>
-            <a:ext cx="4057154" cy="4552175"/>
-          </a:xfrm>
-          <a:prstGeom prst="rect">
-            <a:avLst/>
-          </a:prstGeom>
+            <a:off x="8375400" y="1106640"/>
+            <a:ext cx="4056840" cy="4551840"/>
+          </a:xfrm>
+          <a:prstGeom prst="rect">
+            <a:avLst/>
+          </a:prstGeom>
+          <a:noFill/>
+          <a:ln w="0">
+            <a:noFill/>
+          </a:ln>
         </p:spPr>
       </p:pic>
       <p:pic>
         <p:nvPicPr>
-          <p:cNvPr id="5" name="object 5" descr=""/>
+          <p:cNvPr id="53" name="object 5" descr=""/>
           <p:cNvPicPr/>
           <p:nvPr/>
         </p:nvPicPr>
         <p:blipFill>
-          <a:blip r:embed="rId5" cstate="print"/>
-          <a:stretch>
-            <a:fillRect/>
-          </a:stretch>
+          <a:blip r:embed="rId4"/>
+          <a:stretch/>
         </p:blipFill>
         <p:spPr>
           <a:xfrm>
-            <a:off x="877938" y="1551241"/>
-            <a:ext cx="6622694" cy="3725240"/>
-          </a:xfrm>
-          <a:prstGeom prst="rect">
-            <a:avLst/>
-          </a:prstGeom>
+            <a:off x="878040" y="1551240"/>
+            <a:ext cx="6622200" cy="3724920"/>
+          </a:xfrm>
+          <a:prstGeom prst="rect">
+            <a:avLst/>
+          </a:prstGeom>
+          <a:noFill/>
+          <a:ln w="0">
+            <a:noFill/>
+          </a:ln>
         </p:spPr>
       </p:pic>
     </p:spTree>
   </p:cSld>
-  <p:clrMapOvr>
-    <a:masterClrMapping/>
-  </p:clrMapOvr>
+  <mc:AlternateContent>
+    <mc:Choice Requires="p14">
+      <p:transition spd="slow" p14:dur="2000"/>
+    </mc:Choice>
+    <mc:Fallback>
+      <p:transition spd="slow"/>
+    </mc:Fallback>
+  </mc:AlternateContent>
 </p:sld>
 </file>
 
 <file path=ppt/slides/slide6.xml><?xml version="1.0" encoding="utf-8"?>
-<p:sld xmlns:a="http://schemas.openxmlformats.org/drawingml/2006/main" xmlns:r="http://schemas.openxmlformats.org/officeDocument/2006/relationships" xmlns:p="http://schemas.openxmlformats.org/presentationml/2006/main" showMasterSp="0">
+<p:sld xmlns:a="http://schemas.openxmlformats.org/drawingml/2006/main" xmlns:p="http://schemas.openxmlformats.org/presentationml/2006/main" xmlns:r="http://schemas.openxmlformats.org/officeDocument/2006/relationships" xmlns:p14="http://schemas.microsoft.com/office/powerpoint/2010/main" xmlns:p15="http://schemas.microsoft.com/office/powerpoint/2012/main" xmlns:mc="http://schemas.openxmlformats.org/markup-compatibility/2006" showMasterSp="0">
   <p:cSld>
     <p:spTree>
       <p:nvGrpSpPr>
@@ -3290,190 +5208,209 @@
       </p:grpSpPr>
       <p:pic>
         <p:nvPicPr>
-          <p:cNvPr id="2" name="object 2" descr=""/>
+          <p:cNvPr id="54" name="object 2" descr=""/>
           <p:cNvPicPr/>
           <p:nvPr/>
         </p:nvPicPr>
         <p:blipFill>
-          <a:blip r:embed="rId2" cstate="print"/>
-          <a:stretch>
-            <a:fillRect/>
-          </a:stretch>
+          <a:blip r:embed="rId1"/>
+          <a:stretch/>
         </p:blipFill>
         <p:spPr>
           <a:xfrm>
             <a:off x="0" y="0"/>
-            <a:ext cx="13411200" cy="10363200"/>
-          </a:xfrm>
-          <a:prstGeom prst="rect">
-            <a:avLst/>
-          </a:prstGeom>
+            <a:ext cx="13410720" cy="10362960"/>
+          </a:xfrm>
+          <a:prstGeom prst="rect">
+            <a:avLst/>
+          </a:prstGeom>
+          <a:noFill/>
+          <a:ln w="0">
+            <a:noFill/>
+          </a:ln>
         </p:spPr>
       </p:pic>
       <p:pic>
         <p:nvPicPr>
-          <p:cNvPr id="3" name="object 3" descr=""/>
+          <p:cNvPr id="55" name="object 3" descr=""/>
           <p:cNvPicPr/>
           <p:nvPr/>
         </p:nvPicPr>
         <p:blipFill>
-          <a:blip r:embed="rId3" cstate="print"/>
-          <a:stretch>
-            <a:fillRect/>
-          </a:stretch>
+          <a:blip r:embed="rId2"/>
+          <a:stretch/>
         </p:blipFill>
         <p:spPr>
           <a:xfrm>
-            <a:off x="2647695" y="4136418"/>
-            <a:ext cx="1329162" cy="1202686"/>
-          </a:xfrm>
-          <a:prstGeom prst="rect">
-            <a:avLst/>
-          </a:prstGeom>
+            <a:off x="2647800" y="4136400"/>
+            <a:ext cx="1328760" cy="1202400"/>
+          </a:xfrm>
+          <a:prstGeom prst="rect">
+            <a:avLst/>
+          </a:prstGeom>
+          <a:noFill/>
+          <a:ln w="0">
+            <a:noFill/>
+          </a:ln>
         </p:spPr>
       </p:pic>
       <p:pic>
         <p:nvPicPr>
-          <p:cNvPr id="4" name="object 4" descr=""/>
+          <p:cNvPr id="56" name="object 4" descr=""/>
           <p:cNvPicPr/>
           <p:nvPr/>
         </p:nvPicPr>
         <p:blipFill>
-          <a:blip r:embed="rId4" cstate="print"/>
-          <a:stretch>
-            <a:fillRect/>
-          </a:stretch>
+          <a:blip r:embed="rId3"/>
+          <a:stretch/>
         </p:blipFill>
         <p:spPr>
           <a:xfrm>
-            <a:off x="4467326" y="4161616"/>
-            <a:ext cx="900607" cy="865792"/>
-          </a:xfrm>
-          <a:prstGeom prst="rect">
-            <a:avLst/>
-          </a:prstGeom>
+            <a:off x="4467240" y="4161600"/>
+            <a:ext cx="900360" cy="865440"/>
+          </a:xfrm>
+          <a:prstGeom prst="rect">
+            <a:avLst/>
+          </a:prstGeom>
+          <a:noFill/>
+          <a:ln w="0">
+            <a:noFill/>
+          </a:ln>
         </p:spPr>
       </p:pic>
       <p:grpSp>
         <p:nvGrpSpPr>
-          <p:cNvPr id="5" name="object 5" descr=""/>
+          <p:cNvPr id="57" name="object 5"/>
           <p:cNvGrpSpPr/>
           <p:nvPr/>
         </p:nvGrpSpPr>
         <p:grpSpPr>
           <a:xfrm>
-            <a:off x="6031306" y="4284473"/>
-            <a:ext cx="3933190" cy="1845310"/>
-            <a:chOff x="6031306" y="4284473"/>
-            <a:chExt cx="3933190" cy="1845310"/>
+            <a:off x="6031440" y="4284360"/>
+            <a:ext cx="3932280" cy="1844280"/>
+            <a:chOff x="6031440" y="4284360"/>
+            <a:chExt cx="3932280" cy="1844280"/>
           </a:xfrm>
         </p:grpSpPr>
         <p:pic>
           <p:nvPicPr>
-            <p:cNvPr id="6" name="object 6" descr=""/>
+            <p:cNvPr id="58" name="object 6" descr=""/>
             <p:cNvPicPr/>
             <p:nvPr/>
           </p:nvPicPr>
           <p:blipFill>
-            <a:blip r:embed="rId5" cstate="print"/>
-            <a:stretch>
-              <a:fillRect/>
-            </a:stretch>
+            <a:blip r:embed="rId4"/>
+            <a:stretch/>
           </p:blipFill>
           <p:spPr>
             <a:xfrm>
-              <a:off x="6086921" y="4284473"/>
-              <a:ext cx="938481" cy="660195"/>
+              <a:off x="6086880" y="4284360"/>
+              <a:ext cx="938160" cy="659880"/>
             </a:xfrm>
             <a:prstGeom prst="rect">
               <a:avLst/>
             </a:prstGeom>
+            <a:noFill/>
+            <a:ln w="0">
+              <a:noFill/>
+            </a:ln>
           </p:spPr>
         </p:pic>
         <p:pic>
           <p:nvPicPr>
-            <p:cNvPr id="7" name="object 7" descr=""/>
+            <p:cNvPr id="59" name="object 7" descr=""/>
             <p:cNvPicPr/>
             <p:nvPr/>
           </p:nvPicPr>
           <p:blipFill>
-            <a:blip r:embed="rId6" cstate="print"/>
-            <a:stretch>
-              <a:fillRect/>
-            </a:stretch>
+            <a:blip r:embed="rId5"/>
+            <a:stretch/>
           </p:blipFill>
           <p:spPr>
             <a:xfrm>
-              <a:off x="6031306" y="4635884"/>
-              <a:ext cx="3932763" cy="1493402"/>
+              <a:off x="6031440" y="4635720"/>
+              <a:ext cx="3932280" cy="1492920"/>
             </a:xfrm>
             <a:prstGeom prst="rect">
               <a:avLst/>
             </a:prstGeom>
+            <a:noFill/>
+            <a:ln w="0">
+              <a:noFill/>
+            </a:ln>
           </p:spPr>
         </p:pic>
       </p:grpSp>
       <p:pic>
         <p:nvPicPr>
-          <p:cNvPr id="8" name="object 8" descr=""/>
+          <p:cNvPr id="60" name="object 8" descr=""/>
           <p:cNvPicPr/>
           <p:nvPr/>
         </p:nvPicPr>
         <p:blipFill>
-          <a:blip r:embed="rId7" cstate="print"/>
-          <a:stretch>
-            <a:fillRect/>
-          </a:stretch>
+          <a:blip r:embed="rId6"/>
+          <a:stretch/>
         </p:blipFill>
         <p:spPr>
           <a:xfrm>
-            <a:off x="8947558" y="6194966"/>
-            <a:ext cx="76629" cy="122317"/>
-          </a:xfrm>
-          <a:prstGeom prst="rect">
-            <a:avLst/>
-          </a:prstGeom>
+            <a:off x="8947440" y="6194880"/>
+            <a:ext cx="76320" cy="122040"/>
+          </a:xfrm>
+          <a:prstGeom prst="rect">
+            <a:avLst/>
+          </a:prstGeom>
+          <a:noFill/>
+          <a:ln w="0">
+            <a:noFill/>
+          </a:ln>
         </p:spPr>
       </p:pic>
       <p:pic>
         <p:nvPicPr>
-          <p:cNvPr id="9" name="object 9" descr=""/>
+          <p:cNvPr id="61" name="object 9" descr=""/>
           <p:cNvPicPr/>
           <p:nvPr/>
         </p:nvPicPr>
         <p:blipFill>
-          <a:blip r:embed="rId8" cstate="print"/>
-          <a:stretch>
-            <a:fillRect/>
-          </a:stretch>
+          <a:blip r:embed="rId7"/>
+          <a:stretch/>
         </p:blipFill>
         <p:spPr>
           <a:xfrm>
-            <a:off x="10849842" y="7276553"/>
-            <a:ext cx="327504" cy="360464"/>
-          </a:xfrm>
-          <a:prstGeom prst="rect">
-            <a:avLst/>
-          </a:prstGeom>
+            <a:off x="10849680" y="7276680"/>
+            <a:ext cx="327240" cy="360000"/>
+          </a:xfrm>
+          <a:prstGeom prst="rect">
+            <a:avLst/>
+          </a:prstGeom>
+          <a:noFill/>
+          <a:ln w="0">
+            <a:noFill/>
+          </a:ln>
         </p:spPr>
       </p:pic>
       <p:sp>
         <p:nvSpPr>
-          <p:cNvPr id="10" name="object 10" descr=""/>
+          <p:cNvPr id="62" name="object 10"/>
           <p:cNvSpPr/>
           <p:nvPr/>
         </p:nvSpPr>
         <p:spPr>
           <a:xfrm>
-            <a:off x="10983633" y="7836890"/>
-            <a:ext cx="85725" cy="56515"/>
+            <a:off x="10983600" y="7836840"/>
+            <a:ext cx="85320" cy="56160"/>
           </a:xfrm>
           <a:custGeom>
             <a:avLst/>
-            <a:gdLst/>
+            <a:gdLst>
+              <a:gd name="textAreaLeft" fmla="*/ 0 w 85320"/>
+              <a:gd name="textAreaRight" fmla="*/ 85680 w 85320"/>
+              <a:gd name="textAreaTop" fmla="*/ 0 h 56160"/>
+              <a:gd name="textAreaBottom" fmla="*/ 56520 h 56160"/>
+            </a:gdLst>
             <a:ahLst/>
             <a:cxnLst/>
-            <a:rect l="l" t="t" r="r" b="b"/>
+            <a:rect l="textAreaLeft" t="textAreaTop" r="textAreaRight" b="textAreaBottom"/>
             <a:pathLst>
               <a:path w="85725" h="56515">
                 <a:moveTo>
@@ -3612,52 +5549,83 @@
           <a:solidFill>
             <a:srgbClr val="000000"/>
           </a:solidFill>
-        </p:spPr>
+          <a:ln w="0">
+            <a:noFill/>
+          </a:ln>
+        </p:spPr>
+        <p:style>
+          <a:lnRef idx="0"/>
+          <a:fillRef idx="0"/>
+          <a:effectRef idx="0"/>
+          <a:fontRef idx="minor"/>
+        </p:style>
         <p:txBody>
-          <a:bodyPr wrap="square" lIns="0" tIns="0" rIns="0" bIns="0" rtlCol="0"/>
-          <a:lstStyle/>
-          <a:p/>
+          <a:bodyPr lIns="0" rIns="0" tIns="0" bIns="0" anchor="t">
+            <a:noAutofit/>
+          </a:bodyPr>
+          <a:p>
+            <a:pPr>
+              <a:lnSpc>
+                <a:spcPct val="100000"/>
+              </a:lnSpc>
+            </a:pPr>
+            <a:endParaRPr b="0" lang="en-US" sz="1800" strike="noStrike" u="none">
+              <a:solidFill>
+                <a:srgbClr val="ffffff"/>
+              </a:solidFill>
+              <a:effectLst/>
+              <a:uFillTx/>
+              <a:latin typeface="Arial"/>
+            </a:endParaRPr>
+          </a:p>
         </p:txBody>
       </p:sp>
       <p:pic>
         <p:nvPicPr>
-          <p:cNvPr id="11" name="object 11" descr=""/>
+          <p:cNvPr id="63" name="object 11" descr=""/>
           <p:cNvPicPr/>
           <p:nvPr/>
         </p:nvPicPr>
         <p:blipFill>
-          <a:blip r:embed="rId9" cstate="print"/>
-          <a:stretch>
-            <a:fillRect/>
-          </a:stretch>
+          <a:blip r:embed="rId8"/>
+          <a:stretch/>
         </p:blipFill>
         <p:spPr>
           <a:xfrm>
-            <a:off x="3166078" y="7734569"/>
-            <a:ext cx="512312" cy="425929"/>
-          </a:xfrm>
-          <a:prstGeom prst="rect">
-            <a:avLst/>
-          </a:prstGeom>
+            <a:off x="3166200" y="7734600"/>
+            <a:ext cx="511920" cy="425520"/>
+          </a:xfrm>
+          <a:prstGeom prst="rect">
+            <a:avLst/>
+          </a:prstGeom>
+          <a:noFill/>
+          <a:ln w="0">
+            <a:noFill/>
+          </a:ln>
         </p:spPr>
       </p:pic>
       <p:sp>
         <p:nvSpPr>
-          <p:cNvPr id="12" name="object 12" descr=""/>
+          <p:cNvPr id="64" name="object 12"/>
           <p:cNvSpPr/>
           <p:nvPr/>
         </p:nvSpPr>
         <p:spPr>
           <a:xfrm>
-            <a:off x="3496068" y="8319337"/>
-            <a:ext cx="55880" cy="41275"/>
+            <a:off x="3495960" y="8319240"/>
+            <a:ext cx="55440" cy="41040"/>
           </a:xfrm>
           <a:custGeom>
             <a:avLst/>
-            <a:gdLst/>
+            <a:gdLst>
+              <a:gd name="textAreaLeft" fmla="*/ 0 w 55440"/>
+              <a:gd name="textAreaRight" fmla="*/ 55800 w 55440"/>
+              <a:gd name="textAreaTop" fmla="*/ 0 h 41040"/>
+              <a:gd name="textAreaBottom" fmla="*/ 41400 h 41040"/>
+            </a:gdLst>
             <a:ahLst/>
             <a:cxnLst/>
-            <a:rect l="l" t="t" r="r" b="b"/>
+            <a:rect l="textAreaLeft" t="textAreaTop" r="textAreaRight" b="textAreaBottom"/>
             <a:pathLst>
               <a:path w="55879" h="41275">
                 <a:moveTo>
@@ -3814,30 +5782,59 @@
           <a:solidFill>
             <a:srgbClr val="000000"/>
           </a:solidFill>
-        </p:spPr>
+          <a:ln w="0">
+            <a:noFill/>
+          </a:ln>
+        </p:spPr>
+        <p:style>
+          <a:lnRef idx="0"/>
+          <a:fillRef idx="0"/>
+          <a:effectRef idx="0"/>
+          <a:fontRef idx="minor"/>
+        </p:style>
         <p:txBody>
-          <a:bodyPr wrap="square" lIns="0" tIns="0" rIns="0" bIns="0" rtlCol="0"/>
-          <a:lstStyle/>
-          <a:p/>
+          <a:bodyPr lIns="0" rIns="0" tIns="0" bIns="0" anchor="t">
+            <a:noAutofit/>
+          </a:bodyPr>
+          <a:p>
+            <a:pPr>
+              <a:lnSpc>
+                <a:spcPct val="100000"/>
+              </a:lnSpc>
+            </a:pPr>
+            <a:endParaRPr b="0" lang="en-US" sz="1800" strike="noStrike" u="none">
+              <a:solidFill>
+                <a:srgbClr val="ffffff"/>
+              </a:solidFill>
+              <a:effectLst/>
+              <a:uFillTx/>
+              <a:latin typeface="Arial"/>
+            </a:endParaRPr>
+          </a:p>
         </p:txBody>
       </p:sp>
       <p:sp>
         <p:nvSpPr>
-          <p:cNvPr id="13" name="object 13" descr=""/>
+          <p:cNvPr id="65" name="object 13"/>
           <p:cNvSpPr/>
           <p:nvPr/>
         </p:nvSpPr>
         <p:spPr>
           <a:xfrm>
-            <a:off x="1414170" y="3364204"/>
-            <a:ext cx="400685" cy="616585"/>
+            <a:off x="1414080" y="3364200"/>
+            <a:ext cx="400320" cy="616320"/>
           </a:xfrm>
           <a:custGeom>
             <a:avLst/>
-            <a:gdLst/>
+            <a:gdLst>
+              <a:gd name="textAreaLeft" fmla="*/ 0 w 400320"/>
+              <a:gd name="textAreaRight" fmla="*/ 400680 w 400320"/>
+              <a:gd name="textAreaTop" fmla="*/ 0 h 616320"/>
+              <a:gd name="textAreaBottom" fmla="*/ 616680 h 616320"/>
+            </a:gdLst>
             <a:ahLst/>
             <a:cxnLst/>
-            <a:rect l="l" t="t" r="r" b="b"/>
+            <a:rect l="textAreaLeft" t="textAreaTop" r="textAreaRight" b="textAreaBottom"/>
             <a:pathLst>
               <a:path w="400685" h="616585">
                 <a:moveTo>
@@ -4414,30 +6411,59 @@
           <a:solidFill>
             <a:srgbClr val="000000"/>
           </a:solidFill>
-        </p:spPr>
+          <a:ln w="0">
+            <a:noFill/>
+          </a:ln>
+        </p:spPr>
+        <p:style>
+          <a:lnRef idx="0"/>
+          <a:fillRef idx="0"/>
+          <a:effectRef idx="0"/>
+          <a:fontRef idx="minor"/>
+        </p:style>
         <p:txBody>
-          <a:bodyPr wrap="square" lIns="0" tIns="0" rIns="0" bIns="0" rtlCol="0"/>
-          <a:lstStyle/>
-          <a:p/>
+          <a:bodyPr lIns="0" rIns="0" tIns="0" bIns="0" anchor="t">
+            <a:noAutofit/>
+          </a:bodyPr>
+          <a:p>
+            <a:pPr>
+              <a:lnSpc>
+                <a:spcPct val="100000"/>
+              </a:lnSpc>
+            </a:pPr>
+            <a:endParaRPr b="0" lang="en-US" sz="1800" strike="noStrike" u="none">
+              <a:solidFill>
+                <a:srgbClr val="ffffff"/>
+              </a:solidFill>
+              <a:effectLst/>
+              <a:uFillTx/>
+              <a:latin typeface="Arial"/>
+            </a:endParaRPr>
+          </a:p>
         </p:txBody>
       </p:sp>
       <p:sp>
         <p:nvSpPr>
-          <p:cNvPr id="14" name="object 14" descr=""/>
+          <p:cNvPr id="66" name="object 14"/>
           <p:cNvSpPr/>
           <p:nvPr/>
         </p:nvSpPr>
         <p:spPr>
           <a:xfrm>
-            <a:off x="1554911" y="4193412"/>
-            <a:ext cx="100330" cy="58419"/>
+            <a:off x="1554840" y="4193280"/>
+            <a:ext cx="100080" cy="57960"/>
           </a:xfrm>
           <a:custGeom>
             <a:avLst/>
-            <a:gdLst/>
+            <a:gdLst>
+              <a:gd name="textAreaLeft" fmla="*/ 0 w 100080"/>
+              <a:gd name="textAreaRight" fmla="*/ 100440 w 100080"/>
+              <a:gd name="textAreaTop" fmla="*/ 0 h 57960"/>
+              <a:gd name="textAreaBottom" fmla="*/ 58320 h 57960"/>
+            </a:gdLst>
             <a:ahLst/>
             <a:cxnLst/>
-            <a:rect l="l" t="t" r="r" b="b"/>
+            <a:rect l="textAreaLeft" t="textAreaTop" r="textAreaRight" b="textAreaBottom"/>
             <a:pathLst>
               <a:path w="100330" h="58420">
                 <a:moveTo>
@@ -4639,30 +6665,59 @@
           <a:solidFill>
             <a:srgbClr val="000000"/>
           </a:solidFill>
-        </p:spPr>
+          <a:ln w="0">
+            <a:noFill/>
+          </a:ln>
+        </p:spPr>
+        <p:style>
+          <a:lnRef idx="0"/>
+          <a:fillRef idx="0"/>
+          <a:effectRef idx="0"/>
+          <a:fontRef idx="minor"/>
+        </p:style>
         <p:txBody>
-          <a:bodyPr wrap="square" lIns="0" tIns="0" rIns="0" bIns="0" rtlCol="0"/>
-          <a:lstStyle/>
-          <a:p/>
+          <a:bodyPr lIns="0" rIns="0" tIns="0" bIns="0" anchor="t">
+            <a:noAutofit/>
+          </a:bodyPr>
+          <a:p>
+            <a:pPr>
+              <a:lnSpc>
+                <a:spcPct val="100000"/>
+              </a:lnSpc>
+            </a:pPr>
+            <a:endParaRPr b="0" lang="en-US" sz="1800" strike="noStrike" u="none">
+              <a:solidFill>
+                <a:srgbClr val="ffffff"/>
+              </a:solidFill>
+              <a:effectLst/>
+              <a:uFillTx/>
+              <a:latin typeface="Arial"/>
+            </a:endParaRPr>
+          </a:p>
         </p:txBody>
       </p:sp>
       <p:sp>
         <p:nvSpPr>
-          <p:cNvPr id="15" name="object 15" descr=""/>
+          <p:cNvPr id="67" name="object 15"/>
           <p:cNvSpPr/>
           <p:nvPr/>
         </p:nvSpPr>
         <p:spPr>
           <a:xfrm>
-            <a:off x="9602788" y="2976816"/>
-            <a:ext cx="671195" cy="533400"/>
+            <a:off x="9602640" y="2976840"/>
+            <a:ext cx="670680" cy="533160"/>
           </a:xfrm>
           <a:custGeom>
             <a:avLst/>
-            <a:gdLst/>
+            <a:gdLst>
+              <a:gd name="textAreaLeft" fmla="*/ 0 w 670680"/>
+              <a:gd name="textAreaRight" fmla="*/ 671040 w 670680"/>
+              <a:gd name="textAreaTop" fmla="*/ 0 h 533160"/>
+              <a:gd name="textAreaBottom" fmla="*/ 533520 h 533160"/>
+            </a:gdLst>
             <a:ahLst/>
             <a:cxnLst/>
-            <a:rect l="l" t="t" r="r" b="b"/>
+            <a:rect l="textAreaLeft" t="textAreaTop" r="textAreaRight" b="textAreaBottom"/>
             <a:pathLst>
               <a:path w="671195" h="533400">
                 <a:moveTo>
@@ -5206,30 +7261,59 @@
           <a:solidFill>
             <a:srgbClr val="000000"/>
           </a:solidFill>
-        </p:spPr>
+          <a:ln w="0">
+            <a:noFill/>
+          </a:ln>
+        </p:spPr>
+        <p:style>
+          <a:lnRef idx="0"/>
+          <a:fillRef idx="0"/>
+          <a:effectRef idx="0"/>
+          <a:fontRef idx="minor"/>
+        </p:style>
         <p:txBody>
-          <a:bodyPr wrap="square" lIns="0" tIns="0" rIns="0" bIns="0" rtlCol="0"/>
-          <a:lstStyle/>
-          <a:p/>
+          <a:bodyPr lIns="0" rIns="0" tIns="0" bIns="0" anchor="t">
+            <a:noAutofit/>
+          </a:bodyPr>
+          <a:p>
+            <a:pPr>
+              <a:lnSpc>
+                <a:spcPct val="100000"/>
+              </a:lnSpc>
+            </a:pPr>
+            <a:endParaRPr b="0" lang="en-US" sz="1800" strike="noStrike" u="none">
+              <a:solidFill>
+                <a:srgbClr val="ffffff"/>
+              </a:solidFill>
+              <a:effectLst/>
+              <a:uFillTx/>
+              <a:latin typeface="Arial"/>
+            </a:endParaRPr>
+          </a:p>
         </p:txBody>
       </p:sp>
       <p:sp>
         <p:nvSpPr>
-          <p:cNvPr id="16" name="object 16" descr=""/>
+          <p:cNvPr id="68" name="object 16"/>
           <p:cNvSpPr/>
           <p:nvPr/>
         </p:nvSpPr>
         <p:spPr>
           <a:xfrm>
-            <a:off x="10019957" y="3740352"/>
-            <a:ext cx="56515" cy="82550"/>
+            <a:off x="10019880" y="3740400"/>
+            <a:ext cx="56160" cy="82080"/>
           </a:xfrm>
           <a:custGeom>
             <a:avLst/>
-            <a:gdLst/>
+            <a:gdLst>
+              <a:gd name="textAreaLeft" fmla="*/ 0 w 56160"/>
+              <a:gd name="textAreaRight" fmla="*/ 56520 w 56160"/>
+              <a:gd name="textAreaTop" fmla="*/ 0 h 82080"/>
+              <a:gd name="textAreaBottom" fmla="*/ 82440 h 82080"/>
+            </a:gdLst>
             <a:ahLst/>
             <a:cxnLst/>
-            <a:rect l="l" t="t" r="r" b="b"/>
+            <a:rect l="textAreaLeft" t="textAreaTop" r="textAreaRight" b="textAreaBottom"/>
             <a:pathLst>
               <a:path w="56515" h="82550">
                 <a:moveTo>
@@ -5464,23 +7548,52 @@
           <a:solidFill>
             <a:srgbClr val="000000"/>
           </a:solidFill>
-        </p:spPr>
+          <a:ln w="0">
+            <a:noFill/>
+          </a:ln>
+        </p:spPr>
+        <p:style>
+          <a:lnRef idx="0"/>
+          <a:fillRef idx="0"/>
+          <a:effectRef idx="0"/>
+          <a:fontRef idx="minor"/>
+        </p:style>
         <p:txBody>
-          <a:bodyPr wrap="square" lIns="0" tIns="0" rIns="0" bIns="0" rtlCol="0"/>
-          <a:lstStyle/>
-          <a:p/>
+          <a:bodyPr lIns="0" rIns="0" tIns="0" bIns="0" anchor="t">
+            <a:noAutofit/>
+          </a:bodyPr>
+          <a:p>
+            <a:pPr>
+              <a:lnSpc>
+                <a:spcPct val="100000"/>
+              </a:lnSpc>
+            </a:pPr>
+            <a:endParaRPr b="0" lang="en-US" sz="1800" strike="noStrike" u="none">
+              <a:solidFill>
+                <a:srgbClr val="ffffff"/>
+              </a:solidFill>
+              <a:effectLst/>
+              <a:uFillTx/>
+              <a:latin typeface="Arial"/>
+            </a:endParaRPr>
+          </a:p>
         </p:txBody>
       </p:sp>
     </p:spTree>
   </p:cSld>
-  <p:clrMapOvr>
-    <a:masterClrMapping/>
-  </p:clrMapOvr>
+  <mc:AlternateContent>
+    <mc:Choice Requires="p14">
+      <p:transition spd="slow" p14:dur="2000"/>
+    </mc:Choice>
+    <mc:Fallback>
+      <p:transition spd="slow"/>
+    </mc:Fallback>
+  </mc:AlternateContent>
 </p:sld>
 </file>
 
 <file path=ppt/slides/slide7.xml><?xml version="1.0" encoding="utf-8"?>
-<p:sld xmlns:a="http://schemas.openxmlformats.org/drawingml/2006/main" xmlns:r="http://schemas.openxmlformats.org/officeDocument/2006/relationships" xmlns:p="http://schemas.openxmlformats.org/presentationml/2006/main" showMasterSp="0">
+<p:sld xmlns:a="http://schemas.openxmlformats.org/drawingml/2006/main" xmlns:p="http://schemas.openxmlformats.org/presentationml/2006/main" xmlns:r="http://schemas.openxmlformats.org/officeDocument/2006/relationships" xmlns:p14="http://schemas.microsoft.com/office/powerpoint/2010/main" xmlns:p15="http://schemas.microsoft.com/office/powerpoint/2012/main" xmlns:mc="http://schemas.openxmlformats.org/markup-compatibility/2006" showMasterSp="0">
   <p:cSld>
     <p:spTree>
       <p:nvGrpSpPr>
@@ -5498,58 +7611,67 @@
       </p:grpSpPr>
       <p:pic>
         <p:nvPicPr>
-          <p:cNvPr id="2" name="object 2" descr=""/>
+          <p:cNvPr id="69" name="object 2" descr=""/>
           <p:cNvPicPr/>
           <p:nvPr/>
         </p:nvPicPr>
         <p:blipFill>
-          <a:blip r:embed="rId2" cstate="print"/>
-          <a:stretch>
-            <a:fillRect/>
-          </a:stretch>
+          <a:blip r:embed="rId1"/>
+          <a:stretch/>
         </p:blipFill>
         <p:spPr>
           <a:xfrm>
             <a:off x="0" y="0"/>
-            <a:ext cx="13411200" cy="10363200"/>
-          </a:xfrm>
-          <a:prstGeom prst="rect">
-            <a:avLst/>
-          </a:prstGeom>
+            <a:ext cx="13410720" cy="10362960"/>
+          </a:xfrm>
+          <a:prstGeom prst="rect">
+            <a:avLst/>
+          </a:prstGeom>
+          <a:noFill/>
+          <a:ln w="0">
+            <a:noFill/>
+          </a:ln>
         </p:spPr>
       </p:pic>
       <p:pic>
         <p:nvPicPr>
-          <p:cNvPr id="3" name="object 3" descr=""/>
+          <p:cNvPr id="70" name="object 3" descr=""/>
           <p:cNvPicPr/>
           <p:nvPr/>
         </p:nvPicPr>
         <p:blipFill>
-          <a:blip r:embed="rId3" cstate="print"/>
-          <a:stretch>
-            <a:fillRect/>
-          </a:stretch>
+          <a:blip r:embed="rId2"/>
+          <a:stretch/>
         </p:blipFill>
         <p:spPr>
           <a:xfrm>
-            <a:off x="2741764" y="3190620"/>
-            <a:ext cx="7886687" cy="3214681"/>
-          </a:xfrm>
-          <a:prstGeom prst="rect">
-            <a:avLst/>
-          </a:prstGeom>
+            <a:off x="2741760" y="3190680"/>
+            <a:ext cx="7886160" cy="3214440"/>
+          </a:xfrm>
+          <a:prstGeom prst="rect">
+            <a:avLst/>
+          </a:prstGeom>
+          <a:noFill/>
+          <a:ln w="0">
+            <a:noFill/>
+          </a:ln>
         </p:spPr>
       </p:pic>
     </p:spTree>
   </p:cSld>
-  <p:clrMapOvr>
-    <a:masterClrMapping/>
-  </p:clrMapOvr>
+  <mc:AlternateContent>
+    <mc:Choice Requires="p14">
+      <p:transition spd="slow" p14:dur="2000"/>
+    </mc:Choice>
+    <mc:Fallback>
+      <p:transition spd="slow"/>
+    </mc:Fallback>
+  </mc:AlternateContent>
 </p:sld>
 </file>
 
 <file path=ppt/slides/slide8.xml><?xml version="1.0" encoding="utf-8"?>
-<p:sld xmlns:a="http://schemas.openxmlformats.org/drawingml/2006/main" xmlns:r="http://schemas.openxmlformats.org/officeDocument/2006/relationships" xmlns:p="http://schemas.openxmlformats.org/presentationml/2006/main" showMasterSp="0">
+<p:sld xmlns:a="http://schemas.openxmlformats.org/drawingml/2006/main" xmlns:p="http://schemas.openxmlformats.org/presentationml/2006/main" xmlns:r="http://schemas.openxmlformats.org/officeDocument/2006/relationships" xmlns:p14="http://schemas.microsoft.com/office/powerpoint/2010/main" xmlns:p15="http://schemas.microsoft.com/office/powerpoint/2012/main" xmlns:mc="http://schemas.openxmlformats.org/markup-compatibility/2006" showMasterSp="0">
   <p:cSld>
     <p:spTree>
       <p:nvGrpSpPr>
@@ -5567,122 +7689,160 @@
       </p:grpSpPr>
       <p:pic>
         <p:nvPicPr>
-          <p:cNvPr id="2" name="object 2" descr=""/>
+          <p:cNvPr id="71" name="object 2" descr=""/>
           <p:cNvPicPr/>
           <p:nvPr/>
         </p:nvPicPr>
         <p:blipFill>
-          <a:blip r:embed="rId2" cstate="print"/>
-          <a:stretch>
-            <a:fillRect/>
-          </a:stretch>
+          <a:blip r:embed="rId1"/>
+          <a:stretch/>
         </p:blipFill>
         <p:spPr>
           <a:xfrm>
             <a:off x="0" y="0"/>
-            <a:ext cx="13411200" cy="10363200"/>
-          </a:xfrm>
-          <a:prstGeom prst="rect">
-            <a:avLst/>
-          </a:prstGeom>
+            <a:ext cx="13410720" cy="10362960"/>
+          </a:xfrm>
+          <a:prstGeom prst="rect">
+            <a:avLst/>
+          </a:prstGeom>
+          <a:noFill/>
+          <a:ln w="0">
+            <a:noFill/>
+          </a:ln>
         </p:spPr>
       </p:pic>
       <p:pic>
         <p:nvPicPr>
-          <p:cNvPr id="3" name="object 3" descr=""/>
+          <p:cNvPr id="72" name="object 3" descr=""/>
           <p:cNvPicPr/>
           <p:nvPr/>
         </p:nvPicPr>
         <p:blipFill>
-          <a:blip r:embed="rId3" cstate="print"/>
-          <a:stretch>
-            <a:fillRect/>
-          </a:stretch>
+          <a:blip r:embed="rId2"/>
+          <a:stretch/>
         </p:blipFill>
         <p:spPr>
           <a:xfrm>
-            <a:off x="755751" y="2534208"/>
-            <a:ext cx="6096000" cy="4571987"/>
-          </a:xfrm>
-          <a:prstGeom prst="rect">
-            <a:avLst/>
-          </a:prstGeom>
+            <a:off x="755640" y="2534040"/>
+            <a:ext cx="6095520" cy="4571640"/>
+          </a:xfrm>
+          <a:prstGeom prst="rect">
+            <a:avLst/>
+          </a:prstGeom>
+          <a:noFill/>
+          <a:ln w="0">
+            <a:noFill/>
+          </a:ln>
         </p:spPr>
       </p:pic>
       <p:sp>
         <p:nvSpPr>
-          <p:cNvPr id="4" name="object 4" descr=""/>
-          <p:cNvSpPr txBox="1"/>
+          <p:cNvPr id="73" name="object 4"/>
+          <p:cNvSpPr/>
           <p:nvPr/>
         </p:nvSpPr>
         <p:spPr>
           <a:xfrm>
-            <a:off x="687536" y="7264251"/>
-            <a:ext cx="3879850" cy="513080"/>
-          </a:xfrm>
-          <a:prstGeom prst="rect">
-            <a:avLst/>
-          </a:prstGeom>
-        </p:spPr>
+            <a:off x="687600" y="7264080"/>
+            <a:ext cx="3879360" cy="512640"/>
+          </a:xfrm>
+          <a:prstGeom prst="rect">
+            <a:avLst/>
+          </a:prstGeom>
+          <a:noFill/>
+          <a:ln w="0">
+            <a:noFill/>
+          </a:ln>
+        </p:spPr>
+        <p:style>
+          <a:lnRef idx="0"/>
+          <a:fillRef idx="0"/>
+          <a:effectRef idx="0"/>
+          <a:fontRef idx="minor"/>
+        </p:style>
         <p:txBody>
-          <a:bodyPr wrap="square" lIns="0" tIns="12700" rIns="0" bIns="0" rtlCol="0" vert="horz">
+          <a:bodyPr lIns="0" rIns="0" tIns="12600" bIns="0" anchor="t">
             <a:spAutoFit/>
           </a:bodyPr>
-          <a:lstStyle/>
           <a:p>
-            <a:pPr marL="12700">
+            <a:pPr marL="12600">
               <a:lnSpc>
                 <a:spcPct val="100000"/>
               </a:lnSpc>
               <a:spcBef>
-                <a:spcPts val="100"/>
+                <a:spcPts val="99"/>
               </a:spcBef>
             </a:pPr>
             <a:r>
-              <a:rPr dirty="0" sz="3200" spc="270">
+              <a:rPr b="0" lang="en-US" sz="3200" spc="269" strike="noStrike" u="none">
+                <a:solidFill>
+                  <a:srgbClr val="000000"/>
+                </a:solidFill>
+                <a:effectLst/>
+                <a:uFillTx/>
                 <a:latin typeface="Cambria"/>
-                <a:cs typeface="Cambria"/>
               </a:rPr>
               <a:t>(Genesis</a:t>
             </a:r>
             <a:r>
-              <a:rPr dirty="0" sz="3200" spc="275">
+              <a:rPr b="0" lang="en-US" sz="3200" spc="275" strike="noStrike" u="none">
+                <a:solidFill>
+                  <a:srgbClr val="000000"/>
+                </a:solidFill>
+                <a:effectLst/>
+                <a:uFillTx/>
                 <a:latin typeface="Cambria"/>
-                <a:cs typeface="Cambria"/>
               </a:rPr>
               <a:t> </a:t>
             </a:r>
             <a:r>
-              <a:rPr dirty="0" sz="3200" spc="180">
+              <a:rPr b="0" lang="en-US" sz="3200" spc="181" strike="noStrike" u="none">
+                <a:solidFill>
+                  <a:srgbClr val="000000"/>
+                </a:solidFill>
+                <a:effectLst/>
+                <a:uFillTx/>
                 <a:latin typeface="Cambria"/>
-                <a:cs typeface="Cambria"/>
               </a:rPr>
               <a:t>37:23-</a:t>
             </a:r>
             <a:r>
-              <a:rPr dirty="0" sz="3200" spc="114">
+              <a:rPr b="0" lang="en-US" sz="3200" spc="113" strike="noStrike" u="none">
+                <a:solidFill>
+                  <a:srgbClr val="000000"/>
+                </a:solidFill>
+                <a:effectLst/>
+                <a:uFillTx/>
                 <a:latin typeface="Cambria"/>
-                <a:cs typeface="Cambria"/>
               </a:rPr>
               <a:t>28)</a:t>
             </a:r>
-            <a:endParaRPr sz="3200">
-              <a:latin typeface="Cambria"/>
-              <a:cs typeface="Cambria"/>
+            <a:endParaRPr b="0" lang="en-US" sz="3200" strike="noStrike" u="none">
+              <a:solidFill>
+                <a:srgbClr val="000000"/>
+              </a:solidFill>
+              <a:effectLst/>
+              <a:uFillTx/>
+              <a:latin typeface="Arial"/>
             </a:endParaRPr>
           </a:p>
         </p:txBody>
       </p:sp>
     </p:spTree>
   </p:cSld>
-  <p:clrMapOvr>
-    <a:masterClrMapping/>
-  </p:clrMapOvr>
+  <mc:AlternateContent>
+    <mc:Choice Requires="p14">
+      <p:transition spd="slow" p14:dur="2000"/>
+    </mc:Choice>
+    <mc:Fallback>
+      <p:transition spd="slow"/>
+    </mc:Fallback>
+  </mc:AlternateContent>
 </p:sld>
 </file>
 
 <file path=ppt/slides/slide9.xml><?xml version="1.0" encoding="utf-8"?>
-<p:sld xmlns:a="http://schemas.openxmlformats.org/drawingml/2006/main" xmlns:r="http://schemas.openxmlformats.org/officeDocument/2006/relationships" xmlns:p="http://schemas.openxmlformats.org/presentationml/2006/main" showMasterSp="0">
+<p:sld xmlns:a="http://schemas.openxmlformats.org/drawingml/2006/main" xmlns:p="http://schemas.openxmlformats.org/presentationml/2006/main" xmlns:r="http://schemas.openxmlformats.org/officeDocument/2006/relationships" xmlns:p14="http://schemas.microsoft.com/office/powerpoint/2010/main" xmlns:p15="http://schemas.microsoft.com/office/powerpoint/2012/main" xmlns:mc="http://schemas.openxmlformats.org/markup-compatibility/2006" showMasterSp="0">
   <p:cSld>
     <p:spTree>
       <p:nvGrpSpPr>
@@ -5700,171 +7860,207 @@
       </p:grpSpPr>
       <p:pic>
         <p:nvPicPr>
-          <p:cNvPr id="2" name="object 2" descr=""/>
+          <p:cNvPr id="74" name="object 2" descr=""/>
           <p:cNvPicPr/>
           <p:nvPr/>
         </p:nvPicPr>
         <p:blipFill>
-          <a:blip r:embed="rId2" cstate="print"/>
-          <a:stretch>
-            <a:fillRect/>
-          </a:stretch>
+          <a:blip r:embed="rId1"/>
+          <a:stretch/>
         </p:blipFill>
         <p:spPr>
           <a:xfrm>
             <a:off x="0" y="0"/>
-            <a:ext cx="13411200" cy="10363200"/>
-          </a:xfrm>
-          <a:prstGeom prst="rect">
-            <a:avLst/>
-          </a:prstGeom>
+            <a:ext cx="13410720" cy="10362960"/>
+          </a:xfrm>
+          <a:prstGeom prst="rect">
+            <a:avLst/>
+          </a:prstGeom>
+          <a:noFill/>
+          <a:ln w="0">
+            <a:noFill/>
+          </a:ln>
         </p:spPr>
       </p:pic>
       <p:pic>
         <p:nvPicPr>
-          <p:cNvPr id="3" name="object 3" descr=""/>
+          <p:cNvPr id="75" name="object 3" descr=""/>
           <p:cNvPicPr/>
           <p:nvPr/>
         </p:nvPicPr>
         <p:blipFill>
-          <a:blip r:embed="rId3" cstate="print"/>
-          <a:stretch>
-            <a:fillRect/>
-          </a:stretch>
+          <a:blip r:embed="rId2"/>
+          <a:stretch/>
         </p:blipFill>
         <p:spPr>
           <a:xfrm>
-            <a:off x="3791991" y="359067"/>
-            <a:ext cx="5375325" cy="7132123"/>
-          </a:xfrm>
-          <a:prstGeom prst="rect">
-            <a:avLst/>
-          </a:prstGeom>
+            <a:off x="3791880" y="358920"/>
+            <a:ext cx="5374800" cy="7131600"/>
+          </a:xfrm>
+          <a:prstGeom prst="rect">
+            <a:avLst/>
+          </a:prstGeom>
+          <a:noFill/>
+          <a:ln w="0">
+            <a:noFill/>
+          </a:ln>
         </p:spPr>
       </p:pic>
       <p:pic>
         <p:nvPicPr>
-          <p:cNvPr id="4" name="object 4" descr=""/>
+          <p:cNvPr id="76" name="object 4" descr=""/>
           <p:cNvPicPr/>
           <p:nvPr/>
         </p:nvPicPr>
         <p:blipFill>
-          <a:blip r:embed="rId4" cstate="print"/>
-          <a:stretch>
-            <a:fillRect/>
-          </a:stretch>
+          <a:blip r:embed="rId3"/>
+          <a:stretch/>
         </p:blipFill>
         <p:spPr>
           <a:xfrm>
-            <a:off x="5065420" y="8311362"/>
-            <a:ext cx="2956744" cy="1787423"/>
-          </a:xfrm>
-          <a:prstGeom prst="rect">
-            <a:avLst/>
-          </a:prstGeom>
+            <a:off x="5065560" y="8311320"/>
+            <a:ext cx="2956320" cy="1787040"/>
+          </a:xfrm>
+          <a:prstGeom prst="rect">
+            <a:avLst/>
+          </a:prstGeom>
+          <a:noFill/>
+          <a:ln w="0">
+            <a:noFill/>
+          </a:ln>
         </p:spPr>
       </p:pic>
       <p:sp>
         <p:nvSpPr>
-          <p:cNvPr id="5" name="object 5" descr=""/>
-          <p:cNvSpPr txBox="1"/>
+          <p:cNvPr id="77" name="object 5"/>
+          <p:cNvSpPr/>
           <p:nvPr/>
         </p:nvSpPr>
         <p:spPr>
           <a:xfrm>
-            <a:off x="4954637" y="7670601"/>
-            <a:ext cx="3143250" cy="513080"/>
-          </a:xfrm>
-          <a:prstGeom prst="rect">
-            <a:avLst/>
-          </a:prstGeom>
-        </p:spPr>
+            <a:off x="4954680" y="7670520"/>
+            <a:ext cx="3142800" cy="512640"/>
+          </a:xfrm>
+          <a:prstGeom prst="rect">
+            <a:avLst/>
+          </a:prstGeom>
+          <a:noFill/>
+          <a:ln w="0">
+            <a:noFill/>
+          </a:ln>
+        </p:spPr>
+        <p:style>
+          <a:lnRef idx="0"/>
+          <a:fillRef idx="0"/>
+          <a:effectRef idx="0"/>
+          <a:fontRef idx="minor"/>
+        </p:style>
         <p:txBody>
-          <a:bodyPr wrap="square" lIns="0" tIns="12700" rIns="0" bIns="0" rtlCol="0" vert="horz">
+          <a:bodyPr lIns="0" rIns="0" tIns="12600" bIns="0" anchor="t">
             <a:spAutoFit/>
           </a:bodyPr>
-          <a:lstStyle/>
           <a:p>
-            <a:pPr marL="12700">
+            <a:pPr marL="12600">
               <a:lnSpc>
                 <a:spcPct val="100000"/>
               </a:lnSpc>
               <a:spcBef>
-                <a:spcPts val="100"/>
+                <a:spcPts val="99"/>
               </a:spcBef>
             </a:pPr>
             <a:r>
-              <a:rPr dirty="0" sz="3200" spc="295">
+              <a:rPr b="0" lang="en-US" sz="3200" spc="295" strike="noStrike" u="none">
+                <a:solidFill>
+                  <a:srgbClr val="000000"/>
+                </a:solidFill>
+                <a:effectLst/>
+                <a:uFillTx/>
                 <a:latin typeface="Cambria"/>
-                <a:cs typeface="Cambria"/>
               </a:rPr>
               <a:t>(Masten,</a:t>
             </a:r>
             <a:r>
-              <a:rPr dirty="0" sz="3200" spc="285">
+              <a:rPr b="0" lang="en-US" sz="3200" spc="286" strike="noStrike" u="none">
+                <a:solidFill>
+                  <a:srgbClr val="000000"/>
+                </a:solidFill>
+                <a:effectLst/>
+                <a:uFillTx/>
                 <a:latin typeface="Cambria"/>
-                <a:cs typeface="Cambria"/>
               </a:rPr>
               <a:t> </a:t>
             </a:r>
             <a:r>
-              <a:rPr dirty="0" sz="3200" spc="155">
+              <a:rPr b="0" lang="en-US" sz="3200" spc="156" strike="noStrike" u="none">
+                <a:solidFill>
+                  <a:srgbClr val="000000"/>
+                </a:solidFill>
+                <a:effectLst/>
+                <a:uFillTx/>
                 <a:latin typeface="Cambria"/>
-                <a:cs typeface="Cambria"/>
               </a:rPr>
               <a:t>2001)</a:t>
             </a:r>
-            <a:endParaRPr sz="3200">
-              <a:latin typeface="Cambria"/>
-              <a:cs typeface="Cambria"/>
+            <a:endParaRPr b="0" lang="en-US" sz="3200" strike="noStrike" u="none">
+              <a:solidFill>
+                <a:srgbClr val="000000"/>
+              </a:solidFill>
+              <a:effectLst/>
+              <a:uFillTx/>
+              <a:latin typeface="Arial"/>
             </a:endParaRPr>
           </a:p>
         </p:txBody>
       </p:sp>
     </p:spTree>
   </p:cSld>
-  <p:clrMapOvr>
-    <a:masterClrMapping/>
-  </p:clrMapOvr>
+  <mc:AlternateContent>
+    <mc:Choice Requires="p14">
+      <p:transition spd="slow" p14:dur="2000"/>
+    </mc:Choice>
+    <mc:Fallback>
+      <p:transition spd="slow"/>
+    </mc:Fallback>
+  </mc:AlternateContent>
 </p:sld>
 </file>
 
 <file path=ppt/theme/theme1.xml><?xml version="1.0" encoding="utf-8"?>
-<a:theme xmlns:a="http://schemas.openxmlformats.org/drawingml/2006/main" name="Office Theme">
+<a:theme xmlns:a="http://schemas.openxmlformats.org/drawingml/2006/main" xmlns:r="http://schemas.openxmlformats.org/officeDocument/2006/relationships" name="Office Theme">
   <a:themeElements>
     <a:clrScheme name="Office">
       <a:dk1>
-        <a:sysClr val="windowText" lastClr="000000"/>
+        <a:srgbClr val="000000"/>
       </a:dk1>
       <a:lt1>
-        <a:sysClr val="window" lastClr="FFFFFF"/>
+        <a:srgbClr val="ffffff"/>
       </a:lt1>
       <a:dk2>
-        <a:srgbClr val="1F497D"/>
+        <a:srgbClr val="1f497d"/>
       </a:dk2>
       <a:lt2>
-        <a:srgbClr val="EEECE1"/>
+        <a:srgbClr val="eeece1"/>
       </a:lt2>
       <a:accent1>
-        <a:srgbClr val="4F81BD"/>
+        <a:srgbClr val="4f81bd"/>
       </a:accent1>
       <a:accent2>
-        <a:srgbClr val="C0504D"/>
+        <a:srgbClr val="c0504d"/>
       </a:accent2>
       <a:accent3>
-        <a:srgbClr val="9BBB59"/>
+        <a:srgbClr val="9bbb59"/>
       </a:accent3>
       <a:accent4>
-        <a:srgbClr val="8064A2"/>
+        <a:srgbClr val="8064a2"/>
       </a:accent4>
       <a:accent5>
-        <a:srgbClr val="4BACC6"/>
+        <a:srgbClr val="4bacc6"/>
       </a:accent5>
       <a:accent6>
-        <a:srgbClr val="F79646"/>
+        <a:srgbClr val="f79646"/>
       </a:accent6>
       <a:hlink>
-        <a:srgbClr val="0000FF"/>
+        <a:srgbClr val="0000ff"/>
       </a:hlink>
       <a:folHlink>
         <a:srgbClr val="800080"/>
@@ -5872,242 +8068,134 @@
     </a:clrScheme>
     <a:fontScheme name="Office">
       <a:majorFont>
-        <a:latin typeface="Calibri"/>
+        <a:latin typeface="Calibri" pitchFamily="0" charset="1"/>
         <a:ea typeface=""/>
         <a:cs typeface=""/>
-        <a:font script="Jpan" typeface="ＭＳ Ｐゴシック"/>
-        <a:font script="Hang" typeface="맑은 고딕"/>
-        <a:font script="Hans" typeface="宋体"/>
-        <a:font script="Hant" typeface="新細明體"/>
-        <a:font script="Arab" typeface="Times New Roman"/>
-        <a:font script="Hebr" typeface="Times New Roman"/>
-        <a:font script="Thai" typeface="Angsana New"/>
-        <a:font script="Ethi" typeface="Nyala"/>
-        <a:font script="Beng" typeface="Vrinda"/>
-        <a:font script="Gujr" typeface="Shruti"/>
-        <a:font script="Khmr" typeface="MoolBoran"/>
-        <a:font script="Knda" typeface="Tunga"/>
-        <a:font script="Guru" typeface="Raavi"/>
-        <a:font script="Cans" typeface="Euphemia"/>
-        <a:font script="Cher" typeface="Plantagenet Cherokee"/>
-        <a:font script="Yiii" typeface="Microsoft Yi Baiti"/>
-        <a:font script="Tibt" typeface="Microsoft Himalaya"/>
-        <a:font script="Thaa" typeface="MV Boli"/>
-        <a:font script="Deva" typeface="Mangal"/>
-        <a:font script="Telu" typeface="Gautami"/>
-        <a:font script="Taml" typeface="Latha"/>
-        <a:font script="Syrc" typeface="Estrangelo Edessa"/>
-        <a:font script="Orya" typeface="Kalinga"/>
-        <a:font script="Mlym" typeface="Kartika"/>
-        <a:font script="Laoo" typeface="DokChampa"/>
-        <a:font script="Sinh" typeface="Iskoola Pota"/>
-        <a:font script="Mong" typeface="Mongolian Baiti"/>
-        <a:font script="Viet" typeface="Times New Roman"/>
-        <a:font script="Uigh" typeface="Microsoft Uighur"/>
       </a:majorFont>
       <a:minorFont>
-        <a:latin typeface="Calibri"/>
+        <a:latin typeface="Calibri" pitchFamily="0" charset="1"/>
         <a:ea typeface=""/>
         <a:cs typeface=""/>
-        <a:font script="Jpan" typeface="ＭＳ Ｐゴシック"/>
-        <a:font script="Hang" typeface="맑은 고딕"/>
-        <a:font script="Hans" typeface="宋体"/>
-        <a:font script="Hant" typeface="新細明體"/>
-        <a:font script="Arab" typeface="Arial"/>
-        <a:font script="Hebr" typeface="Arial"/>
-        <a:font script="Thai" typeface="Cordia New"/>
-        <a:font script="Ethi" typeface="Nyala"/>
-        <a:font script="Beng" typeface="Vrinda"/>
-        <a:font script="Gujr" typeface="Shruti"/>
-        <a:font script="Khmr" typeface="DaunPenh"/>
-        <a:font script="Knda" typeface="Tunga"/>
-        <a:font script="Guru" typeface="Raavi"/>
-        <a:font script="Cans" typeface="Euphemia"/>
-        <a:font script="Cher" typeface="Plantagenet Cherokee"/>
-        <a:font script="Yiii" typeface="Microsoft Yi Baiti"/>
-        <a:font script="Tibt" typeface="Microsoft Himalaya"/>
-        <a:font script="Thaa" typeface="MV Boli"/>
-        <a:font script="Deva" typeface="Mangal"/>
-        <a:font script="Telu" typeface="Gautami"/>
-        <a:font script="Taml" typeface="Latha"/>
-        <a:font script="Syrc" typeface="Estrangelo Edessa"/>
-        <a:font script="Orya" typeface="Kalinga"/>
-        <a:font script="Mlym" typeface="Kartika"/>
-        <a:font script="Laoo" typeface="DokChampa"/>
-        <a:font script="Sinh" typeface="Iskoola Pota"/>
-        <a:font script="Mong" typeface="Mongolian Baiti"/>
-        <a:font script="Viet" typeface="Arial"/>
-        <a:font script="Uigh" typeface="Microsoft Uighur"/>
       </a:minorFont>
     </a:fontScheme>
-    <a:fmtScheme name="Office">
+    <a:fmtScheme>
       <a:fillStyleLst>
         <a:solidFill>
           <a:schemeClr val="phClr"/>
         </a:solidFill>
-        <a:gradFill rotWithShape="1">
+        <a:gradFill>
           <a:gsLst>
             <a:gs pos="0">
               <a:schemeClr val="phClr">
                 <a:tint val="50000"/>
-                <a:satMod val="300000"/>
               </a:schemeClr>
             </a:gs>
             <a:gs pos="35000">
               <a:schemeClr val="phClr">
                 <a:tint val="37000"/>
-                <a:satMod val="300000"/>
               </a:schemeClr>
             </a:gs>
             <a:gs pos="100000">
               <a:schemeClr val="phClr">
                 <a:tint val="15000"/>
-                <a:satMod val="350000"/>
               </a:schemeClr>
             </a:gs>
           </a:gsLst>
           <a:lin ang="16200000" scaled="1"/>
+          <a:tileRect l="0" t="0" r="0" b="0"/>
         </a:gradFill>
-        <a:gradFill rotWithShape="1">
+        <a:gradFill>
           <a:gsLst>
             <a:gs pos="0">
               <a:schemeClr val="phClr">
                 <a:shade val="51000"/>
-                <a:satMod val="130000"/>
               </a:schemeClr>
             </a:gs>
             <a:gs pos="80000">
               <a:schemeClr val="phClr">
                 <a:shade val="93000"/>
-                <a:satMod val="130000"/>
               </a:schemeClr>
             </a:gs>
             <a:gs pos="100000">
               <a:schemeClr val="phClr">
                 <a:shade val="94000"/>
-                <a:satMod val="135000"/>
               </a:schemeClr>
             </a:gs>
           </a:gsLst>
           <a:lin ang="16200000" scaled="0"/>
+          <a:tileRect l="0" t="0" r="0" b="0"/>
         </a:gradFill>
       </a:fillStyleLst>
       <a:lnStyleLst>
         <a:ln w="9525" cap="flat" cmpd="sng" algn="ctr">
-          <a:solidFill>
-            <a:schemeClr val="phClr">
-              <a:shade val="95000"/>
-              <a:satMod val="105000"/>
-            </a:schemeClr>
-          </a:solidFill>
           <a:prstDash val="solid"/>
         </a:ln>
         <a:ln w="25400" cap="flat" cmpd="sng" algn="ctr">
-          <a:solidFill>
-            <a:schemeClr val="phClr"/>
-          </a:solidFill>
           <a:prstDash val="solid"/>
         </a:ln>
         <a:ln w="38100" cap="flat" cmpd="sng" algn="ctr">
-          <a:solidFill>
-            <a:schemeClr val="phClr"/>
-          </a:solidFill>
           <a:prstDash val="solid"/>
         </a:ln>
       </a:lnStyleLst>
       <a:effectStyleLst>
         <a:effectStyle>
-          <a:effectLst>
-            <a:outerShdw blurRad="40000" dist="20000" dir="5400000" rotWithShape="0">
-              <a:srgbClr val="000000">
-                <a:alpha val="38000"/>
-              </a:srgbClr>
-            </a:outerShdw>
-          </a:effectLst>
+          <a:effectLst/>
         </a:effectStyle>
         <a:effectStyle>
-          <a:effectLst>
-            <a:outerShdw blurRad="40000" dist="23000" dir="5400000" rotWithShape="0">
-              <a:srgbClr val="000000">
-                <a:alpha val="35000"/>
-              </a:srgbClr>
-            </a:outerShdw>
-          </a:effectLst>
+          <a:effectLst/>
         </a:effectStyle>
         <a:effectStyle>
-          <a:effectLst>
-            <a:outerShdw blurRad="40000" dist="23000" dir="5400000" rotWithShape="0">
-              <a:srgbClr val="000000">
-                <a:alpha val="35000"/>
-              </a:srgbClr>
-            </a:outerShdw>
-          </a:effectLst>
-          <a:scene3d>
-            <a:camera prst="orthographicFront">
-              <a:rot lat="0" lon="0" rev="0"/>
-            </a:camera>
-            <a:lightRig rig="threePt" dir="t">
-              <a:rot lat="0" lon="0" rev="1200000"/>
-            </a:lightRig>
-          </a:scene3d>
-          <a:sp3d>
-            <a:bevelT w="63500" h="25400"/>
-          </a:sp3d>
+          <a:effectLst/>
         </a:effectStyle>
       </a:effectStyleLst>
       <a:bgFillStyleLst>
         <a:solidFill>
           <a:schemeClr val="phClr"/>
         </a:solidFill>
-        <a:gradFill rotWithShape="1">
+        <a:gradFill>
           <a:gsLst>
             <a:gs pos="0">
               <a:schemeClr val="phClr">
                 <a:tint val="40000"/>
-                <a:satMod val="350000"/>
               </a:schemeClr>
             </a:gs>
             <a:gs pos="40000">
               <a:schemeClr val="phClr">
                 <a:tint val="45000"/>
                 <a:shade val="99000"/>
-                <a:satMod val="350000"/>
               </a:schemeClr>
             </a:gs>
             <a:gs pos="100000">
               <a:schemeClr val="phClr">
                 <a:shade val="20000"/>
-                <a:satMod val="255000"/>
               </a:schemeClr>
             </a:gs>
           </a:gsLst>
           <a:path path="circle">
             <a:fillToRect l="50000" t="-80000" r="50000" b="180000"/>
           </a:path>
+          <a:tileRect l="0" t="0" r="0" b="0"/>
         </a:gradFill>
-        <a:gradFill rotWithShape="1">
+        <a:gradFill>
           <a:gsLst>
             <a:gs pos="0">
               <a:schemeClr val="phClr">
                 <a:tint val="80000"/>
-                <a:satMod val="300000"/>
               </a:schemeClr>
             </a:gs>
             <a:gs pos="100000">
               <a:schemeClr val="phClr">
                 <a:shade val="30000"/>
-                <a:satMod val="200000"/>
               </a:schemeClr>
             </a:gs>
           </a:gsLst>
           <a:path path="circle">
             <a:fillToRect l="50000" t="50000" r="50000" b="50000"/>
           </a:path>
+          <a:tileRect l="0" t="0" r="0" b="0"/>
         </a:gradFill>
       </a:bgFillStyleLst>
     </a:fmtScheme>
   </a:themeElements>
-  <a:objectDefaults/>
-  <a:extraClrSchemeLst/>
 </a:theme>
 </file>